--- a/DriftLens_Presentation.pptx
+++ b/DriftLens_Presentation.pptx
@@ -14,6 +14,11 @@
     <p:sldId id="262" r:id="rId13"/>
     <p:sldId id="263" r:id="rId14"/>
     <p:sldId id="264" r:id="rId15"/>
+    <p:sldId id="265" r:id="rId16"/>
+    <p:sldId id="266" r:id="rId17"/>
+    <p:sldId id="267" r:id="rId18"/>
+    <p:sldId id="268" r:id="rId19"/>
+    <p:sldId id="269" r:id="rId20"/>
   </p:sldIdLst>
   <p:sldSz cx="12191695" cy="6858000" type="screen4x3"/>
   <p:notesSz cx="6858000" cy="9144000"/>
@@ -3111,7 +3116,7 @@
             <a:avLst/>
           </a:prstGeom>
           <a:solidFill>
-            <a:srgbClr val="090D16"/>
+            <a:srgbClr val="0B0F19"/>
           </a:solidFill>
           <a:ln>
             <a:noFill/>
@@ -3141,20 +3146,1276 @@
       </p:sp>
       <p:sp>
         <p:nvSpPr>
-          <p:cNvPr id="3" name="Rounded Rectangle 2"/>
+          <p:cNvPr id="3" name="Rectangle 2"/>
           <p:cNvSpPr/>
           <p:nvPr/>
         </p:nvSpPr>
         <p:spPr>
           <a:xfrm>
-            <a:off x="731520" y="1097280"/>
-            <a:ext cx="4754880" cy="411480"/>
+            <a:off x="0" y="0"/>
+            <a:ext cx="6095390" cy="54864"/>
+          </a:xfrm>
+          <a:prstGeom prst="rect">
+            <a:avLst/>
+          </a:prstGeom>
+          <a:solidFill>
+            <a:srgbClr val="38BDF8"/>
+          </a:solidFill>
+          <a:ln>
+            <a:noFill/>
+          </a:ln>
+        </p:spPr>
+        <p:style>
+          <a:lnRef idx="1">
+            <a:schemeClr val="accent1"/>
+          </a:lnRef>
+          <a:fillRef idx="3">
+            <a:schemeClr val="accent1"/>
+          </a:fillRef>
+          <a:effectRef idx="2">
+            <a:schemeClr val="accent1"/>
+          </a:effectRef>
+          <a:fontRef idx="minor">
+            <a:schemeClr val="lt1"/>
+          </a:fontRef>
+        </p:style>
+        <p:txBody>
+          <a:bodyPr rtlCol="0" anchor="ctr"/>
+          <a:lstStyle/>
+          <a:p>
+            <a:pPr algn="ctr"/>
+          </a:p>
+        </p:txBody>
+      </p:sp>
+      <p:sp>
+        <p:nvSpPr>
+          <p:cNvPr id="4" name="Rectangle 3"/>
+          <p:cNvSpPr/>
+          <p:nvPr/>
+        </p:nvSpPr>
+        <p:spPr>
+          <a:xfrm>
+            <a:off x="6095390" y="0"/>
+            <a:ext cx="6096304" cy="54864"/>
+          </a:xfrm>
+          <a:prstGeom prst="rect">
+            <a:avLst/>
+          </a:prstGeom>
+          <a:solidFill>
+            <a:srgbClr val="A855F7"/>
+          </a:solidFill>
+          <a:ln>
+            <a:noFill/>
+          </a:ln>
+        </p:spPr>
+        <p:style>
+          <a:lnRef idx="1">
+            <a:schemeClr val="accent1"/>
+          </a:lnRef>
+          <a:fillRef idx="3">
+            <a:schemeClr val="accent1"/>
+          </a:fillRef>
+          <a:effectRef idx="2">
+            <a:schemeClr val="accent1"/>
+          </a:effectRef>
+          <a:fontRef idx="minor">
+            <a:schemeClr val="lt1"/>
+          </a:fontRef>
+        </p:style>
+        <p:txBody>
+          <a:bodyPr rtlCol="0" anchor="ctr"/>
+          <a:lstStyle/>
+          <a:p>
+            <a:pPr algn="ctr"/>
+          </a:p>
+        </p:txBody>
+      </p:sp>
+      <p:sp>
+        <p:nvSpPr>
+          <p:cNvPr id="5" name="Rounded Rectangle 4"/>
+          <p:cNvSpPr/>
+          <p:nvPr/>
+        </p:nvSpPr>
+        <p:spPr>
+          <a:xfrm>
+            <a:off x="731520" y="731520"/>
+            <a:ext cx="5486400" cy="384048"/>
           </a:xfrm>
           <a:prstGeom prst="roundRect">
             <a:avLst/>
           </a:prstGeom>
           <a:solidFill>
-            <a:srgbClr val="121826"/>
+            <a:srgbClr val="0F1D38"/>
+          </a:solidFill>
+          <a:ln w="19050">
+            <a:solidFill>
+              <a:srgbClr val="38BDF8"/>
+            </a:solidFill>
+          </a:ln>
+        </p:spPr>
+        <p:style>
+          <a:lnRef idx="1">
+            <a:schemeClr val="accent1"/>
+          </a:lnRef>
+          <a:fillRef idx="3">
+            <a:schemeClr val="accent1"/>
+          </a:fillRef>
+          <a:effectRef idx="2">
+            <a:schemeClr val="accent1"/>
+          </a:effectRef>
+          <a:fontRef idx="minor">
+            <a:schemeClr val="lt1"/>
+          </a:fontRef>
+        </p:style>
+        <p:txBody>
+          <a:bodyPr rtlCol="0" anchor="ctr"/>
+          <a:lstStyle/>
+          <a:p>
+            <a:pPr algn="ctr">
+              <a:defRPr sz="1100" b="1">
+                <a:solidFill>
+                  <a:srgbClr val="38BDF8"/>
+                </a:solidFill>
+                <a:latin typeface="Arial"/>
+              </a:defRPr>
+            </a:pPr>
+            <a:r>
+              <a:t>⚡ HACKTOBERFEST 2026 HACK DAY SONIPAT — PROBLEM 5</a:t>
+            </a:r>
+          </a:p>
+        </p:txBody>
+      </p:sp>
+      <p:sp>
+        <p:nvSpPr>
+          <p:cNvPr id="6" name="TextBox 5"/>
+          <p:cNvSpPr txBox="1"/>
+          <p:nvPr/>
+        </p:nvSpPr>
+        <p:spPr>
+          <a:xfrm>
+            <a:off x="731520" y="1280160"/>
+            <a:ext cx="10698480" cy="2011680"/>
+          </a:xfrm>
+          <a:prstGeom prst="rect">
+            <a:avLst/>
+          </a:prstGeom>
+          <a:noFill/>
+        </p:spPr>
+        <p:txBody>
+          <a:bodyPr wrap="none">
+            <a:spAutoFit/>
+          </a:bodyPr>
+          <a:lstStyle/>
+          <a:p>
+            <a:pPr>
+              <a:defRPr sz="4600" b="1">
+                <a:solidFill>
+                  <a:srgbClr val="F8FAFC"/>
+                </a:solidFill>
+                <a:latin typeface="Arial"/>
+              </a:defRPr>
+            </a:pPr>
+            <a:r>
+              <a:t>DriftLens 🔍</a:t>
+            </a:r>
+          </a:p>
+          <a:p>
+            <a:pPr>
+              <a:spcBef>
+                <a:spcPts val="600"/>
+              </a:spcBef>
+              <a:defRPr sz="2300" b="1">
+                <a:solidFill>
+                  <a:srgbClr val="38BDF8"/>
+                </a:solidFill>
+                <a:latin typeface="Arial"/>
+              </a:defRPr>
+            </a:pPr>
+            <a:r>
+              <a:t>Automated Documentation Drift Detection for Pull Requests</a:t>
+            </a:r>
+          </a:p>
+          <a:p>
+            <a:pPr>
+              <a:spcBef>
+                <a:spcPts val="800"/>
+              </a:spcBef>
+              <a:defRPr sz="1600" i="1">
+                <a:solidFill>
+                  <a:srgbClr val="CBD5E1"/>
+                </a:solidFill>
+                <a:latin typeface="Arial"/>
+              </a:defRPr>
+            </a:pPr>
+            <a:r>
+              <a:t>"Catch the documentation a code change just made wrong."</a:t>
+            </a:r>
+          </a:p>
+        </p:txBody>
+      </p:sp>
+      <p:sp>
+        <p:nvSpPr>
+          <p:cNvPr id="7" name="Rounded Rectangle 6"/>
+          <p:cNvSpPr/>
+          <p:nvPr/>
+        </p:nvSpPr>
+        <p:spPr>
+          <a:xfrm>
+            <a:off x="731520" y="3657600"/>
+            <a:ext cx="3383280" cy="2468880"/>
+          </a:xfrm>
+          <a:prstGeom prst="roundRect">
+            <a:avLst/>
+          </a:prstGeom>
+          <a:solidFill>
+            <a:srgbClr val="0D2620"/>
+          </a:solidFill>
+          <a:ln w="19050">
+            <a:solidFill>
+              <a:srgbClr val="10B981"/>
+            </a:solidFill>
+          </a:ln>
+        </p:spPr>
+        <p:style>
+          <a:lnRef idx="1">
+            <a:schemeClr val="accent1"/>
+          </a:lnRef>
+          <a:fillRef idx="3">
+            <a:schemeClr val="accent1"/>
+          </a:fillRef>
+          <a:effectRef idx="2">
+            <a:schemeClr val="accent1"/>
+          </a:effectRef>
+          <a:fontRef idx="minor">
+            <a:schemeClr val="lt1"/>
+          </a:fontRef>
+        </p:style>
+        <p:txBody>
+          <a:bodyPr rtlCol="0" anchor="ctr" wrap="square"/>
+          <a:lstStyle/>
+          <a:p>
+            <a:pPr algn="ctr">
+              <a:defRPr b="1" sz="1400">
+                <a:solidFill>
+                  <a:srgbClr val="10B981"/>
+                </a:solidFill>
+              </a:defRPr>
+            </a:pPr>
+            <a:r>
+              <a:t>👤 TEAM LONECOMMITER</a:t>
+            </a:r>
+          </a:p>
+          <a:p>
+            <a:pPr>
+              <a:spcBef>
+                <a:spcPts val="800"/>
+              </a:spcBef>
+              <a:defRPr sz="1200">
+                <a:solidFill>
+                  <a:srgbClr val="F8FAFC"/>
+                </a:solidFill>
+              </a:defRPr>
+            </a:pPr>
+            <a:r>
+              <a:t>• Solo Developer: Yashvardhan Mundhra</a:t>
+            </a:r>
+            <a:br/>
+            <a:r>
+              <a:t>• Track: Developer Experience / Static Analysis</a:t>
+            </a:r>
+            <a:br/>
+            <a:r>
+              <a:t>• Repository: github.com/Marwadi-me/Driftlens</a:t>
+            </a:r>
+            <a:br/>
+            <a:r>
+              <a:t>• Focus: Factual Pre-Correction Detection</a:t>
+            </a:r>
+          </a:p>
+        </p:txBody>
+      </p:sp>
+      <p:sp>
+        <p:nvSpPr>
+          <p:cNvPr id="8" name="Rounded Rectangle 7"/>
+          <p:cNvSpPr/>
+          <p:nvPr/>
+        </p:nvSpPr>
+        <p:spPr>
+          <a:xfrm>
+            <a:off x="4389120" y="3657600"/>
+            <a:ext cx="3383280" cy="2468880"/>
+          </a:xfrm>
+          <a:prstGeom prst="roundRect">
+            <a:avLst/>
+          </a:prstGeom>
+          <a:solidFill>
+            <a:srgbClr val="1A1433"/>
+          </a:solidFill>
+          <a:ln w="19050">
+            <a:solidFill>
+              <a:srgbClr val="A855F7"/>
+            </a:solidFill>
+          </a:ln>
+        </p:spPr>
+        <p:style>
+          <a:lnRef idx="1">
+            <a:schemeClr val="accent1"/>
+          </a:lnRef>
+          <a:fillRef idx="3">
+            <a:schemeClr val="accent1"/>
+          </a:fillRef>
+          <a:effectRef idx="2">
+            <a:schemeClr val="accent1"/>
+          </a:effectRef>
+          <a:fontRef idx="minor">
+            <a:schemeClr val="lt1"/>
+          </a:fontRef>
+        </p:style>
+        <p:txBody>
+          <a:bodyPr rtlCol="0" anchor="ctr" wrap="square"/>
+          <a:lstStyle/>
+          <a:p>
+            <a:pPr algn="ctr">
+              <a:defRPr b="1" sz="1400">
+                <a:solidFill>
+                  <a:srgbClr val="A855F7"/>
+                </a:solidFill>
+              </a:defRPr>
+            </a:pPr>
+            <a:r>
+              <a:t>🤖 OPEN-WEIGHT AI ENGINE</a:t>
+            </a:r>
+          </a:p>
+          <a:p>
+            <a:pPr>
+              <a:spcBef>
+                <a:spcPts val="800"/>
+              </a:spcBef>
+              <a:defRPr sz="1200">
+                <a:solidFill>
+                  <a:srgbClr val="F8FAFC"/>
+                </a:solidFill>
+              </a:defRPr>
+            </a:pPr>
+            <a:r>
+              <a:t>• Model: Qwen 2.5 7B Instruct</a:t>
+            </a:r>
+            <a:br/>
+            <a:r>
+              <a:t>• 100% Hackathon Rule Compliant</a:t>
+            </a:r>
+            <a:br/>
+            <a:r>
+              <a:t>• Zero proprietary closed APIs (No GPT/Claude)</a:t>
+            </a:r>
+            <a:br/>
+            <a:r>
+              <a:t>• OpenAI-compatible vLLM/Ollama local runner</a:t>
+            </a:r>
+            <a:br/>
+            <a:r>
+              <a:t>• Bounded reasoning over deterministic AST</a:t>
+            </a:r>
+          </a:p>
+        </p:txBody>
+      </p:sp>
+      <p:sp>
+        <p:nvSpPr>
+          <p:cNvPr id="9" name="Rounded Rectangle 8"/>
+          <p:cNvSpPr/>
+          <p:nvPr/>
+        </p:nvSpPr>
+        <p:spPr>
+          <a:xfrm>
+            <a:off x="8046720" y="3657600"/>
+            <a:ext cx="3383280" cy="2468880"/>
+          </a:xfrm>
+          <a:prstGeom prst="roundRect">
+            <a:avLst/>
+          </a:prstGeom>
+          <a:solidFill>
+            <a:srgbClr val="261E0F"/>
+          </a:solidFill>
+          <a:ln w="19050">
+            <a:solidFill>
+              <a:srgbClr val="F59E0B"/>
+            </a:solidFill>
+          </a:ln>
+        </p:spPr>
+        <p:style>
+          <a:lnRef idx="1">
+            <a:schemeClr val="accent1"/>
+          </a:lnRef>
+          <a:fillRef idx="3">
+            <a:schemeClr val="accent1"/>
+          </a:fillRef>
+          <a:effectRef idx="2">
+            <a:schemeClr val="accent1"/>
+          </a:effectRef>
+          <a:fontRef idx="minor">
+            <a:schemeClr val="lt1"/>
+          </a:fontRef>
+        </p:style>
+        <p:txBody>
+          <a:bodyPr rtlCol="0" anchor="ctr" wrap="square"/>
+          <a:lstStyle/>
+          <a:p>
+            <a:pPr algn="ctr">
+              <a:defRPr b="1" sz="1400">
+                <a:solidFill>
+                  <a:srgbClr val="F59E0B"/>
+                </a:solidFill>
+              </a:defRPr>
+            </a:pPr>
+            <a:r>
+              <a:t>🚀 PRODUCTION DELIVERABLES</a:t>
+            </a:r>
+          </a:p>
+          <a:p>
+            <a:pPr>
+              <a:spcBef>
+                <a:spcPts val="800"/>
+              </a:spcBef>
+              <a:defRPr sz="1200">
+                <a:solidFill>
+                  <a:srgbClr val="F8FAFC"/>
+                </a:solidFill>
+              </a:defRPr>
+            </a:pPr>
+            <a:r>
+              <a:t>• CLI Tool &amp; Reusable GitHub Action</a:t>
+            </a:r>
+            <a:br/>
+            <a:r>
+              <a:t>• Interactive Studio with SVG Impact Graph</a:t>
+            </a:r>
+            <a:br/>
+            <a:r>
+              <a:t>• 1-Click Auto-Fix &amp; .patch Downloader</a:t>
+            </a:r>
+            <a:br/>
+            <a:r>
+              <a:t>• Starter README Generator for Zero-Doc repos</a:t>
+            </a:r>
+            <a:br/>
+            <a:r>
+              <a:t>• 70 Unit &amp; Integration Tests (100% Passing)</a:t>
+            </a:r>
+          </a:p>
+        </p:txBody>
+      </p:sp>
+    </p:spTree>
+  </p:cSld>
+  <p:clrMapOvr>
+    <a:masterClrMapping/>
+  </p:clrMapOvr>
+</p:sld>
+</file>
+
+<file path=ppt/slides/slide10.xml><?xml version="1.0" encoding="utf-8"?>
+<p:sld xmlns:a="http://schemas.openxmlformats.org/drawingml/2006/main" xmlns:p="http://schemas.openxmlformats.org/presentationml/2006/main" xmlns:r="http://schemas.openxmlformats.org/officeDocument/2006/relationships">
+  <p:cSld>
+    <p:spTree>
+      <p:nvGrpSpPr>
+        <p:cNvPr id="1" name=""/>
+        <p:cNvGrpSpPr/>
+        <p:nvPr/>
+      </p:nvGrpSpPr>
+      <p:grpSpPr/>
+      <p:sp>
+        <p:nvSpPr>
+          <p:cNvPr id="2" name="Rectangle 1"/>
+          <p:cNvSpPr/>
+          <p:nvPr/>
+        </p:nvSpPr>
+        <p:spPr>
+          <a:xfrm>
+            <a:off x="0" y="0"/>
+            <a:ext cx="12191695" cy="6858000"/>
+          </a:xfrm>
+          <a:prstGeom prst="rect">
+            <a:avLst/>
+          </a:prstGeom>
+          <a:solidFill>
+            <a:srgbClr val="0B0F19"/>
+          </a:solidFill>
+          <a:ln>
+            <a:noFill/>
+          </a:ln>
+        </p:spPr>
+        <p:style>
+          <a:lnRef idx="1">
+            <a:schemeClr val="accent1"/>
+          </a:lnRef>
+          <a:fillRef idx="3">
+            <a:schemeClr val="accent1"/>
+          </a:fillRef>
+          <a:effectRef idx="2">
+            <a:schemeClr val="accent1"/>
+          </a:effectRef>
+          <a:fontRef idx="minor">
+            <a:schemeClr val="lt1"/>
+          </a:fontRef>
+        </p:style>
+        <p:txBody>
+          <a:bodyPr rtlCol="0" anchor="ctr"/>
+          <a:lstStyle/>
+          <a:p>
+            <a:pPr algn="ctr"/>
+          </a:p>
+        </p:txBody>
+      </p:sp>
+      <p:sp>
+        <p:nvSpPr>
+          <p:cNvPr id="3" name="Rectangle 2"/>
+          <p:cNvSpPr/>
+          <p:nvPr/>
+        </p:nvSpPr>
+        <p:spPr>
+          <a:xfrm>
+            <a:off x="0" y="0"/>
+            <a:ext cx="6095390" cy="54864"/>
+          </a:xfrm>
+          <a:prstGeom prst="rect">
+            <a:avLst/>
+          </a:prstGeom>
+          <a:solidFill>
+            <a:srgbClr val="38BDF8"/>
+          </a:solidFill>
+          <a:ln>
+            <a:noFill/>
+          </a:ln>
+        </p:spPr>
+        <p:style>
+          <a:lnRef idx="1">
+            <a:schemeClr val="accent1"/>
+          </a:lnRef>
+          <a:fillRef idx="3">
+            <a:schemeClr val="accent1"/>
+          </a:fillRef>
+          <a:effectRef idx="2">
+            <a:schemeClr val="accent1"/>
+          </a:effectRef>
+          <a:fontRef idx="minor">
+            <a:schemeClr val="lt1"/>
+          </a:fontRef>
+        </p:style>
+        <p:txBody>
+          <a:bodyPr rtlCol="0" anchor="ctr"/>
+          <a:lstStyle/>
+          <a:p>
+            <a:pPr algn="ctr"/>
+          </a:p>
+        </p:txBody>
+      </p:sp>
+      <p:sp>
+        <p:nvSpPr>
+          <p:cNvPr id="4" name="Rectangle 3"/>
+          <p:cNvSpPr/>
+          <p:nvPr/>
+        </p:nvSpPr>
+        <p:spPr>
+          <a:xfrm>
+            <a:off x="6095390" y="0"/>
+            <a:ext cx="6096304" cy="54864"/>
+          </a:xfrm>
+          <a:prstGeom prst="rect">
+            <a:avLst/>
+          </a:prstGeom>
+          <a:solidFill>
+            <a:srgbClr val="A855F7"/>
+          </a:solidFill>
+          <a:ln>
+            <a:noFill/>
+          </a:ln>
+        </p:spPr>
+        <p:style>
+          <a:lnRef idx="1">
+            <a:schemeClr val="accent1"/>
+          </a:lnRef>
+          <a:fillRef idx="3">
+            <a:schemeClr val="accent1"/>
+          </a:fillRef>
+          <a:effectRef idx="2">
+            <a:schemeClr val="accent1"/>
+          </a:effectRef>
+          <a:fontRef idx="minor">
+            <a:schemeClr val="lt1"/>
+          </a:fontRef>
+        </p:style>
+        <p:txBody>
+          <a:bodyPr rtlCol="0" anchor="ctr"/>
+          <a:lstStyle/>
+          <a:p>
+            <a:pPr algn="ctr"/>
+          </a:p>
+        </p:txBody>
+      </p:sp>
+      <p:sp>
+        <p:nvSpPr>
+          <p:cNvPr id="5" name="TextBox 4"/>
+          <p:cNvSpPr txBox="1"/>
+          <p:nvPr/>
+        </p:nvSpPr>
+        <p:spPr>
+          <a:xfrm>
+            <a:off x="731520" y="384048"/>
+            <a:ext cx="10515600" cy="320040"/>
+          </a:xfrm>
+          <a:prstGeom prst="rect">
+            <a:avLst/>
+          </a:prstGeom>
+          <a:noFill/>
+        </p:spPr>
+        <p:txBody>
+          <a:bodyPr wrap="none">
+            <a:spAutoFit/>
+          </a:bodyPr>
+          <a:lstStyle/>
+          <a:p>
+            <a:pPr>
+              <a:defRPr sz="1050" b="1">
+                <a:solidFill>
+                  <a:srgbClr val="38BDF8"/>
+                </a:solidFill>
+                <a:latin typeface="Arial"/>
+              </a:defRPr>
+            </a:pPr>
+            <a:r>
+              <a:t>COMPLEX PARSING</a:t>
+            </a:r>
+          </a:p>
+        </p:txBody>
+      </p:sp>
+      <p:sp>
+        <p:nvSpPr>
+          <p:cNvPr id="6" name="TextBox 5"/>
+          <p:cNvSpPr txBox="1"/>
+          <p:nvPr/>
+        </p:nvSpPr>
+        <p:spPr>
+          <a:xfrm>
+            <a:off x="731520" y="658368"/>
+            <a:ext cx="10698480" cy="685800"/>
+          </a:xfrm>
+          <a:prstGeom prst="rect">
+            <a:avLst/>
+          </a:prstGeom>
+          <a:noFill/>
+        </p:spPr>
+        <p:txBody>
+          <a:bodyPr wrap="square">
+            <a:spAutoFit/>
+          </a:bodyPr>
+          <a:lstStyle/>
+          <a:p>
+            <a:pPr>
+              <a:defRPr sz="2600" b="1">
+                <a:solidFill>
+                  <a:srgbClr val="F8FAFC"/>
+                </a:solidFill>
+                <a:latin typeface="Arial"/>
+              </a:defRPr>
+            </a:pPr>
+            <a:r>
+              <a:t>Parsing Structured Markdown Tables &amp; API Signatures</a:t>
+            </a:r>
+          </a:p>
+          <a:p>
+            <a:pPr>
+              <a:spcBef>
+                <a:spcPts val="300"/>
+              </a:spcBef>
+              <a:defRPr sz="1300">
+                <a:solidFill>
+                  <a:srgbClr val="94A3B8"/>
+                </a:solidFill>
+                <a:latin typeface="Arial"/>
+              </a:defRPr>
+            </a:pPr>
+            <a:r>
+              <a:t>Moving beyond plain paragraph text: How DriftLens parses tabular data and function signatures.</a:t>
+            </a:r>
+          </a:p>
+        </p:txBody>
+      </p:sp>
+      <p:sp>
+        <p:nvSpPr>
+          <p:cNvPr id="7" name="Rounded Rectangle 6"/>
+          <p:cNvSpPr/>
+          <p:nvPr/>
+        </p:nvSpPr>
+        <p:spPr>
+          <a:xfrm>
+            <a:off x="731520" y="1554480"/>
+            <a:ext cx="5212080" cy="4754880"/>
+          </a:xfrm>
+          <a:prstGeom prst="roundRect">
+            <a:avLst/>
+          </a:prstGeom>
+          <a:solidFill>
+            <a:srgbClr val="121A2C"/>
+          </a:solidFill>
+          <a:ln w="19050">
+            <a:solidFill>
+              <a:srgbClr val="38BDF8"/>
+            </a:solidFill>
+          </a:ln>
+        </p:spPr>
+        <p:style>
+          <a:lnRef idx="1">
+            <a:schemeClr val="accent1"/>
+          </a:lnRef>
+          <a:fillRef idx="3">
+            <a:schemeClr val="accent1"/>
+          </a:fillRef>
+          <a:effectRef idx="2">
+            <a:schemeClr val="accent1"/>
+          </a:effectRef>
+          <a:fontRef idx="minor">
+            <a:schemeClr val="lt1"/>
+          </a:fontRef>
+        </p:style>
+        <p:txBody>
+          <a:bodyPr rtlCol="0" anchor="ctr" wrap="square"/>
+          <a:lstStyle/>
+          <a:p>
+            <a:pPr algn="ctr">
+              <a:defRPr sz="1700" b="1">
+                <a:solidFill>
+                  <a:srgbClr val="38BDF8"/>
+                </a:solidFill>
+              </a:defRPr>
+            </a:pPr>
+            <a:r>
+              <a:t>📊 Markdown Table Row Parser</a:t>
+            </a:r>
+          </a:p>
+          <a:p>
+            <a:br/>
+            <a:pPr>
+              <a:defRPr sz="1200">
+                <a:solidFill>
+                  <a:srgbClr val="F8FAFC"/>
+                </a:solidFill>
+              </a:defRPr>
+            </a:pPr>
+            <a:r>
+              <a:t>Markdown tables present a major challenge for standard linters because values are split across column pipes (|):</a:t>
+            </a:r>
+            <a:br/>
+          </a:p>
+          <a:p>
+            <a:pPr>
+              <a:spcBef>
+                <a:spcPts val="400"/>
+              </a:spcBef>
+              <a:defRPr sz="1150">
+                <a:solidFill>
+                  <a:srgbClr val="CBD5E1"/>
+                </a:solidFill>
+              </a:defRPr>
+            </a:pPr>
+            <a:r>
+              <a:t>• Header &amp; Delimiter Detection: Parses | Setting | Default | Description | and skips delimiter rows (|---|---|).</a:t>
+            </a:r>
+          </a:p>
+          <a:p>
+            <a:pPr>
+              <a:spcBef>
+                <a:spcPts val="400"/>
+              </a:spcBef>
+              <a:defRPr sz="1150">
+                <a:solidFill>
+                  <a:srgbClr val="CBD5E1"/>
+                </a:solidFill>
+              </a:defRPr>
+            </a:pPr>
+            <a:r>
+              <a:t>• Row Data Objectification: Transforms each row into key-value pairs: { Setting: 'TIMEOUT_SECONDS', Default: '30' }</a:t>
+            </a:r>
+          </a:p>
+          <a:p>
+            <a:pPr>
+              <a:spcBef>
+                <a:spcPts val="400"/>
+              </a:spcBef>
+              <a:defRPr sz="1150">
+                <a:solidFill>
+                  <a:srgbClr val="CBD5E1"/>
+                </a:solidFill>
+              </a:defRPr>
+            </a:pPr>
+            <a:r>
+              <a:t>• Precise Line Number Attribution: Tags the exact row line number in the source file, allowing 1-click in-table replacement.</a:t>
+            </a:r>
+          </a:p>
+        </p:txBody>
+      </p:sp>
+      <p:sp>
+        <p:nvSpPr>
+          <p:cNvPr id="8" name="Rounded Rectangle 7"/>
+          <p:cNvSpPr/>
+          <p:nvPr/>
+        </p:nvSpPr>
+        <p:spPr>
+          <a:xfrm>
+            <a:off x="6217920" y="1554480"/>
+            <a:ext cx="5212080" cy="4754880"/>
+          </a:xfrm>
+          <a:prstGeom prst="roundRect">
+            <a:avLst/>
+          </a:prstGeom>
+          <a:solidFill>
+            <a:srgbClr val="121A2C"/>
+          </a:solidFill>
+          <a:ln w="19050">
+            <a:solidFill>
+              <a:srgbClr val="A855F7"/>
+            </a:solidFill>
+          </a:ln>
+        </p:spPr>
+        <p:style>
+          <a:lnRef idx="1">
+            <a:schemeClr val="accent1"/>
+          </a:lnRef>
+          <a:fillRef idx="3">
+            <a:schemeClr val="accent1"/>
+          </a:fillRef>
+          <a:effectRef idx="2">
+            <a:schemeClr val="accent1"/>
+          </a:effectRef>
+          <a:fontRef idx="minor">
+            <a:schemeClr val="lt1"/>
+          </a:fontRef>
+        </p:style>
+        <p:txBody>
+          <a:bodyPr rtlCol="0" anchor="ctr" wrap="square"/>
+          <a:lstStyle/>
+          <a:p>
+            <a:pPr algn="ctr">
+              <a:defRPr sz="1700" b="1">
+                <a:solidFill>
+                  <a:srgbClr val="A855F7"/>
+                </a:solidFill>
+              </a:defRPr>
+            </a:pPr>
+            <a:r>
+              <a:t>🧩 Function Parameter Signature AST</a:t>
+            </a:r>
+          </a:p>
+          <a:p>
+            <a:br/>
+            <a:pPr>
+              <a:defRPr sz="1200">
+                <a:solidFill>
+                  <a:srgbClr val="F8FAFC"/>
+                </a:solidFill>
+              </a:defRPr>
+            </a:pPr>
+            <a:r>
+              <a:t>Detecting when a function signature changes parameters without renaming the function:</a:t>
+            </a:r>
+            <a:br/>
+          </a:p>
+          <a:p>
+            <a:pPr>
+              <a:spcBef>
+                <a:spcPts val="400"/>
+              </a:spcBef>
+              <a:defRPr sz="1150">
+                <a:solidFill>
+                  <a:srgbClr val="CBD5E1"/>
+                </a:solidFill>
+              </a:defRPr>
+            </a:pPr>
+            <a:r>
+              <a:t>• Regex AST Pattern: function fnName(params) | def fnName(params) | const fnName = (params) =&gt;</a:t>
+            </a:r>
+          </a:p>
+          <a:p>
+            <a:pPr>
+              <a:spcBef>
+                <a:spcPts val="400"/>
+              </a:spcBef>
+              <a:defRPr sz="1150">
+                <a:solidFill>
+                  <a:srgbClr val="CBD5E1"/>
+                </a:solidFill>
+              </a:defRPr>
+            </a:pPr>
+            <a:r>
+              <a:t>• Parameter Signature Capture: Stores value as 'registerUser(email, password)' vs 'registerUser(email, password, tenantId)'</a:t>
+            </a:r>
+          </a:p>
+          <a:p>
+            <a:pPr>
+              <a:spcBef>
+                <a:spcPts val="400"/>
+              </a:spcBef>
+              <a:defRPr sz="1150">
+                <a:solidFill>
+                  <a:srgbClr val="CBD5E1"/>
+                </a:solidFill>
+              </a:defRPr>
+            </a:pPr>
+            <a:r>
+              <a:t>• Signature Comparison: Detects parameter addition or deletion even when the function name itself remains unchanged.</a:t>
+            </a:r>
+          </a:p>
+          <a:p>
+            <a:pPr>
+              <a:spcBef>
+                <a:spcPts val="400"/>
+              </a:spcBef>
+              <a:defRPr sz="1150">
+                <a:solidFill>
+                  <a:srgbClr val="CBD5E1"/>
+                </a:solidFill>
+              </a:defRPr>
+            </a:pPr>
+            <a:r>
+              <a:t>• Accurate Remediation: Replaces the obsolete parameter list in prose tutorials while preserving contextual wording.</a:t>
+            </a:r>
+          </a:p>
+        </p:txBody>
+      </p:sp>
+    </p:spTree>
+  </p:cSld>
+  <p:clrMapOvr>
+    <a:masterClrMapping/>
+  </p:clrMapOvr>
+</p:sld>
+</file>
+
+<file path=ppt/slides/slide11.xml><?xml version="1.0" encoding="utf-8"?>
+<p:sld xmlns:a="http://schemas.openxmlformats.org/drawingml/2006/main" xmlns:p="http://schemas.openxmlformats.org/presentationml/2006/main" xmlns:r="http://schemas.openxmlformats.org/officeDocument/2006/relationships">
+  <p:cSld>
+    <p:spTree>
+      <p:nvGrpSpPr>
+        <p:cNvPr id="1" name=""/>
+        <p:cNvGrpSpPr/>
+        <p:nvPr/>
+      </p:nvGrpSpPr>
+      <p:grpSpPr/>
+      <p:sp>
+        <p:nvSpPr>
+          <p:cNvPr id="2" name="Rectangle 1"/>
+          <p:cNvSpPr/>
+          <p:nvPr/>
+        </p:nvSpPr>
+        <p:spPr>
+          <a:xfrm>
+            <a:off x="0" y="0"/>
+            <a:ext cx="12191695" cy="6858000"/>
+          </a:xfrm>
+          <a:prstGeom prst="rect">
+            <a:avLst/>
+          </a:prstGeom>
+          <a:solidFill>
+            <a:srgbClr val="0B0F19"/>
+          </a:solidFill>
+          <a:ln>
+            <a:noFill/>
+          </a:ln>
+        </p:spPr>
+        <p:style>
+          <a:lnRef idx="1">
+            <a:schemeClr val="accent1"/>
+          </a:lnRef>
+          <a:fillRef idx="3">
+            <a:schemeClr val="accent1"/>
+          </a:fillRef>
+          <a:effectRef idx="2">
+            <a:schemeClr val="accent1"/>
+          </a:effectRef>
+          <a:fontRef idx="minor">
+            <a:schemeClr val="lt1"/>
+          </a:fontRef>
+        </p:style>
+        <p:txBody>
+          <a:bodyPr rtlCol="0" anchor="ctr"/>
+          <a:lstStyle/>
+          <a:p>
+            <a:pPr algn="ctr"/>
+          </a:p>
+        </p:txBody>
+      </p:sp>
+      <p:sp>
+        <p:nvSpPr>
+          <p:cNvPr id="3" name="Rectangle 2"/>
+          <p:cNvSpPr/>
+          <p:nvPr/>
+        </p:nvSpPr>
+        <p:spPr>
+          <a:xfrm>
+            <a:off x="0" y="0"/>
+            <a:ext cx="6095390" cy="54864"/>
+          </a:xfrm>
+          <a:prstGeom prst="rect">
+            <a:avLst/>
+          </a:prstGeom>
+          <a:solidFill>
+            <a:srgbClr val="38BDF8"/>
+          </a:solidFill>
+          <a:ln>
+            <a:noFill/>
+          </a:ln>
+        </p:spPr>
+        <p:style>
+          <a:lnRef idx="1">
+            <a:schemeClr val="accent1"/>
+          </a:lnRef>
+          <a:fillRef idx="3">
+            <a:schemeClr val="accent1"/>
+          </a:fillRef>
+          <a:effectRef idx="2">
+            <a:schemeClr val="accent1"/>
+          </a:effectRef>
+          <a:fontRef idx="minor">
+            <a:schemeClr val="lt1"/>
+          </a:fontRef>
+        </p:style>
+        <p:txBody>
+          <a:bodyPr rtlCol="0" anchor="ctr"/>
+          <a:lstStyle/>
+          <a:p>
+            <a:pPr algn="ctr"/>
+          </a:p>
+        </p:txBody>
+      </p:sp>
+      <p:sp>
+        <p:nvSpPr>
+          <p:cNvPr id="4" name="Rectangle 3"/>
+          <p:cNvSpPr/>
+          <p:nvPr/>
+        </p:nvSpPr>
+        <p:spPr>
+          <a:xfrm>
+            <a:off x="6095390" y="0"/>
+            <a:ext cx="6096304" cy="54864"/>
+          </a:xfrm>
+          <a:prstGeom prst="rect">
+            <a:avLst/>
+          </a:prstGeom>
+          <a:solidFill>
+            <a:srgbClr val="A855F7"/>
+          </a:solidFill>
+          <a:ln>
+            <a:noFill/>
+          </a:ln>
+        </p:spPr>
+        <p:style>
+          <a:lnRef idx="1">
+            <a:schemeClr val="accent1"/>
+          </a:lnRef>
+          <a:fillRef idx="3">
+            <a:schemeClr val="accent1"/>
+          </a:fillRef>
+          <a:effectRef idx="2">
+            <a:schemeClr val="accent1"/>
+          </a:effectRef>
+          <a:fontRef idx="minor">
+            <a:schemeClr val="lt1"/>
+          </a:fontRef>
+        </p:style>
+        <p:txBody>
+          <a:bodyPr rtlCol="0" anchor="ctr"/>
+          <a:lstStyle/>
+          <a:p>
+            <a:pPr algn="ctr"/>
+          </a:p>
+        </p:txBody>
+      </p:sp>
+      <p:sp>
+        <p:nvSpPr>
+          <p:cNvPr id="5" name="TextBox 4"/>
+          <p:cNvSpPr txBox="1"/>
+          <p:nvPr/>
+        </p:nvSpPr>
+        <p:spPr>
+          <a:xfrm>
+            <a:off x="731520" y="384048"/>
+            <a:ext cx="10515600" cy="320040"/>
+          </a:xfrm>
+          <a:prstGeom prst="rect">
+            <a:avLst/>
+          </a:prstGeom>
+          <a:noFill/>
+        </p:spPr>
+        <p:txBody>
+          <a:bodyPr wrap="none">
+            <a:spAutoFit/>
+          </a:bodyPr>
+          <a:lstStyle/>
+          <a:p>
+            <a:pPr>
+              <a:defRPr sz="1050" b="1">
+                <a:solidFill>
+                  <a:srgbClr val="38BDF8"/>
+                </a:solidFill>
+                <a:latin typeface="Arial"/>
+              </a:defRPr>
+            </a:pPr>
+            <a:r>
+              <a:t>STANDOUT INNOVATION</a:t>
+            </a:r>
+          </a:p>
+        </p:txBody>
+      </p:sp>
+      <p:sp>
+        <p:nvSpPr>
+          <p:cNvPr id="6" name="TextBox 5"/>
+          <p:cNvSpPr txBox="1"/>
+          <p:nvPr/>
+        </p:nvSpPr>
+        <p:spPr>
+          <a:xfrm>
+            <a:off x="731520" y="658368"/>
+            <a:ext cx="10698480" cy="685800"/>
+          </a:xfrm>
+          <a:prstGeom prst="rect">
+            <a:avLst/>
+          </a:prstGeom>
+          <a:noFill/>
+        </p:spPr>
+        <p:txBody>
+          <a:bodyPr wrap="square">
+            <a:spAutoFit/>
+          </a:bodyPr>
+          <a:lstStyle/>
+          <a:p>
+            <a:pPr>
+              <a:defRPr sz="2600" b="1">
+                <a:solidFill>
+                  <a:srgbClr val="F8FAFC"/>
+                </a:solidFill>
+                <a:latin typeface="Arial"/>
+              </a:defRPr>
+            </a:pPr>
+            <a:r>
+              <a:t>Starter README.md Generator for Zero-Doc Codebases</a:t>
+            </a:r>
+          </a:p>
+          <a:p>
+            <a:pPr>
+              <a:spcBef>
+                <a:spcPts val="300"/>
+              </a:spcBef>
+              <a:defRPr sz="1300">
+                <a:solidFill>
+                  <a:srgbClr val="94A3B8"/>
+                </a:solidFill>
+                <a:latin typeface="Arial"/>
+              </a:defRPr>
+            </a:pPr>
+            <a:r>
+              <a:t>What happens if a project has no documentation at all? DriftLens synthesizes one from verified code implementation.</a:t>
+            </a:r>
+          </a:p>
+        </p:txBody>
+      </p:sp>
+      <p:sp>
+        <p:nvSpPr>
+          <p:cNvPr id="7" name="Rounded Rectangle 6"/>
+          <p:cNvSpPr/>
+          <p:nvPr/>
+        </p:nvSpPr>
+        <p:spPr>
+          <a:xfrm>
+            <a:off x="731520" y="1554480"/>
+            <a:ext cx="10698480" cy="1828800"/>
+          </a:xfrm>
+          <a:prstGeom prst="roundRect">
+            <a:avLst/>
+          </a:prstGeom>
+          <a:solidFill>
+            <a:srgbClr val="0F1D38"/>
+          </a:solidFill>
+          <a:ln w="19050">
+            <a:solidFill>
+              <a:srgbClr val="38BDF8"/>
+            </a:solidFill>
+          </a:ln>
+        </p:spPr>
+        <p:style>
+          <a:lnRef idx="1">
+            <a:schemeClr val="accent1"/>
+          </a:lnRef>
+          <a:fillRef idx="3">
+            <a:schemeClr val="accent1"/>
+          </a:fillRef>
+          <a:effectRef idx="2">
+            <a:schemeClr val="accent1"/>
+          </a:effectRef>
+          <a:fontRef idx="minor">
+            <a:schemeClr val="lt1"/>
+          </a:fontRef>
+        </p:style>
+        <p:txBody>
+          <a:bodyPr rtlCol="0" anchor="ctr" wrap="square"/>
+          <a:lstStyle/>
+          <a:p>
+            <a:pPr algn="ctr">
+              <a:defRPr sz="1800" b="1">
+                <a:solidFill>
+                  <a:srgbClr val="38BDF8"/>
+                </a:solidFill>
+              </a:defRPr>
+            </a:pPr>
+            <a:r>
+              <a:t>✨ Instant Codebase Documentation Synthesis</a:t>
+            </a:r>
+          </a:p>
+          <a:p>
+            <a:pPr>
+              <a:spcBef>
+                <a:spcPts val="600"/>
+              </a:spcBef>
+              <a:defRPr sz="1400">
+                <a:solidFill>
+                  <a:srgbClr val="10B981"/>
+                </a:solidFill>
+                <a:latin typeface="Consolas"/>
+              </a:defRPr>
+            </a:pPr>
+            <a:r>
+              <a:t>driftlens generate-readme --repo ./my-project &gt; README.md</a:t>
+            </a:r>
+          </a:p>
+          <a:p>
+            <a:pPr>
+              <a:spcBef>
+                <a:spcPts val="600"/>
+              </a:spcBef>
+              <a:defRPr sz="1200">
+                <a:solidFill>
+                  <a:srgbClr val="F8FAFC"/>
+                </a:solidFill>
+              </a:defRPr>
+            </a:pPr>
+            <a:r>
+              <a:t>Instead of leaving repositories with missing documentation, DriftLens inspects the codebase, extracts runtime configurations, CLI flags, and routes, and automatically generates a structured starter README.md.</a:t>
+            </a:r>
+          </a:p>
+        </p:txBody>
+      </p:sp>
+      <p:sp>
+        <p:nvSpPr>
+          <p:cNvPr id="8" name="Rounded Rectangle 7"/>
+          <p:cNvSpPr/>
+          <p:nvPr/>
+        </p:nvSpPr>
+        <p:spPr>
+          <a:xfrm>
+            <a:off x="731520" y="3566160"/>
+            <a:ext cx="3474720" cy="2743200"/>
+          </a:xfrm>
+          <a:prstGeom prst="roundRect">
+            <a:avLst/>
+          </a:prstGeom>
+          <a:solidFill>
+            <a:srgbClr val="121A2C"/>
           </a:solidFill>
           <a:ln w="15240">
             <a:solidFill>
@@ -3177,55 +4438,18 @@
           </a:fontRef>
         </p:style>
         <p:txBody>
-          <a:bodyPr rtlCol="0" anchor="ctr"/>
+          <a:bodyPr rtlCol="0" anchor="ctr" wrap="square"/>
           <a:lstStyle/>
           <a:p>
             <a:pPr algn="ctr">
-              <a:defRPr sz="1200" b="1">
+              <a:defRPr sz="1500" b="1">
                 <a:solidFill>
                   <a:srgbClr val="38BDF8"/>
                 </a:solidFill>
-                <a:latin typeface="Arial"/>
-              </a:defRPr>
-            </a:pPr>
-            <a:r>
-              <a:t>★ Hacktoberfest 2026 Hack Day Sonipat — Problem 5</a:t>
-            </a:r>
-          </a:p>
-        </p:txBody>
-      </p:sp>
-      <p:sp>
-        <p:nvSpPr>
-          <p:cNvPr id="4" name="TextBox 3"/>
-          <p:cNvSpPr txBox="1"/>
-          <p:nvPr/>
-        </p:nvSpPr>
-        <p:spPr>
-          <a:xfrm>
-            <a:off x="731520" y="1645920"/>
-            <a:ext cx="10515600" cy="1371600"/>
-          </a:xfrm>
-          <a:prstGeom prst="rect">
-            <a:avLst/>
-          </a:prstGeom>
-          <a:noFill/>
-        </p:spPr>
-        <p:txBody>
-          <a:bodyPr wrap="none">
-            <a:spAutoFit/>
-          </a:bodyPr>
-          <a:lstStyle/>
-          <a:p>
-            <a:pPr>
-              <a:defRPr sz="4800" b="1">
-                <a:solidFill>
-                  <a:srgbClr val="F8FAFC"/>
-                </a:solidFill>
-                <a:latin typeface="Arial"/>
-              </a:defRPr>
-            </a:pPr>
-            <a:r>
-              <a:t>DriftLens 🔍</a:t>
+              </a:defRPr>
+            </a:pPr>
+            <a:r>
+              <a:t>⚙️ Configuration Table</a:t>
             </a:r>
           </a:p>
           <a:p>
@@ -3233,55 +4457,38 @@
               <a:spcBef>
                 <a:spcPts val="800"/>
               </a:spcBef>
-              <a:defRPr sz="2400">
-                <a:solidFill>
-                  <a:srgbClr val="38BDF8"/>
-                </a:solidFill>
-                <a:latin typeface="Arial"/>
-              </a:defRPr>
-            </a:pPr>
-            <a:r>
-              <a:t>Automated Documentation Drift Detection for Pull Requests</a:t>
-            </a:r>
-          </a:p>
-          <a:p>
-            <a:pPr>
-              <a:spcBef>
-                <a:spcPts val="1200"/>
-              </a:spcBef>
-              <a:defRPr sz="1800" i="1">
-                <a:solidFill>
-                  <a:srgbClr val="94A3B8"/>
-                </a:solidFill>
-                <a:latin typeface="Arial"/>
-              </a:defRPr>
-            </a:pPr>
-            <a:r>
-              <a:t>"Catch the documentation a code change just made wrong."</a:t>
-            </a:r>
-          </a:p>
-        </p:txBody>
-      </p:sp>
-      <p:sp>
-        <p:nvSpPr>
-          <p:cNvPr id="5" name="Rounded Rectangle 4"/>
+              <a:defRPr sz="1200">
+                <a:solidFill>
+                  <a:srgbClr val="F8FAFC"/>
+                </a:solidFill>
+              </a:defRPr>
+            </a:pPr>
+            <a:r>
+              <a:t>Extracts DEFAULT_TIMEOUT, MAX_RETRIES, PORT from code and formats them into a clean Markdown table with source file provenance.</a:t>
+            </a:r>
+          </a:p>
+        </p:txBody>
+      </p:sp>
+      <p:sp>
+        <p:nvSpPr>
+          <p:cNvPr id="9" name="Rounded Rectangle 8"/>
           <p:cNvSpPr/>
           <p:nvPr/>
         </p:nvSpPr>
         <p:spPr>
           <a:xfrm>
-            <a:off x="731520" y="4114800"/>
-            <a:ext cx="3291840" cy="2011680"/>
+            <a:off x="4297680" y="3566160"/>
+            <a:ext cx="3474720" cy="2743200"/>
           </a:xfrm>
           <a:prstGeom prst="roundRect">
             <a:avLst/>
           </a:prstGeom>
           <a:solidFill>
-            <a:srgbClr val="121826"/>
+            <a:srgbClr val="121A2C"/>
           </a:solidFill>
           <a:ln w="15240">
             <a:solidFill>
-              <a:srgbClr val="1F293D"/>
+              <a:srgbClr val="A855F7"/>
             </a:solidFill>
           </a:ln>
         </p:spPr>
@@ -3304,15 +4511,14 @@
           <a:lstStyle/>
           <a:p>
             <a:pPr algn="ctr">
-              <a:defRPr sz="1600" b="1">
-                <a:solidFill>
-                  <a:srgbClr val="10B981"/>
-                </a:solidFill>
-                <a:latin typeface="Arial"/>
-              </a:defRPr>
-            </a:pPr>
-            <a:r>
-              <a:t>Team LoneCommiter</a:t>
+              <a:defRPr sz="1500" b="1">
+                <a:solidFill>
+                  <a:srgbClr val="A855F7"/>
+                </a:solidFill>
+              </a:defRPr>
+            </a:pPr>
+            <a:r>
+              <a:t>💻 CLI Arguments Table</a:t>
             </a:r>
           </a:p>
           <a:p>
@@ -3320,50 +4526,38 @@
               <a:spcBef>
                 <a:spcPts val="800"/>
               </a:spcBef>
-              <a:defRPr sz="1300">
+              <a:defRPr sz="1200">
                 <a:solidFill>
                   <a:srgbClr val="F8FAFC"/>
                 </a:solidFill>
               </a:defRPr>
             </a:pPr>
             <a:r>
-              <a:t>• Yashvardhan Mundhra</a:t>
-            </a:r>
-            <a:br/>
-            <a:r>
-              <a:t>• Role: Full-Stack Developer</a:t>
-            </a:r>
-            <a:br/>
-            <a:r>
-              <a:t>• Track: Developer Experience</a:t>
-            </a:r>
-            <a:br/>
-            <a:r>
-              <a:t>• Category: Static Analysis</a:t>
-            </a:r>
-          </a:p>
-        </p:txBody>
-      </p:sp>
-      <p:sp>
-        <p:nvSpPr>
-          <p:cNvPr id="6" name="Rounded Rectangle 5"/>
+              <a:t>Discovers all argparse and commander flags (--timeout, --verbose) and generates an accurate options reference table.</a:t>
+            </a:r>
+          </a:p>
+        </p:txBody>
+      </p:sp>
+      <p:sp>
+        <p:nvSpPr>
+          <p:cNvPr id="10" name="Rounded Rectangle 9"/>
           <p:cNvSpPr/>
           <p:nvPr/>
         </p:nvSpPr>
         <p:spPr>
           <a:xfrm>
-            <a:off x="4389120" y="4114800"/>
-            <a:ext cx="3291840" cy="2011680"/>
+            <a:off x="7863840" y="3566160"/>
+            <a:ext cx="3474720" cy="2743200"/>
           </a:xfrm>
           <a:prstGeom prst="roundRect">
             <a:avLst/>
           </a:prstGeom>
           <a:solidFill>
-            <a:srgbClr val="121826"/>
+            <a:srgbClr val="121A2C"/>
           </a:solidFill>
           <a:ln w="15240">
             <a:solidFill>
-              <a:srgbClr val="1F293D"/>
+              <a:srgbClr val="10B981"/>
             </a:solidFill>
           </a:ln>
         </p:spPr>
@@ -3386,15 +4580,14 @@
           <a:lstStyle/>
           <a:p>
             <a:pPr algn="ctr">
-              <a:defRPr sz="1600" b="1">
-                <a:solidFill>
-                  <a:srgbClr val="38BDF8"/>
-                </a:solidFill>
-                <a:latin typeface="Arial"/>
-              </a:defRPr>
-            </a:pPr>
-            <a:r>
-              <a:t>Open-Weight AI Model</a:t>
+              <a:defRPr sz="1500" b="1">
+                <a:solidFill>
+                  <a:srgbClr val="10B981"/>
+                </a:solidFill>
+              </a:defRPr>
+            </a:pPr>
+            <a:r>
+              <a:t>🔌 API Endpoints &amp; Functions</a:t>
             </a:r>
           </a:p>
           <a:p>
@@ -3402,51 +4595,55 @@
               <a:spcBef>
                 <a:spcPts val="800"/>
               </a:spcBef>
-              <a:defRPr sz="1300">
+              <a:defRPr sz="1200">
                 <a:solidFill>
                   <a:srgbClr val="F8FAFC"/>
                 </a:solidFill>
               </a:defRPr>
             </a:pPr>
             <a:r>
-              <a:t>• Qwen 2.5 7B Instruct</a:t>
-            </a:r>
-            <a:br/>
-            <a:r>
-              <a:t>• 100% Hackathon Rule Compliant</a:t>
-            </a:r>
-            <a:br/>
-            <a:r>
-              <a:t>• Zero proprietary closed APIs</a:t>
-            </a:r>
-            <a:br/>
-            <a:r>
-              <a:t>• OpenAI-compatible vLLM/Ollama</a:t>
-            </a:r>
-          </a:p>
-        </p:txBody>
-      </p:sp>
-      <p:sp>
-        <p:nvSpPr>
-          <p:cNvPr id="7" name="Rounded Rectangle 6"/>
+              <a:t>Extracts Express/Flask endpoints (/api/v1/...) and public exported functions with quickstart instructions.</a:t>
+            </a:r>
+          </a:p>
+        </p:txBody>
+      </p:sp>
+    </p:spTree>
+  </p:cSld>
+  <p:clrMapOvr>
+    <a:masterClrMapping/>
+  </p:clrMapOvr>
+</p:sld>
+</file>
+
+<file path=ppt/slides/slide12.xml><?xml version="1.0" encoding="utf-8"?>
+<p:sld xmlns:a="http://schemas.openxmlformats.org/drawingml/2006/main" xmlns:p="http://schemas.openxmlformats.org/presentationml/2006/main" xmlns:r="http://schemas.openxmlformats.org/officeDocument/2006/relationships">
+  <p:cSld>
+    <p:spTree>
+      <p:nvGrpSpPr>
+        <p:cNvPr id="1" name=""/>
+        <p:cNvGrpSpPr/>
+        <p:nvPr/>
+      </p:nvGrpSpPr>
+      <p:grpSpPr/>
+      <p:sp>
+        <p:nvSpPr>
+          <p:cNvPr id="2" name="Rectangle 1"/>
           <p:cNvSpPr/>
           <p:nvPr/>
         </p:nvSpPr>
         <p:spPr>
           <a:xfrm>
-            <a:off x="8046720" y="4114800"/>
-            <a:ext cx="3291840" cy="2011680"/>
-          </a:xfrm>
-          <a:prstGeom prst="roundRect">
+            <a:off x="0" y="0"/>
+            <a:ext cx="12191695" cy="6858000"/>
+          </a:xfrm>
+          <a:prstGeom prst="rect">
             <a:avLst/>
           </a:prstGeom>
           <a:solidFill>
-            <a:srgbClr val="121826"/>
+            <a:srgbClr val="0B0F19"/>
           </a:solidFill>
-          <a:ln w="15240">
-            <a:solidFill>
-              <a:srgbClr val="1F293D"/>
-            </a:solidFill>
+          <a:ln>
+            <a:noFill/>
           </a:ln>
         </p:spPr>
         <p:style>
@@ -3464,19 +4661,1023 @@
           </a:fontRef>
         </p:style>
         <p:txBody>
+          <a:bodyPr rtlCol="0" anchor="ctr"/>
+          <a:lstStyle/>
+          <a:p>
+            <a:pPr algn="ctr"/>
+          </a:p>
+        </p:txBody>
+      </p:sp>
+      <p:sp>
+        <p:nvSpPr>
+          <p:cNvPr id="3" name="Rectangle 2"/>
+          <p:cNvSpPr/>
+          <p:nvPr/>
+        </p:nvSpPr>
+        <p:spPr>
+          <a:xfrm>
+            <a:off x="0" y="0"/>
+            <a:ext cx="6095390" cy="54864"/>
+          </a:xfrm>
+          <a:prstGeom prst="rect">
+            <a:avLst/>
+          </a:prstGeom>
+          <a:solidFill>
+            <a:srgbClr val="38BDF8"/>
+          </a:solidFill>
+          <a:ln>
+            <a:noFill/>
+          </a:ln>
+        </p:spPr>
+        <p:style>
+          <a:lnRef idx="1">
+            <a:schemeClr val="accent1"/>
+          </a:lnRef>
+          <a:fillRef idx="3">
+            <a:schemeClr val="accent1"/>
+          </a:fillRef>
+          <a:effectRef idx="2">
+            <a:schemeClr val="accent1"/>
+          </a:effectRef>
+          <a:fontRef idx="minor">
+            <a:schemeClr val="lt1"/>
+          </a:fontRef>
+        </p:style>
+        <p:txBody>
+          <a:bodyPr rtlCol="0" anchor="ctr"/>
+          <a:lstStyle/>
+          <a:p>
+            <a:pPr algn="ctr"/>
+          </a:p>
+        </p:txBody>
+      </p:sp>
+      <p:sp>
+        <p:nvSpPr>
+          <p:cNvPr id="4" name="Rectangle 3"/>
+          <p:cNvSpPr/>
+          <p:nvPr/>
+        </p:nvSpPr>
+        <p:spPr>
+          <a:xfrm>
+            <a:off x="6095390" y="0"/>
+            <a:ext cx="6096304" cy="54864"/>
+          </a:xfrm>
+          <a:prstGeom prst="rect">
+            <a:avLst/>
+          </a:prstGeom>
+          <a:solidFill>
+            <a:srgbClr val="A855F7"/>
+          </a:solidFill>
+          <a:ln>
+            <a:noFill/>
+          </a:ln>
+        </p:spPr>
+        <p:style>
+          <a:lnRef idx="1">
+            <a:schemeClr val="accent1"/>
+          </a:lnRef>
+          <a:fillRef idx="3">
+            <a:schemeClr val="accent1"/>
+          </a:fillRef>
+          <a:effectRef idx="2">
+            <a:schemeClr val="accent1"/>
+          </a:effectRef>
+          <a:fontRef idx="minor">
+            <a:schemeClr val="lt1"/>
+          </a:fontRef>
+        </p:style>
+        <p:txBody>
+          <a:bodyPr rtlCol="0" anchor="ctr"/>
+          <a:lstStyle/>
+          <a:p>
+            <a:pPr algn="ctr"/>
+          </a:p>
+        </p:txBody>
+      </p:sp>
+      <p:sp>
+        <p:nvSpPr>
+          <p:cNvPr id="5" name="TextBox 4"/>
+          <p:cNvSpPr txBox="1"/>
+          <p:nvPr/>
+        </p:nvSpPr>
+        <p:spPr>
+          <a:xfrm>
+            <a:off x="731520" y="384048"/>
+            <a:ext cx="10515600" cy="320040"/>
+          </a:xfrm>
+          <a:prstGeom prst="rect">
+            <a:avLst/>
+          </a:prstGeom>
+          <a:noFill/>
+        </p:spPr>
+        <p:txBody>
+          <a:bodyPr wrap="none">
+            <a:spAutoFit/>
+          </a:bodyPr>
+          <a:lstStyle/>
+          <a:p>
+            <a:pPr>
+              <a:defRPr sz="1050" b="1">
+                <a:solidFill>
+                  <a:srgbClr val="38BDF8"/>
+                </a:solidFill>
+                <a:latin typeface="Arial"/>
+              </a:defRPr>
+            </a:pPr>
+            <a:r>
+              <a:t>INTERACTIVE STUDIO</a:t>
+            </a:r>
+          </a:p>
+        </p:txBody>
+      </p:sp>
+      <p:sp>
+        <p:nvSpPr>
+          <p:cNvPr id="6" name="TextBox 5"/>
+          <p:cNvSpPr txBox="1"/>
+          <p:nvPr/>
+        </p:nvSpPr>
+        <p:spPr>
+          <a:xfrm>
+            <a:off x="731520" y="658368"/>
+            <a:ext cx="10698480" cy="685800"/>
+          </a:xfrm>
+          <a:prstGeom prst="rect">
+            <a:avLst/>
+          </a:prstGeom>
+          <a:noFill/>
+        </p:spPr>
+        <p:txBody>
+          <a:bodyPr wrap="square">
+            <a:spAutoFit/>
+          </a:bodyPr>
+          <a:lstStyle/>
+          <a:p>
+            <a:pPr>
+              <a:defRPr sz="2600" b="1">
+                <a:solidFill>
+                  <a:srgbClr val="F8FAFC"/>
+                </a:solidFill>
+                <a:latin typeface="Arial"/>
+              </a:defRPr>
+            </a:pPr>
+            <a:r>
+              <a:t>Visual Blast Radius Impact Graph &amp; 1-Click Auto-Fix</a:t>
+            </a:r>
+          </a:p>
+          <a:p>
+            <a:pPr>
+              <a:spcBef>
+                <a:spcPts val="300"/>
+              </a:spcBef>
+              <a:defRPr sz="1300">
+                <a:solidFill>
+                  <a:srgbClr val="94A3B8"/>
+                </a:solidFill>
+                <a:latin typeface="Arial"/>
+              </a:defRPr>
+            </a:pPr>
+            <a:r>
+              <a:t>Giving developers a visual interactive studio to explore drift impact and remediate issues in seconds.</a:t>
+            </a:r>
+          </a:p>
+        </p:txBody>
+      </p:sp>
+      <p:sp>
+        <p:nvSpPr>
+          <p:cNvPr id="7" name="Rounded Rectangle 6"/>
+          <p:cNvSpPr/>
+          <p:nvPr/>
+        </p:nvSpPr>
+        <p:spPr>
+          <a:xfrm>
+            <a:off x="731520" y="1554480"/>
+            <a:ext cx="5212080" cy="4754880"/>
+          </a:xfrm>
+          <a:prstGeom prst="roundRect">
+            <a:avLst/>
+          </a:prstGeom>
+          <a:solidFill>
+            <a:srgbClr val="121A2C"/>
+          </a:solidFill>
+          <a:ln w="19050">
+            <a:solidFill>
+              <a:srgbClr val="38BDF8"/>
+            </a:solidFill>
+          </a:ln>
+        </p:spPr>
+        <p:style>
+          <a:lnRef idx="1">
+            <a:schemeClr val="accent1"/>
+          </a:lnRef>
+          <a:fillRef idx="3">
+            <a:schemeClr val="accent1"/>
+          </a:fillRef>
+          <a:effectRef idx="2">
+            <a:schemeClr val="accent1"/>
+          </a:effectRef>
+          <a:fontRef idx="minor">
+            <a:schemeClr val="lt1"/>
+          </a:fontRef>
+        </p:style>
+        <p:txBody>
+          <a:bodyPr rtlCol="0" anchor="ctr" wrap="square"/>
+          <a:lstStyle/>
+          <a:p>
+            <a:pPr algn="ctr">
+              <a:defRPr sz="1700" b="1">
+                <a:solidFill>
+                  <a:srgbClr val="38BDF8"/>
+                </a:solidFill>
+              </a:defRPr>
+            </a:pPr>
+            <a:r>
+              <a:t>🌐 SVG Documentation Blast Radius Graph</a:t>
+            </a:r>
+          </a:p>
+          <a:p>
+            <a:br/>
+            <a:pPr>
+              <a:defRPr sz="1250" b="1">
+                <a:solidFill>
+                  <a:srgbClr val="F8FAFC"/>
+                </a:solidFill>
+              </a:defRPr>
+            </a:pPr>
+            <a:r>
+              <a:t>• Visual Dependency Mapping:</a:t>
+            </a:r>
+          </a:p>
+          <a:p>
+            <a:pPr>
+              <a:defRPr sz="1150">
+                <a:solidFill>
+                  <a:srgbClr val="CBD5E1"/>
+                </a:solidFill>
+              </a:defRPr>
+            </a:pPr>
+            <a:r>
+              <a:t>Connects changed source code files (e.g. cli.py) on the left to affected documentation sections (e.g. CLI Options) on the right.</a:t>
+            </a:r>
+          </a:p>
+          <a:p>
+            <a:br/>
+            <a:pPr>
+              <a:defRPr sz="1250" b="1">
+                <a:solidFill>
+                  <a:srgbClr val="F8FAFC"/>
+                </a:solidFill>
+              </a:defRPr>
+            </a:pPr>
+            <a:r>
+              <a:t>• Interactive Bezier Curves:</a:t>
+            </a:r>
+          </a:p>
+          <a:p>
+            <a:pPr>
+              <a:defRPr sz="1150">
+                <a:solidFill>
+                  <a:srgbClr val="CBD5E1"/>
+                </a:solidFill>
+              </a:defRPr>
+            </a:pPr>
+            <a:r>
+              <a:t>Dynamic SVG curves visually show where code changes radiate blast radius impact into documentation.</a:t>
+            </a:r>
+          </a:p>
+          <a:p>
+            <a:br/>
+            <a:pPr>
+              <a:defRPr sz="1250" b="1">
+                <a:solidFill>
+                  <a:srgbClr val="F8FAFC"/>
+                </a:solidFill>
+              </a:defRPr>
+            </a:pPr>
+            <a:r>
+              <a:t>• Color-Coded Status Nodes:</a:t>
+            </a:r>
+          </a:p>
+          <a:p>
+            <a:pPr>
+              <a:defRPr sz="1150">
+                <a:solidFill>
+                  <a:srgbClr val="CBD5E1"/>
+                </a:solidFill>
+              </a:defRPr>
+            </a:pPr>
+            <a:r>
+              <a:t>Red nodes indicate high-severity drift; green nodes indicate validated documentation harmony.</a:t>
+            </a:r>
+          </a:p>
+          <a:p>
+            <a:br/>
+            <a:pPr>
+              <a:defRPr sz="1250" b="1">
+                <a:solidFill>
+                  <a:srgbClr val="F8FAFC"/>
+                </a:solidFill>
+              </a:defRPr>
+            </a:pPr>
+            <a:r>
+              <a:t>• Live Web Studio:</a:t>
+            </a:r>
+          </a:p>
+          <a:p>
+            <a:pPr>
+              <a:defRPr sz="1150">
+                <a:solidFill>
+                  <a:srgbClr val="CBD5E1"/>
+                </a:solidFill>
+              </a:defRPr>
+            </a:pPr>
+            <a:r>
+              <a:t>Runs locally on http://localhost:3000 with real-time diff editing and preset scenario buttons.</a:t>
+            </a:r>
+          </a:p>
+        </p:txBody>
+      </p:sp>
+      <p:sp>
+        <p:nvSpPr>
+          <p:cNvPr id="8" name="Rounded Rectangle 7"/>
+          <p:cNvSpPr/>
+          <p:nvPr/>
+        </p:nvSpPr>
+        <p:spPr>
+          <a:xfrm>
+            <a:off x="6217920" y="1554480"/>
+            <a:ext cx="5212080" cy="4754880"/>
+          </a:xfrm>
+          <a:prstGeom prst="roundRect">
+            <a:avLst/>
+          </a:prstGeom>
+          <a:solidFill>
+            <a:srgbClr val="121A2C"/>
+          </a:solidFill>
+          <a:ln w="19050">
+            <a:solidFill>
+              <a:srgbClr val="10B981"/>
+            </a:solidFill>
+          </a:ln>
+        </p:spPr>
+        <p:style>
+          <a:lnRef idx="1">
+            <a:schemeClr val="accent1"/>
+          </a:lnRef>
+          <a:fillRef idx="3">
+            <a:schemeClr val="accent1"/>
+          </a:fillRef>
+          <a:effectRef idx="2">
+            <a:schemeClr val="accent1"/>
+          </a:effectRef>
+          <a:fontRef idx="minor">
+            <a:schemeClr val="lt1"/>
+          </a:fontRef>
+        </p:style>
+        <p:txBody>
+          <a:bodyPr rtlCol="0" anchor="ctr" wrap="square"/>
+          <a:lstStyle/>
+          <a:p>
+            <a:pPr algn="ctr">
+              <a:defRPr sz="1700" b="1">
+                <a:solidFill>
+                  <a:srgbClr val="10B981"/>
+                </a:solidFill>
+              </a:defRPr>
+            </a:pPr>
+            <a:r>
+              <a:t>⚡ 1-Click Auto-Remediation &amp; Patches</a:t>
+            </a:r>
+          </a:p>
+          <a:p>
+            <a:br/>
+            <a:pPr>
+              <a:defRPr sz="1250" b="1">
+                <a:solidFill>
+                  <a:srgbClr val="F8FAFC"/>
+                </a:solidFill>
+              </a:defRPr>
+            </a:pPr>
+            <a:r>
+              <a:t>• Instant In-Browser Correction:</a:t>
+            </a:r>
+          </a:p>
+          <a:p>
+            <a:pPr>
+              <a:defRPr sz="1150">
+                <a:solidFill>
+                  <a:srgbClr val="CBD5E1"/>
+                </a:solidFill>
+              </a:defRPr>
+            </a:pPr>
+            <a:r>
+              <a:t>Developers click 'Apply Fix' directly in the Web Studio; DriftLens updates the documentation textarea in real-time.</a:t>
+            </a:r>
+          </a:p>
+          <a:p>
+            <a:br/>
+            <a:pPr>
+              <a:defRPr sz="1250" b="1">
+                <a:solidFill>
+                  <a:srgbClr val="F8FAFC"/>
+                </a:solidFill>
+              </a:defRPr>
+            </a:pPr>
+            <a:r>
+              <a:t>• Downloadable Git .patch Files:</a:t>
+            </a:r>
+          </a:p>
+          <a:p>
+            <a:pPr>
+              <a:defRPr sz="1150">
+                <a:solidFill>
+                  <a:srgbClr val="CBD5E1"/>
+                </a:solidFill>
+              </a:defRPr>
+            </a:pPr>
+            <a:r>
+              <a:t>Generates standard unified .patch files (POST /api/fix/patch) ready to apply via git apply fix.patch.</a:t>
+            </a:r>
+          </a:p>
+          <a:p>
+            <a:br/>
+            <a:pPr>
+              <a:defRPr sz="1250" b="1">
+                <a:solidFill>
+                  <a:srgbClr val="F8FAFC"/>
+                </a:solidFill>
+              </a:defRPr>
+            </a:pPr>
+            <a:r>
+              <a:t>• GitHub PR Review Suggestions:</a:t>
+            </a:r>
+          </a:p>
+          <a:p>
+            <a:pPr>
+              <a:defRPr sz="1150">
+                <a:solidFill>
+                  <a:srgbClr val="CBD5E1"/>
+                </a:solidFill>
+              </a:defRPr>
+            </a:pPr>
+            <a:r>
+              <a:t>Outputs native GitHub Markdown ```suggestion blocks so maintainers can accept documentation fixes with 1 click on GitHub.</a:t>
+            </a:r>
+          </a:p>
+        </p:txBody>
+      </p:sp>
+    </p:spTree>
+  </p:cSld>
+  <p:clrMapOvr>
+    <a:masterClrMapping/>
+  </p:clrMapOvr>
+</p:sld>
+</file>
+
+<file path=ppt/slides/slide13.xml><?xml version="1.0" encoding="utf-8"?>
+<p:sld xmlns:a="http://schemas.openxmlformats.org/drawingml/2006/main" xmlns:p="http://schemas.openxmlformats.org/presentationml/2006/main" xmlns:r="http://schemas.openxmlformats.org/officeDocument/2006/relationships">
+  <p:cSld>
+    <p:spTree>
+      <p:nvGrpSpPr>
+        <p:cNvPr id="1" name=""/>
+        <p:cNvGrpSpPr/>
+        <p:nvPr/>
+      </p:nvGrpSpPr>
+      <p:grpSpPr/>
+      <p:sp>
+        <p:nvSpPr>
+          <p:cNvPr id="2" name="Rectangle 1"/>
+          <p:cNvSpPr/>
+          <p:nvPr/>
+        </p:nvSpPr>
+        <p:spPr>
+          <a:xfrm>
+            <a:off x="0" y="0"/>
+            <a:ext cx="12191695" cy="6858000"/>
+          </a:xfrm>
+          <a:prstGeom prst="rect">
+            <a:avLst/>
+          </a:prstGeom>
+          <a:solidFill>
+            <a:srgbClr val="0B0F19"/>
+          </a:solidFill>
+          <a:ln>
+            <a:noFill/>
+          </a:ln>
+        </p:spPr>
+        <p:style>
+          <a:lnRef idx="1">
+            <a:schemeClr val="accent1"/>
+          </a:lnRef>
+          <a:fillRef idx="3">
+            <a:schemeClr val="accent1"/>
+          </a:fillRef>
+          <a:effectRef idx="2">
+            <a:schemeClr val="accent1"/>
+          </a:effectRef>
+          <a:fontRef idx="minor">
+            <a:schemeClr val="lt1"/>
+          </a:fontRef>
+        </p:style>
+        <p:txBody>
+          <a:bodyPr rtlCol="0" anchor="ctr"/>
+          <a:lstStyle/>
+          <a:p>
+            <a:pPr algn="ctr"/>
+          </a:p>
+        </p:txBody>
+      </p:sp>
+      <p:sp>
+        <p:nvSpPr>
+          <p:cNvPr id="3" name="Rectangle 2"/>
+          <p:cNvSpPr/>
+          <p:nvPr/>
+        </p:nvSpPr>
+        <p:spPr>
+          <a:xfrm>
+            <a:off x="0" y="0"/>
+            <a:ext cx="6095390" cy="54864"/>
+          </a:xfrm>
+          <a:prstGeom prst="rect">
+            <a:avLst/>
+          </a:prstGeom>
+          <a:solidFill>
+            <a:srgbClr val="38BDF8"/>
+          </a:solidFill>
+          <a:ln>
+            <a:noFill/>
+          </a:ln>
+        </p:spPr>
+        <p:style>
+          <a:lnRef idx="1">
+            <a:schemeClr val="accent1"/>
+          </a:lnRef>
+          <a:fillRef idx="3">
+            <a:schemeClr val="accent1"/>
+          </a:fillRef>
+          <a:effectRef idx="2">
+            <a:schemeClr val="accent1"/>
+          </a:effectRef>
+          <a:fontRef idx="minor">
+            <a:schemeClr val="lt1"/>
+          </a:fontRef>
+        </p:style>
+        <p:txBody>
+          <a:bodyPr rtlCol="0" anchor="ctr"/>
+          <a:lstStyle/>
+          <a:p>
+            <a:pPr algn="ctr"/>
+          </a:p>
+        </p:txBody>
+      </p:sp>
+      <p:sp>
+        <p:nvSpPr>
+          <p:cNvPr id="4" name="Rectangle 3"/>
+          <p:cNvSpPr/>
+          <p:nvPr/>
+        </p:nvSpPr>
+        <p:spPr>
+          <a:xfrm>
+            <a:off x="6095390" y="0"/>
+            <a:ext cx="6096304" cy="54864"/>
+          </a:xfrm>
+          <a:prstGeom prst="rect">
+            <a:avLst/>
+          </a:prstGeom>
+          <a:solidFill>
+            <a:srgbClr val="A855F7"/>
+          </a:solidFill>
+          <a:ln>
+            <a:noFill/>
+          </a:ln>
+        </p:spPr>
+        <p:style>
+          <a:lnRef idx="1">
+            <a:schemeClr val="accent1"/>
+          </a:lnRef>
+          <a:fillRef idx="3">
+            <a:schemeClr val="accent1"/>
+          </a:fillRef>
+          <a:effectRef idx="2">
+            <a:schemeClr val="accent1"/>
+          </a:effectRef>
+          <a:fontRef idx="minor">
+            <a:schemeClr val="lt1"/>
+          </a:fontRef>
+        </p:style>
+        <p:txBody>
+          <a:bodyPr rtlCol="0" anchor="ctr"/>
+          <a:lstStyle/>
+          <a:p>
+            <a:pPr algn="ctr"/>
+          </a:p>
+        </p:txBody>
+      </p:sp>
+      <p:sp>
+        <p:nvSpPr>
+          <p:cNvPr id="5" name="TextBox 4"/>
+          <p:cNvSpPr txBox="1"/>
+          <p:nvPr/>
+        </p:nvSpPr>
+        <p:spPr>
+          <a:xfrm>
+            <a:off x="731520" y="384048"/>
+            <a:ext cx="10515600" cy="320040"/>
+          </a:xfrm>
+          <a:prstGeom prst="rect">
+            <a:avLst/>
+          </a:prstGeom>
+          <a:noFill/>
+        </p:spPr>
+        <p:txBody>
+          <a:bodyPr wrap="none">
+            <a:spAutoFit/>
+          </a:bodyPr>
+          <a:lstStyle/>
+          <a:p>
+            <a:pPr>
+              <a:defRPr sz="1050" b="1">
+                <a:solidFill>
+                  <a:srgbClr val="38BDF8"/>
+                </a:solidFill>
+                <a:latin typeface="Arial"/>
+              </a:defRPr>
+            </a:pPr>
+            <a:r>
+              <a:t>PRODUCTION READINESS</a:t>
+            </a:r>
+          </a:p>
+        </p:txBody>
+      </p:sp>
+      <p:sp>
+        <p:nvSpPr>
+          <p:cNvPr id="6" name="TextBox 5"/>
+          <p:cNvSpPr txBox="1"/>
+          <p:nvPr/>
+        </p:nvSpPr>
+        <p:spPr>
+          <a:xfrm>
+            <a:off x="731520" y="658368"/>
+            <a:ext cx="10698480" cy="685800"/>
+          </a:xfrm>
+          <a:prstGeom prst="rect">
+            <a:avLst/>
+          </a:prstGeom>
+          <a:noFill/>
+        </p:spPr>
+        <p:txBody>
+          <a:bodyPr wrap="square">
+            <a:spAutoFit/>
+          </a:bodyPr>
+          <a:lstStyle/>
+          <a:p>
+            <a:pPr>
+              <a:defRPr sz="2600" b="1">
+                <a:solidFill>
+                  <a:srgbClr val="F8FAFC"/>
+                </a:solidFill>
+                <a:latin typeface="Arial"/>
+              </a:defRPr>
+            </a:pPr>
+            <a:r>
+              <a:t>Performance Engineering, Benchmarks &amp; CI/CD</a:t>
+            </a:r>
+          </a:p>
+          <a:p>
+            <a:pPr>
+              <a:spcBef>
+                <a:spcPts val="300"/>
+              </a:spcBef>
+              <a:defRPr sz="1300">
+                <a:solidFill>
+                  <a:srgbClr val="94A3B8"/>
+                </a:solidFill>
+                <a:latin typeface="Arial"/>
+              </a:defRPr>
+            </a:pPr>
+            <a:r>
+              <a:t>Built for speed, scalability, and seamless integration into developer workflows.</a:t>
+            </a:r>
+          </a:p>
+        </p:txBody>
+      </p:sp>
+      <p:sp>
+        <p:nvSpPr>
+          <p:cNvPr id="7" name="Rounded Rectangle 6"/>
+          <p:cNvSpPr/>
+          <p:nvPr/>
+        </p:nvSpPr>
+        <p:spPr>
+          <a:xfrm>
+            <a:off x="731520" y="1554480"/>
+            <a:ext cx="2606040" cy="1371600"/>
+          </a:xfrm>
+          <a:prstGeom prst="roundRect">
+            <a:avLst/>
+          </a:prstGeom>
+          <a:solidFill>
+            <a:srgbClr val="121A2C"/>
+          </a:solidFill>
+          <a:ln w="15240">
+            <a:solidFill>
+              <a:srgbClr val="10B981"/>
+            </a:solidFill>
+          </a:ln>
+        </p:spPr>
+        <p:style>
+          <a:lnRef idx="1">
+            <a:schemeClr val="accent1"/>
+          </a:lnRef>
+          <a:fillRef idx="3">
+            <a:schemeClr val="accent1"/>
+          </a:fillRef>
+          <a:effectRef idx="2">
+            <a:schemeClr val="accent1"/>
+          </a:effectRef>
+          <a:fontRef idx="minor">
+            <a:schemeClr val="lt1"/>
+          </a:fontRef>
+        </p:style>
+        <p:txBody>
+          <a:bodyPr rtlCol="0" anchor="ctr" wrap="square"/>
+          <a:lstStyle/>
+          <a:p>
+            <a:pPr algn="ctr">
+              <a:defRPr sz="2600" b="1">
+                <a:solidFill>
+                  <a:srgbClr val="10B981"/>
+                </a:solidFill>
+                <a:latin typeface="Arial"/>
+              </a:defRPr>
+            </a:pPr>
+            <a:r>
+              <a:t>70</a:t>
+            </a:r>
+          </a:p>
+          <a:p>
+            <a:pPr algn="ctr">
+              <a:defRPr sz="1100">
+                <a:solidFill>
+                  <a:srgbClr val="94A3B8"/>
+                </a:solidFill>
+              </a:defRPr>
+            </a:pPr>
+            <a:r>
+              <a:t>Unit &amp; Integration Tests</a:t>
+            </a:r>
+          </a:p>
+        </p:txBody>
+      </p:sp>
+      <p:sp>
+        <p:nvSpPr>
+          <p:cNvPr id="8" name="Rounded Rectangle 7"/>
+          <p:cNvSpPr/>
+          <p:nvPr/>
+        </p:nvSpPr>
+        <p:spPr>
+          <a:xfrm>
+            <a:off x="3429000" y="1554480"/>
+            <a:ext cx="2606040" cy="1371600"/>
+          </a:xfrm>
+          <a:prstGeom prst="roundRect">
+            <a:avLst/>
+          </a:prstGeom>
+          <a:solidFill>
+            <a:srgbClr val="121A2C"/>
+          </a:solidFill>
+          <a:ln w="15240">
+            <a:solidFill>
+              <a:srgbClr val="38BDF8"/>
+            </a:solidFill>
+          </a:ln>
+        </p:spPr>
+        <p:style>
+          <a:lnRef idx="1">
+            <a:schemeClr val="accent1"/>
+          </a:lnRef>
+          <a:fillRef idx="3">
+            <a:schemeClr val="accent1"/>
+          </a:fillRef>
+          <a:effectRef idx="2">
+            <a:schemeClr val="accent1"/>
+          </a:effectRef>
+          <a:fontRef idx="minor">
+            <a:schemeClr val="lt1"/>
+          </a:fontRef>
+        </p:style>
+        <p:txBody>
+          <a:bodyPr rtlCol="0" anchor="ctr" wrap="square"/>
+          <a:lstStyle/>
+          <a:p>
+            <a:pPr algn="ctr">
+              <a:defRPr sz="2600" b="1">
+                <a:solidFill>
+                  <a:srgbClr val="38BDF8"/>
+                </a:solidFill>
+                <a:latin typeface="Arial"/>
+              </a:defRPr>
+            </a:pPr>
+            <a:r>
+              <a:t>100%</a:t>
+            </a:r>
+          </a:p>
+          <a:p>
+            <a:pPr algn="ctr">
+              <a:defRPr sz="1100">
+                <a:solidFill>
+                  <a:srgbClr val="94A3B8"/>
+                </a:solidFill>
+              </a:defRPr>
+            </a:pPr>
+            <a:r>
+              <a:t>Test Pass Rate (Vitest)</a:t>
+            </a:r>
+          </a:p>
+        </p:txBody>
+      </p:sp>
+      <p:sp>
+        <p:nvSpPr>
+          <p:cNvPr id="9" name="Rounded Rectangle 8"/>
+          <p:cNvSpPr/>
+          <p:nvPr/>
+        </p:nvSpPr>
+        <p:spPr>
+          <a:xfrm>
+            <a:off x="6126480" y="1554480"/>
+            <a:ext cx="2606040" cy="1371600"/>
+          </a:xfrm>
+          <a:prstGeom prst="roundRect">
+            <a:avLst/>
+          </a:prstGeom>
+          <a:solidFill>
+            <a:srgbClr val="121A2C"/>
+          </a:solidFill>
+          <a:ln w="15240">
+            <a:solidFill>
+              <a:srgbClr val="10B981"/>
+            </a:solidFill>
+          </a:ln>
+        </p:spPr>
+        <p:style>
+          <a:lnRef idx="1">
+            <a:schemeClr val="accent1"/>
+          </a:lnRef>
+          <a:fillRef idx="3">
+            <a:schemeClr val="accent1"/>
+          </a:fillRef>
+          <a:effectRef idx="2">
+            <a:schemeClr val="accent1"/>
+          </a:effectRef>
+          <a:fontRef idx="minor">
+            <a:schemeClr val="lt1"/>
+          </a:fontRef>
+        </p:style>
+        <p:txBody>
+          <a:bodyPr rtlCol="0" anchor="ctr" wrap="square"/>
+          <a:lstStyle/>
+          <a:p>
+            <a:pPr algn="ctr">
+              <a:defRPr sz="2600" b="1">
+                <a:solidFill>
+                  <a:srgbClr val="10B981"/>
+                </a:solidFill>
+                <a:latin typeface="Arial"/>
+              </a:defRPr>
+            </a:pPr>
+            <a:r>
+              <a:t>5ms</a:t>
+            </a:r>
+          </a:p>
+          <a:p>
+            <a:pPr algn="ctr">
+              <a:defRPr sz="1100">
+                <a:solidFill>
+                  <a:srgbClr val="94A3B8"/>
+                </a:solidFill>
+              </a:defRPr>
+            </a:pPr>
+            <a:r>
+              <a:t>Live Benchmark Execution</a:t>
+            </a:r>
+          </a:p>
+        </p:txBody>
+      </p:sp>
+      <p:sp>
+        <p:nvSpPr>
+          <p:cNvPr id="10" name="Rounded Rectangle 9"/>
+          <p:cNvSpPr/>
+          <p:nvPr/>
+        </p:nvSpPr>
+        <p:spPr>
+          <a:xfrm>
+            <a:off x="8823960" y="1554480"/>
+            <a:ext cx="2606040" cy="1371600"/>
+          </a:xfrm>
+          <a:prstGeom prst="roundRect">
+            <a:avLst/>
+          </a:prstGeom>
+          <a:solidFill>
+            <a:srgbClr val="121A2C"/>
+          </a:solidFill>
+          <a:ln w="15240">
+            <a:solidFill>
+              <a:srgbClr val="A855F7"/>
+            </a:solidFill>
+          </a:ln>
+        </p:spPr>
+        <p:style>
+          <a:lnRef idx="1">
+            <a:schemeClr val="accent1"/>
+          </a:lnRef>
+          <a:fillRef idx="3">
+            <a:schemeClr val="accent1"/>
+          </a:fillRef>
+          <a:effectRef idx="2">
+            <a:schemeClr val="accent1"/>
+          </a:effectRef>
+          <a:fontRef idx="minor">
+            <a:schemeClr val="lt1"/>
+          </a:fontRef>
+        </p:style>
+        <p:txBody>
+          <a:bodyPr rtlCol="0" anchor="ctr" wrap="square"/>
+          <a:lstStyle/>
+          <a:p>
+            <a:pPr algn="ctr">
+              <a:defRPr sz="2600" b="1">
+                <a:solidFill>
+                  <a:srgbClr val="A855F7"/>
+                </a:solidFill>
+                <a:latin typeface="Arial"/>
+              </a:defRPr>
+            </a:pPr>
+            <a:r>
+              <a:t>Qwen 2.5 7B</a:t>
+            </a:r>
+          </a:p>
+          <a:p>
+            <a:pPr algn="ctr">
+              <a:defRPr sz="1100">
+                <a:solidFill>
+                  <a:srgbClr val="94A3B8"/>
+                </a:solidFill>
+              </a:defRPr>
+            </a:pPr>
+            <a:r>
+              <a:t>Open-Weight AI Model</a:t>
+            </a:r>
+          </a:p>
+        </p:txBody>
+      </p:sp>
+      <p:sp>
+        <p:nvSpPr>
+          <p:cNvPr id="11" name="Rounded Rectangle 10"/>
+          <p:cNvSpPr/>
+          <p:nvPr/>
+        </p:nvSpPr>
+        <p:spPr>
+          <a:xfrm>
+            <a:off x="731520" y="3200400"/>
+            <a:ext cx="5212080" cy="3108960"/>
+          </a:xfrm>
+          <a:prstGeom prst="roundRect">
+            <a:avLst/>
+          </a:prstGeom>
+          <a:solidFill>
+            <a:srgbClr val="121A2C"/>
+          </a:solidFill>
+          <a:ln w="19050">
+            <a:solidFill>
+              <a:srgbClr val="38BDF8"/>
+            </a:solidFill>
+          </a:ln>
+        </p:spPr>
+        <p:style>
+          <a:lnRef idx="1">
+            <a:schemeClr val="accent1"/>
+          </a:lnRef>
+          <a:fillRef idx="3">
+            <a:schemeClr val="accent1"/>
+          </a:fillRef>
+          <a:effectRef idx="2">
+            <a:schemeClr val="accent1"/>
+          </a:effectRef>
+          <a:fontRef idx="minor">
+            <a:schemeClr val="lt1"/>
+          </a:fontRef>
+        </p:style>
+        <p:txBody>
           <a:bodyPr rtlCol="0" anchor="ctr" wrap="square"/>
           <a:lstStyle/>
           <a:p>
             <a:pPr algn="ctr">
               <a:defRPr sz="1600" b="1">
                 <a:solidFill>
-                  <a:srgbClr val="F59E0B"/>
-                </a:solidFill>
-                <a:latin typeface="Arial"/>
-              </a:defRPr>
-            </a:pPr>
-            <a:r>
-              <a:t>Key Deliverables</a:t>
+                  <a:srgbClr val="38BDF8"/>
+                </a:solidFill>
+              </a:defRPr>
+            </a:pPr>
+            <a:r>
+              <a:t>⚡ Algorithmic &amp; I/O Optimizations</a:t>
             </a:r>
           </a:p>
           <a:p>
@@ -3484,26 +5685,699 @@
               <a:spcBef>
                 <a:spcPts val="800"/>
               </a:spcBef>
+              <a:defRPr sz="1150">
+                <a:solidFill>
+                  <a:srgbClr val="F8FAFC"/>
+                </a:solidFill>
+              </a:defRPr>
+            </a:pPr>
+            <a:r>
+              <a:t>• O(1) Token Sets: Pre-computed token and stem sets eliminate repeated string parsing.</a:t>
+            </a:r>
+            <a:br/>
+            <a:r>
+              <a:t>• Worker Pool Concurrency: Evaluates candidate pairs in parallel without blocking.</a:t>
+            </a:r>
+            <a:br/>
+            <a:r>
+              <a:t>• Parallel Async File Traversal: Promise.all reads repositories concurrently in milliseconds.</a:t>
+            </a:r>
+            <a:br/>
+            <a:r>
+              <a:t>• In-Memory RAM Caching: Sub-millisecond response for golden scenarios.</a:t>
+            </a:r>
+          </a:p>
+        </p:txBody>
+      </p:sp>
+      <p:sp>
+        <p:nvSpPr>
+          <p:cNvPr id="12" name="Rounded Rectangle 11"/>
+          <p:cNvSpPr/>
+          <p:nvPr/>
+        </p:nvSpPr>
+        <p:spPr>
+          <a:xfrm>
+            <a:off x="6217920" y="3200400"/>
+            <a:ext cx="5212080" cy="3108960"/>
+          </a:xfrm>
+          <a:prstGeom prst="roundRect">
+            <a:avLst/>
+          </a:prstGeom>
+          <a:solidFill>
+            <a:srgbClr val="121A2C"/>
+          </a:solidFill>
+          <a:ln w="19050">
+            <a:solidFill>
+              <a:srgbClr val="F59E0B"/>
+            </a:solidFill>
+          </a:ln>
+        </p:spPr>
+        <p:style>
+          <a:lnRef idx="1">
+            <a:schemeClr val="accent1"/>
+          </a:lnRef>
+          <a:fillRef idx="3">
+            <a:schemeClr val="accent1"/>
+          </a:fillRef>
+          <a:effectRef idx="2">
+            <a:schemeClr val="accent1"/>
+          </a:effectRef>
+          <a:fontRef idx="minor">
+            <a:schemeClr val="lt1"/>
+          </a:fontRef>
+        </p:style>
+        <p:txBody>
+          <a:bodyPr rtlCol="0" anchor="ctr" wrap="square"/>
+          <a:lstStyle/>
+          <a:p>
+            <a:pPr algn="ctr">
+              <a:defRPr sz="1600" b="1">
+                <a:solidFill>
+                  <a:srgbClr val="F59E0B"/>
+                </a:solidFill>
+              </a:defRPr>
+            </a:pPr>
+            <a:r>
+              <a:t>📦 Reusable GitHub Action (action.yml)</a:t>
+            </a:r>
+          </a:p>
+          <a:p>
+            <a:pPr>
+              <a:spcBef>
+                <a:spcPts val="800"/>
+              </a:spcBef>
+              <a:defRPr sz="1050">
+                <a:solidFill>
+                  <a:srgbClr val="CBD5E1"/>
+                </a:solidFill>
+                <a:latin typeface="Consolas"/>
+              </a:defRPr>
+            </a:pPr>
+            <a:r>
+              <a:t>- name: DriftLens Check</a:t>
+            </a:r>
+            <a:br/>
+            <a:r>
+              <a:t>  uses: Marwadi-me/Driftlens@main</a:t>
+            </a:r>
+            <a:br/>
+            <a:r>
+              <a:t>  with:</a:t>
+            </a:r>
+            <a:br/>
+            <a:r>
+              <a:t>    base: ${{ github.event.pull_request.base.sha }}</a:t>
+            </a:r>
+            <a:br/>
+            <a:r>
+              <a:t>    head: ${{ github.event.pull_request.head.sha }}</a:t>
+            </a:r>
+            <a:br/>
+            <a:r>
+              <a:t>    min-confidence: '0.60'</a:t>
+            </a:r>
+          </a:p>
+          <a:p>
+            <a:pPr>
+              <a:spcBef>
+                <a:spcPts val="400"/>
+              </a:spcBef>
+              <a:defRPr sz="1100">
+                <a:solidFill>
+                  <a:srgbClr val="F8FAFC"/>
+                </a:solidFill>
+              </a:defRPr>
+            </a:pPr>
+            <a:r>
+              <a:t>Installs in any repo in 3 lines. Blocks merging on HIGH severity drift.</a:t>
+            </a:r>
+          </a:p>
+        </p:txBody>
+      </p:sp>
+    </p:spTree>
+  </p:cSld>
+  <p:clrMapOvr>
+    <a:masterClrMapping/>
+  </p:clrMapOvr>
+</p:sld>
+</file>
+
+<file path=ppt/slides/slide14.xml><?xml version="1.0" encoding="utf-8"?>
+<p:sld xmlns:a="http://schemas.openxmlformats.org/drawingml/2006/main" xmlns:p="http://schemas.openxmlformats.org/presentationml/2006/main" xmlns:r="http://schemas.openxmlformats.org/officeDocument/2006/relationships">
+  <p:cSld>
+    <p:spTree>
+      <p:nvGrpSpPr>
+        <p:cNvPr id="1" name=""/>
+        <p:cNvGrpSpPr/>
+        <p:nvPr/>
+      </p:nvGrpSpPr>
+      <p:grpSpPr/>
+      <p:sp>
+        <p:nvSpPr>
+          <p:cNvPr id="2" name="Rectangle 1"/>
+          <p:cNvSpPr/>
+          <p:nvPr/>
+        </p:nvSpPr>
+        <p:spPr>
+          <a:xfrm>
+            <a:off x="0" y="0"/>
+            <a:ext cx="12191695" cy="6858000"/>
+          </a:xfrm>
+          <a:prstGeom prst="rect">
+            <a:avLst/>
+          </a:prstGeom>
+          <a:solidFill>
+            <a:srgbClr val="0B0F19"/>
+          </a:solidFill>
+          <a:ln>
+            <a:noFill/>
+          </a:ln>
+        </p:spPr>
+        <p:style>
+          <a:lnRef idx="1">
+            <a:schemeClr val="accent1"/>
+          </a:lnRef>
+          <a:fillRef idx="3">
+            <a:schemeClr val="accent1"/>
+          </a:fillRef>
+          <a:effectRef idx="2">
+            <a:schemeClr val="accent1"/>
+          </a:effectRef>
+          <a:fontRef idx="minor">
+            <a:schemeClr val="lt1"/>
+          </a:fontRef>
+        </p:style>
+        <p:txBody>
+          <a:bodyPr rtlCol="0" anchor="ctr"/>
+          <a:lstStyle/>
+          <a:p>
+            <a:pPr algn="ctr"/>
+          </a:p>
+        </p:txBody>
+      </p:sp>
+      <p:sp>
+        <p:nvSpPr>
+          <p:cNvPr id="3" name="Rectangle 2"/>
+          <p:cNvSpPr/>
+          <p:nvPr/>
+        </p:nvSpPr>
+        <p:spPr>
+          <a:xfrm>
+            <a:off x="0" y="0"/>
+            <a:ext cx="6095390" cy="54864"/>
+          </a:xfrm>
+          <a:prstGeom prst="rect">
+            <a:avLst/>
+          </a:prstGeom>
+          <a:solidFill>
+            <a:srgbClr val="38BDF8"/>
+          </a:solidFill>
+          <a:ln>
+            <a:noFill/>
+          </a:ln>
+        </p:spPr>
+        <p:style>
+          <a:lnRef idx="1">
+            <a:schemeClr val="accent1"/>
+          </a:lnRef>
+          <a:fillRef idx="3">
+            <a:schemeClr val="accent1"/>
+          </a:fillRef>
+          <a:effectRef idx="2">
+            <a:schemeClr val="accent1"/>
+          </a:effectRef>
+          <a:fontRef idx="minor">
+            <a:schemeClr val="lt1"/>
+          </a:fontRef>
+        </p:style>
+        <p:txBody>
+          <a:bodyPr rtlCol="0" anchor="ctr"/>
+          <a:lstStyle/>
+          <a:p>
+            <a:pPr algn="ctr"/>
+          </a:p>
+        </p:txBody>
+      </p:sp>
+      <p:sp>
+        <p:nvSpPr>
+          <p:cNvPr id="4" name="Rectangle 3"/>
+          <p:cNvSpPr/>
+          <p:nvPr/>
+        </p:nvSpPr>
+        <p:spPr>
+          <a:xfrm>
+            <a:off x="6095390" y="0"/>
+            <a:ext cx="6096304" cy="54864"/>
+          </a:xfrm>
+          <a:prstGeom prst="rect">
+            <a:avLst/>
+          </a:prstGeom>
+          <a:solidFill>
+            <a:srgbClr val="A855F7"/>
+          </a:solidFill>
+          <a:ln>
+            <a:noFill/>
+          </a:ln>
+        </p:spPr>
+        <p:style>
+          <a:lnRef idx="1">
+            <a:schemeClr val="accent1"/>
+          </a:lnRef>
+          <a:fillRef idx="3">
+            <a:schemeClr val="accent1"/>
+          </a:fillRef>
+          <a:effectRef idx="2">
+            <a:schemeClr val="accent1"/>
+          </a:effectRef>
+          <a:fontRef idx="minor">
+            <a:schemeClr val="lt1"/>
+          </a:fontRef>
+        </p:style>
+        <p:txBody>
+          <a:bodyPr rtlCol="0" anchor="ctr"/>
+          <a:lstStyle/>
+          <a:p>
+            <a:pPr algn="ctr"/>
+          </a:p>
+        </p:txBody>
+      </p:sp>
+      <p:sp>
+        <p:nvSpPr>
+          <p:cNvPr id="5" name="TextBox 4"/>
+          <p:cNvSpPr txBox="1"/>
+          <p:nvPr/>
+        </p:nvSpPr>
+        <p:spPr>
+          <a:xfrm>
+            <a:off x="731520" y="384048"/>
+            <a:ext cx="10515600" cy="320040"/>
+          </a:xfrm>
+          <a:prstGeom prst="rect">
+            <a:avLst/>
+          </a:prstGeom>
+          <a:noFill/>
+        </p:spPr>
+        <p:txBody>
+          <a:bodyPr wrap="none">
+            <a:spAutoFit/>
+          </a:bodyPr>
+          <a:lstStyle/>
+          <a:p>
+            <a:pPr>
+              <a:defRPr sz="1050" b="1">
+                <a:solidFill>
+                  <a:srgbClr val="38BDF8"/>
+                </a:solidFill>
+                <a:latin typeface="Arial"/>
+              </a:defRPr>
+            </a:pPr>
+            <a:r>
+              <a:t>SUMMARY &amp; DEFENSE</a:t>
+            </a:r>
+          </a:p>
+        </p:txBody>
+      </p:sp>
+      <p:sp>
+        <p:nvSpPr>
+          <p:cNvPr id="6" name="TextBox 5"/>
+          <p:cNvSpPr txBox="1"/>
+          <p:nvPr/>
+        </p:nvSpPr>
+        <p:spPr>
+          <a:xfrm>
+            <a:off x="731520" y="658368"/>
+            <a:ext cx="10698480" cy="685800"/>
+          </a:xfrm>
+          <a:prstGeom prst="rect">
+            <a:avLst/>
+          </a:prstGeom>
+          <a:noFill/>
+        </p:spPr>
+        <p:txBody>
+          <a:bodyPr wrap="square">
+            <a:spAutoFit/>
+          </a:bodyPr>
+          <a:lstStyle/>
+          <a:p>
+            <a:pPr>
+              <a:defRPr sz="2600" b="1">
+                <a:solidFill>
+                  <a:srgbClr val="F8FAFC"/>
+                </a:solidFill>
+                <a:latin typeface="Arial"/>
+              </a:defRPr>
+            </a:pPr>
+            <a:r>
+              <a:t>Conclusion &amp; Hackathon Judge Defense Sheet</a:t>
+            </a:r>
+          </a:p>
+          <a:p>
+            <a:pPr>
+              <a:spcBef>
+                <a:spcPts val="300"/>
+              </a:spcBef>
               <a:defRPr sz="1300">
                 <a:solidFill>
+                  <a:srgbClr val="94A3B8"/>
+                </a:solidFill>
+                <a:latin typeface="Arial"/>
+              </a:defRPr>
+            </a:pPr>
+            <a:r>
+              <a:t>Summary of why DriftLens wins Problem 5 and quick answers to expected judge inquiries.</a:t>
+            </a:r>
+          </a:p>
+        </p:txBody>
+      </p:sp>
+      <p:sp>
+        <p:nvSpPr>
+          <p:cNvPr id="7" name="Rounded Rectangle 6"/>
+          <p:cNvSpPr/>
+          <p:nvPr/>
+        </p:nvSpPr>
+        <p:spPr>
+          <a:xfrm>
+            <a:off x="731520" y="1554480"/>
+            <a:ext cx="5212080" cy="4754880"/>
+          </a:xfrm>
+          <a:prstGeom prst="roundRect">
+            <a:avLst/>
+          </a:prstGeom>
+          <a:solidFill>
+            <a:srgbClr val="0D2620"/>
+          </a:solidFill>
+          <a:ln w="19050">
+            <a:solidFill>
+              <a:srgbClr val="10B981"/>
+            </a:solidFill>
+          </a:ln>
+        </p:spPr>
+        <p:style>
+          <a:lnRef idx="1">
+            <a:schemeClr val="accent1"/>
+          </a:lnRef>
+          <a:fillRef idx="3">
+            <a:schemeClr val="accent1"/>
+          </a:fillRef>
+          <a:effectRef idx="2">
+            <a:schemeClr val="accent1"/>
+          </a:effectRef>
+          <a:fontRef idx="minor">
+            <a:schemeClr val="lt1"/>
+          </a:fontRef>
+        </p:style>
+        <p:txBody>
+          <a:bodyPr rtlCol="0" anchor="ctr" wrap="square"/>
+          <a:lstStyle/>
+          <a:p>
+            <a:pPr algn="ctr">
+              <a:defRPr sz="1700" b="1">
+                <a:solidFill>
+                  <a:srgbClr val="10B981"/>
+                </a:solidFill>
+              </a:defRPr>
+            </a:pPr>
+            <a:r>
+              <a:t>🏆 Why DriftLens Wins Problem 5</a:t>
+            </a:r>
+          </a:p>
+          <a:p>
+            <a:br/>
+            <a:pPr>
+              <a:defRPr sz="1200" b="1">
+                <a:solidFill>
                   <a:srgbClr val="F8FAFC"/>
                 </a:solidFill>
               </a:defRPr>
             </a:pPr>
             <a:r>
-              <a:t>• CLI &amp; GitHub Action Workflow</a:t>
-            </a:r>
+              <a:t>• Directly Solves the Real Problem:</a:t>
+            </a:r>
+          </a:p>
+          <a:p>
+            <a:pPr>
+              <a:defRPr sz="1100">
+                <a:solidFill>
+                  <a:srgbClr val="CBD5E1"/>
+                </a:solidFill>
+              </a:defRPr>
+            </a:pPr>
+            <a:r>
+              <a:t>Catches factual drift in explanatory prose, configuration tables, and API tutorials where doctests are blind.</a:t>
+            </a:r>
+          </a:p>
+          <a:p>
             <a:br/>
-            <a:r>
-              <a:t>• Interactive Dark-Mode Web Studio</a:t>
-            </a:r>
+            <a:pPr>
+              <a:defRPr sz="1200" b="1">
+                <a:solidFill>
+                  <a:srgbClr val="F8FAFC"/>
+                </a:solidFill>
+              </a:defRPr>
+            </a:pPr>
+            <a:r>
+              <a:t>• Pre-Correction Verification:</a:t>
+            </a:r>
+          </a:p>
+          <a:p>
+            <a:pPr>
+              <a:defRPr sz="1100">
+                <a:solidFill>
+                  <a:srgbClr val="CBD5E1"/>
+                </a:solidFill>
+              </a:defRPr>
+            </a:pPr>
+            <a:r>
+              <a:t>Identifies the original documentation drift on the code commit before any corrective commit is created.</a:t>
+            </a:r>
+          </a:p>
+          <a:p>
             <a:br/>
-            <a:r>
-              <a:t>• Visual Blast Radius Impact Graph</a:t>
-            </a:r>
+            <a:pPr>
+              <a:defRPr sz="1200" b="1">
+                <a:solidFill>
+                  <a:srgbClr val="F8FAFC"/>
+                </a:solidFill>
+              </a:defRPr>
+            </a:pPr>
+            <a:r>
+              <a:t>• Zero Hallucinations:</a:t>
+            </a:r>
+          </a:p>
+          <a:p>
+            <a:pPr>
+              <a:defRPr sz="1100">
+                <a:solidFill>
+                  <a:srgbClr val="CBD5E1"/>
+                </a:solidFill>
+              </a:defRPr>
+            </a:pPr>
+            <a:r>
+              <a:t>Deterministic AST and diff parsing anchors all file paths and line ranges; the AI model only performs bounded semantic reasoning.</a:t>
+            </a:r>
+          </a:p>
+          <a:p>
             <a:br/>
-            <a:r>
-              <a:t>• 70 Unit &amp; Integration Tests (100%)</a:t>
+            <a:pPr>
+              <a:defRPr sz="1200" b="1">
+                <a:solidFill>
+                  <a:srgbClr val="F8FAFC"/>
+                </a:solidFill>
+              </a:defRPr>
+            </a:pPr>
+            <a:r>
+              <a:t>• 100% Hackathon Compliant:</a:t>
+            </a:r>
+          </a:p>
+          <a:p>
+            <a:pPr>
+              <a:defRPr sz="1100">
+                <a:solidFill>
+                  <a:srgbClr val="CBD5E1"/>
+                </a:solidFill>
+              </a:defRPr>
+            </a:pPr>
+            <a:r>
+              <a:t>Powered exclusively by open-weight Qwen 2.5 7B. Zero closed or proprietary model APIs.</a:t>
+            </a:r>
+          </a:p>
+          <a:p>
+            <a:br/>
+            <a:pPr>
+              <a:defRPr sz="1200" b="1">
+                <a:solidFill>
+                  <a:srgbClr val="F8FAFC"/>
+                </a:solidFill>
+              </a:defRPr>
+            </a:pPr>
+            <a:r>
+              <a:t>• Complete Developer Experience:</a:t>
+            </a:r>
+          </a:p>
+          <a:p>
+            <a:pPr>
+              <a:defRPr sz="1100">
+                <a:solidFill>
+                  <a:srgbClr val="CBD5E1"/>
+                </a:solidFill>
+              </a:defRPr>
+            </a:pPr>
+            <a:r>
+              <a:t>CLI + GitHub Action + Interactive Web Studio + SVG Impact Graph + 1-Click Fix + Starter README Generator.</a:t>
+            </a:r>
+          </a:p>
+        </p:txBody>
+      </p:sp>
+      <p:sp>
+        <p:nvSpPr>
+          <p:cNvPr id="8" name="Rounded Rectangle 7"/>
+          <p:cNvSpPr/>
+          <p:nvPr/>
+        </p:nvSpPr>
+        <p:spPr>
+          <a:xfrm>
+            <a:off x="6217920" y="1554480"/>
+            <a:ext cx="5212080" cy="4754880"/>
+          </a:xfrm>
+          <a:prstGeom prst="roundRect">
+            <a:avLst/>
+          </a:prstGeom>
+          <a:solidFill>
+            <a:srgbClr val="121A2C"/>
+          </a:solidFill>
+          <a:ln w="19050">
+            <a:solidFill>
+              <a:srgbClr val="38BDF8"/>
+            </a:solidFill>
+          </a:ln>
+        </p:spPr>
+        <p:style>
+          <a:lnRef idx="1">
+            <a:schemeClr val="accent1"/>
+          </a:lnRef>
+          <a:fillRef idx="3">
+            <a:schemeClr val="accent1"/>
+          </a:fillRef>
+          <a:effectRef idx="2">
+            <a:schemeClr val="accent1"/>
+          </a:effectRef>
+          <a:fontRef idx="minor">
+            <a:schemeClr val="lt1"/>
+          </a:fontRef>
+        </p:style>
+        <p:txBody>
+          <a:bodyPr rtlCol="0" anchor="ctr" wrap="square"/>
+          <a:lstStyle/>
+          <a:p>
+            <a:pPr algn="ctr">
+              <a:defRPr sz="1700" b="1">
+                <a:solidFill>
+                  <a:srgbClr val="38BDF8"/>
+                </a:solidFill>
+              </a:defRPr>
+            </a:pPr>
+            <a:r>
+              <a:t>🛡️ Judge Q&amp;A Defense Cheat Sheet</a:t>
+            </a:r>
+          </a:p>
+          <a:p>
+            <a:br/>
+            <a:pPr>
+              <a:defRPr sz="1150" b="1">
+                <a:solidFill>
+                  <a:srgbClr val="F59E0B"/>
+                </a:solidFill>
+              </a:defRPr>
+            </a:pPr>
+            <a:r>
+              <a:t>Q: Why use an LLM instead of Grep / Regex?</a:t>
+            </a:r>
+          </a:p>
+          <a:p>
+            <a:pPr>
+              <a:defRPr sz="1050">
+                <a:solidFill>
+                  <a:srgbClr val="F8FAFC"/>
+                </a:solidFill>
+              </a:defRPr>
+            </a:pPr>
+            <a:r>
+              <a:t>A: Grep can find words, but cannot know if changing a number from 30 to 60 contradicts 'the system waits half a minute before timing out'.</a:t>
+            </a:r>
+          </a:p>
+          <a:p>
+            <a:br/>
+            <a:pPr>
+              <a:defRPr sz="1150" b="1">
+                <a:solidFill>
+                  <a:srgbClr val="F59E0B"/>
+                </a:solidFill>
+              </a:defRPr>
+            </a:pPr>
+            <a:r>
+              <a:t>Q: How are false alarms minimized?</a:t>
+            </a:r>
+          </a:p>
+          <a:p>
+            <a:pPr>
+              <a:defRPr sz="1050">
+                <a:solidFill>
+                  <a:srgbClr val="F8FAFC"/>
+                </a:solidFill>
+              </a:defRPr>
+            </a:pPr>
+            <a:r>
+              <a:t>A: Same-PR shield suppresses warnings if the doc was already updated; composite formula discards scores below 60%.</a:t>
+            </a:r>
+          </a:p>
+          <a:p>
+            <a:br/>
+            <a:pPr>
+              <a:defRPr sz="1150" b="1">
+                <a:solidFill>
+                  <a:srgbClr val="F59E0B"/>
+                </a:solidFill>
+              </a:defRPr>
+            </a:pPr>
+            <a:r>
+              <a:t>Q: Why not send the entire repo to the LLM?</a:t>
+            </a:r>
+          </a:p>
+          <a:p>
+            <a:pPr>
+              <a:defRPr sz="1050">
+                <a:solidFill>
+                  <a:srgbClr val="F8FAFC"/>
+                </a:solidFill>
+              </a:defRPr>
+            </a:pPr>
+            <a:r>
+              <a:t>A: Too slow, expensive, and prone to hallucinations. We isolate candidate pairs deterministically first.</a:t>
+            </a:r>
+          </a:p>
+          <a:p>
+            <a:br/>
+            <a:pPr>
+              <a:defRPr sz="1150" b="1">
+                <a:solidFill>
+                  <a:srgbClr val="F59E0B"/>
+                </a:solidFill>
+              </a:defRPr>
+            </a:pPr>
+            <a:r>
+              <a:t>Q: Is this ready for real repositories?</a:t>
+            </a:r>
+          </a:p>
+          <a:p>
+            <a:pPr>
+              <a:defRPr sz="1050">
+                <a:solidFill>
+                  <a:srgbClr val="F8FAFC"/>
+                </a:solidFill>
+              </a:defRPr>
+            </a:pPr>
+            <a:r>
+              <a:t>A: Yes. 70 unit tests passing, action.yml available, and runs on any GitHub repository.</a:t>
             </a:r>
           </a:p>
         </p:txBody>
@@ -3541,7 +6415,7 @@
             <a:avLst/>
           </a:prstGeom>
           <a:solidFill>
-            <a:srgbClr val="090D16"/>
+            <a:srgbClr val="0B0F19"/>
           </a:solidFill>
           <a:ln>
             <a:noFill/>
@@ -3571,97 +6445,23 @@
       </p:sp>
       <p:sp>
         <p:nvSpPr>
-          <p:cNvPr id="3" name="TextBox 2"/>
-          <p:cNvSpPr txBox="1"/>
-          <p:nvPr/>
-        </p:nvSpPr>
-        <p:spPr>
-          <a:xfrm>
-            <a:off x="731520" y="457200"/>
-            <a:ext cx="10058400" cy="320040"/>
-          </a:xfrm>
-          <a:prstGeom prst="rect">
-            <a:avLst/>
-          </a:prstGeom>
-          <a:noFill/>
-        </p:spPr>
-        <p:txBody>
-          <a:bodyPr wrap="square">
-            <a:spAutoFit/>
-          </a:bodyPr>
-          <a:lstStyle/>
-          <a:p>
-            <a:pPr>
-              <a:defRPr sz="1100" b="1">
-                <a:solidFill>
-                  <a:srgbClr val="38BDF8"/>
-                </a:solidFill>
-                <a:latin typeface="Arial"/>
-              </a:defRPr>
-            </a:pPr>
-            <a:r>
-              <a:t>DRIFTLENS | HACKTOBERFEST 2026</a:t>
-            </a:r>
-          </a:p>
-        </p:txBody>
-      </p:sp>
-      <p:sp>
-        <p:nvSpPr>
-          <p:cNvPr id="4" name="TextBox 3"/>
-          <p:cNvSpPr txBox="1"/>
-          <p:nvPr/>
-        </p:nvSpPr>
-        <p:spPr>
-          <a:xfrm>
-            <a:off x="731520" y="777240"/>
-            <a:ext cx="10515600" cy="731520"/>
-          </a:xfrm>
-          <a:prstGeom prst="rect">
-            <a:avLst/>
-          </a:prstGeom>
-          <a:noFill/>
-        </p:spPr>
-        <p:txBody>
-          <a:bodyPr wrap="square">
-            <a:spAutoFit/>
-          </a:bodyPr>
-          <a:lstStyle/>
-          <a:p>
-            <a:pPr>
-              <a:defRPr sz="2800" b="1">
-                <a:solidFill>
-                  <a:srgbClr val="F8FAFC"/>
-                </a:solidFill>
-                <a:latin typeface="Arial"/>
-              </a:defRPr>
-            </a:pPr>
-            <a:r>
-              <a:t>The Problem: Code Changes Invalidate Documentation</a:t>
-            </a:r>
-          </a:p>
-        </p:txBody>
-      </p:sp>
-      <p:sp>
-        <p:nvSpPr>
-          <p:cNvPr id="5" name="Rounded Rectangle 4"/>
+          <p:cNvPr id="3" name="Rectangle 2"/>
           <p:cNvSpPr/>
           <p:nvPr/>
         </p:nvSpPr>
         <p:spPr>
           <a:xfrm>
-            <a:off x="731520" y="1645920"/>
-            <a:ext cx="5212080" cy="2011680"/>
-          </a:xfrm>
-          <a:prstGeom prst="roundRect">
+            <a:off x="0" y="0"/>
+            <a:ext cx="6095390" cy="54864"/>
+          </a:xfrm>
+          <a:prstGeom prst="rect">
             <a:avLst/>
           </a:prstGeom>
           <a:solidFill>
-            <a:srgbClr val="121826"/>
+            <a:srgbClr val="38BDF8"/>
           </a:solidFill>
-          <a:ln w="15240">
-            <a:solidFill>
-              <a:srgbClr val="1F293D"/>
-            </a:solidFill>
+          <a:ln>
+            <a:noFill/>
           </a:ln>
         </p:spPr>
         <p:style>
@@ -3679,60 +6479,32 @@
           </a:fontRef>
         </p:style>
         <p:txBody>
-          <a:bodyPr rtlCol="0" anchor="ctr" wrap="square"/>
-          <a:lstStyle/>
-          <a:p>
-            <a:pPr algn="ctr">
-              <a:defRPr sz="1800" b="1">
-                <a:solidFill>
-                  <a:srgbClr val="F43F5E"/>
-                </a:solidFill>
-                <a:latin typeface="Arial"/>
-              </a:defRPr>
-            </a:pPr>
-            <a:r>
-              <a:t>⚠️ Flag Renames</a:t>
-            </a:r>
-          </a:p>
-          <a:p>
-            <a:pPr>
-              <a:spcBef>
-                <a:spcPts val="1000"/>
-              </a:spcBef>
-              <a:defRPr sz="1400">
-                <a:solidFill>
-                  <a:srgbClr val="F8FAFC"/>
-                </a:solidFill>
-                <a:latin typeface="Arial"/>
-              </a:defRPr>
-            </a:pPr>
-            <a:r>
-              <a:t>A CLI flag is renamed (--timeout -&gt; --deadline), but prose guides and tutorials still instruct users to run the old command.</a:t>
-            </a:r>
-          </a:p>
-        </p:txBody>
-      </p:sp>
-      <p:sp>
-        <p:nvSpPr>
-          <p:cNvPr id="6" name="Rounded Rectangle 5"/>
+          <a:bodyPr rtlCol="0" anchor="ctr"/>
+          <a:lstStyle/>
+          <a:p>
+            <a:pPr algn="ctr"/>
+          </a:p>
+        </p:txBody>
+      </p:sp>
+      <p:sp>
+        <p:nvSpPr>
+          <p:cNvPr id="4" name="Rectangle 3"/>
           <p:cNvSpPr/>
           <p:nvPr/>
         </p:nvSpPr>
         <p:spPr>
           <a:xfrm>
-            <a:off x="6126480" y="1645920"/>
-            <a:ext cx="5212080" cy="2011680"/>
-          </a:xfrm>
-          <a:prstGeom prst="roundRect">
+            <a:off x="6095390" y="0"/>
+            <a:ext cx="6096304" cy="54864"/>
+          </a:xfrm>
+          <a:prstGeom prst="rect">
             <a:avLst/>
           </a:prstGeom>
           <a:solidFill>
-            <a:srgbClr val="121826"/>
+            <a:srgbClr val="A855F7"/>
           </a:solidFill>
-          <a:ln w="15240">
-            <a:solidFill>
-              <a:srgbClr val="1F293D"/>
-            </a:solidFill>
+          <a:ln>
+            <a:noFill/>
           </a:ln>
         </p:spPr>
         <p:style>
@@ -3750,35 +6522,97 @@
           </a:fontRef>
         </p:style>
         <p:txBody>
-          <a:bodyPr rtlCol="0" anchor="ctr" wrap="square"/>
-          <a:lstStyle/>
-          <a:p>
-            <a:pPr algn="ctr">
-              <a:defRPr sz="1800" b="1">
-                <a:solidFill>
-                  <a:srgbClr val="F43F5E"/>
+          <a:bodyPr rtlCol="0" anchor="ctr"/>
+          <a:lstStyle/>
+          <a:p>
+            <a:pPr algn="ctr"/>
+          </a:p>
+        </p:txBody>
+      </p:sp>
+      <p:sp>
+        <p:nvSpPr>
+          <p:cNvPr id="5" name="TextBox 4"/>
+          <p:cNvSpPr txBox="1"/>
+          <p:nvPr/>
+        </p:nvSpPr>
+        <p:spPr>
+          <a:xfrm>
+            <a:off x="731520" y="384048"/>
+            <a:ext cx="10515600" cy="320040"/>
+          </a:xfrm>
+          <a:prstGeom prst="rect">
+            <a:avLst/>
+          </a:prstGeom>
+          <a:noFill/>
+        </p:spPr>
+        <p:txBody>
+          <a:bodyPr wrap="none">
+            <a:spAutoFit/>
+          </a:bodyPr>
+          <a:lstStyle/>
+          <a:p>
+            <a:pPr>
+              <a:defRPr sz="1050" b="1">
+                <a:solidFill>
+                  <a:srgbClr val="38BDF8"/>
                 </a:solidFill>
                 <a:latin typeface="Arial"/>
               </a:defRPr>
             </a:pPr>
             <a:r>
-              <a:t>⚠️ Altered Defaults</a:t>
+              <a:t>THE REAL-WORLD DILEMMA</a:t>
+            </a:r>
+          </a:p>
+        </p:txBody>
+      </p:sp>
+      <p:sp>
+        <p:nvSpPr>
+          <p:cNvPr id="6" name="TextBox 5"/>
+          <p:cNvSpPr txBox="1"/>
+          <p:nvPr/>
+        </p:nvSpPr>
+        <p:spPr>
+          <a:xfrm>
+            <a:off x="731520" y="658368"/>
+            <a:ext cx="10698480" cy="685800"/>
+          </a:xfrm>
+          <a:prstGeom prst="rect">
+            <a:avLst/>
+          </a:prstGeom>
+          <a:noFill/>
+        </p:spPr>
+        <p:txBody>
+          <a:bodyPr wrap="square">
+            <a:spAutoFit/>
+          </a:bodyPr>
+          <a:lstStyle/>
+          <a:p>
+            <a:pPr>
+              <a:defRPr sz="2600" b="1">
+                <a:solidFill>
+                  <a:srgbClr val="F8FAFC"/>
+                </a:solidFill>
+                <a:latin typeface="Arial"/>
+              </a:defRPr>
+            </a:pPr>
+            <a:r>
+              <a:t>Code Moves Fast — Documentation Silently Becomes Wrong</a:t>
             </a:r>
           </a:p>
           <a:p>
             <a:pPr>
               <a:spcBef>
-                <a:spcPts val="1000"/>
+                <a:spcPts val="300"/>
               </a:spcBef>
-              <a:defRPr sz="1400">
-                <a:solidFill>
-                  <a:srgbClr val="F8FAFC"/>
+              <a:defRPr sz="1300">
+                <a:solidFill>
+                  <a:srgbClr val="94A3B8"/>
                 </a:solidFill>
                 <a:latin typeface="Arial"/>
               </a:defRPr>
             </a:pPr>
             <a:r>
-              <a:t>A default timeout changes from 30s to 60s in code, but configuration tables continue displaying the old 30s value.</a:t>
+              <a:t>Every day, pull requests introduce code changes that invalidate explanatory prose, configuration tables, and API tutorials.</a:t>
             </a:r>
           </a:p>
         </p:txBody>
@@ -3791,18 +6625,18 @@
         </p:nvSpPr>
         <p:spPr>
           <a:xfrm>
-            <a:off x="731520" y="3931920"/>
-            <a:ext cx="5212080" cy="2011680"/>
+            <a:off x="731520" y="1554480"/>
+            <a:ext cx="5212080" cy="2194560"/>
           </a:xfrm>
           <a:prstGeom prst="roundRect">
             <a:avLst/>
           </a:prstGeom>
           <a:solidFill>
-            <a:srgbClr val="121826"/>
+            <a:srgbClr val="28121C"/>
           </a:solidFill>
           <a:ln w="15240">
             <a:solidFill>
-              <a:srgbClr val="1F293D"/>
+              <a:srgbClr val="F43F5E"/>
             </a:solidFill>
           </a:ln>
         </p:spPr>
@@ -3825,31 +6659,49 @@
           <a:lstStyle/>
           <a:p>
             <a:pPr algn="ctr">
-              <a:defRPr sz="1800" b="1">
+              <a:defRPr sz="1500" b="1">
                 <a:solidFill>
                   <a:srgbClr val="F43F5E"/>
                 </a:solidFill>
-                <a:latin typeface="Arial"/>
-              </a:defRPr>
-            </a:pPr>
-            <a:r>
-              <a:t>⚠️ Signature Shifts</a:t>
+              </a:defRPr>
+            </a:pPr>
+            <a:r>
+              <a:t>⚠️ Flag Renames &amp; Obsolete CLI Guides</a:t>
             </a:r>
           </a:p>
           <a:p>
             <a:pPr>
               <a:spcBef>
-                <a:spcPts val="1000"/>
+                <a:spcPts val="400"/>
               </a:spcBef>
-              <a:defRPr sz="1400">
+              <a:defRPr sz="1200">
                 <a:solidFill>
                   <a:srgbClr val="F8FAFC"/>
                 </a:solidFill>
-                <a:latin typeface="Arial"/>
-              </a:defRPr>
-            </a:pPr>
-            <a:r>
-              <a:t>API parameters are added or reordered (registerUser), yet integration tutorials continue explaining the legacy signature.</a:t>
+              </a:defRPr>
+            </a:pPr>
+            <a:r>
+              <a:t>A CLI flag is renamed (--timeout -&gt; --deadline), but documentation still instructs developers to invoke the obsolete flag.</a:t>
+            </a:r>
+          </a:p>
+          <a:p>
+            <a:pPr>
+              <a:spcBef>
+                <a:spcPts val="600"/>
+              </a:spcBef>
+              <a:defRPr sz="1000">
+                <a:solidFill>
+                  <a:srgbClr val="CBD5E1"/>
+                </a:solidFill>
+                <a:latin typeface="Consolas"/>
+              </a:defRPr>
+            </a:pPr>
+            <a:r>
+              <a:t>CLI argument parsing: parser.add_argument('--deadline')</a:t>
+            </a:r>
+            <a:br/>
+            <a:r>
+              <a:t>README.md: Use --timeout to terminate slow jobs.</a:t>
             </a:r>
           </a:p>
         </p:txBody>
@@ -3862,18 +6714,18 @@
         </p:nvSpPr>
         <p:spPr>
           <a:xfrm>
-            <a:off x="6126480" y="3931920"/>
-            <a:ext cx="5212080" cy="2011680"/>
+            <a:off x="6126480" y="1554480"/>
+            <a:ext cx="5212080" cy="2194560"/>
           </a:xfrm>
           <a:prstGeom prst="roundRect">
             <a:avLst/>
           </a:prstGeom>
           <a:solidFill>
-            <a:srgbClr val="121826"/>
+            <a:srgbClr val="261E0F"/>
           </a:solidFill>
           <a:ln w="15240">
             <a:solidFill>
-              <a:srgbClr val="1F293D"/>
+              <a:srgbClr val="F59E0B"/>
             </a:solidFill>
           </a:ln>
         </p:spPr>
@@ -3896,31 +6748,227 @@
           <a:lstStyle/>
           <a:p>
             <a:pPr algn="ctr">
-              <a:defRPr sz="1800" b="1">
-                <a:solidFill>
-                  <a:srgbClr val="F43F5E"/>
-                </a:solidFill>
-                <a:latin typeface="Arial"/>
-              </a:defRPr>
-            </a:pPr>
-            <a:r>
-              <a:t>⚠️ Dead Features</a:t>
+              <a:defRPr sz="1500" b="1">
+                <a:solidFill>
+                  <a:srgbClr val="F59E0B"/>
+                </a:solidFill>
+              </a:defRPr>
+            </a:pPr>
+            <a:r>
+              <a:t>⚠️ Altered Defaults &amp; Outdated Config Tables</a:t>
             </a:r>
           </a:p>
           <a:p>
             <a:pPr>
               <a:spcBef>
-                <a:spcPts val="1000"/>
+                <a:spcPts val="400"/>
               </a:spcBef>
-              <a:defRPr sz="1400">
+              <a:defRPr sz="1200">
                 <a:solidFill>
                   <a:srgbClr val="F8FAFC"/>
                 </a:solidFill>
-                <a:latin typeface="Arial"/>
-              </a:defRPr>
-            </a:pPr>
-            <a:r>
-              <a:t>An obsolete endpoint (/api/v1/legacy-export) is deleted in code, but stays documented as active in API docs.</a:t>
+              </a:defRPr>
+            </a:pPr>
+            <a:r>
+              <a:t>A default timeout increases from 30s to 60s in code, but configuration tables in Markdown continue displaying 30s.</a:t>
+            </a:r>
+          </a:p>
+          <a:p>
+            <a:pPr>
+              <a:spcBef>
+                <a:spcPts val="600"/>
+              </a:spcBef>
+              <a:defRPr sz="1000">
+                <a:solidFill>
+                  <a:srgbClr val="CBD5E1"/>
+                </a:solidFill>
+                <a:latin typeface="Consolas"/>
+              </a:defRPr>
+            </a:pPr>
+            <a:r>
+              <a:t>src/config.js: export const DEFAULT_TIMEOUT = 60;</a:t>
+            </a:r>
+            <a:br/>
+            <a:r>
+              <a:t>docs/config.md: | DEFAULT_TIMEOUT | 30 | Seconds |</a:t>
+            </a:r>
+          </a:p>
+        </p:txBody>
+      </p:sp>
+      <p:sp>
+        <p:nvSpPr>
+          <p:cNvPr id="9" name="Rounded Rectangle 8"/>
+          <p:cNvSpPr/>
+          <p:nvPr/>
+        </p:nvSpPr>
+        <p:spPr>
+          <a:xfrm>
+            <a:off x="731520" y="3931920"/>
+            <a:ext cx="5212080" cy="2194560"/>
+          </a:xfrm>
+          <a:prstGeom prst="roundRect">
+            <a:avLst/>
+          </a:prstGeom>
+          <a:solidFill>
+            <a:srgbClr val="1A1433"/>
+          </a:solidFill>
+          <a:ln w="15240">
+            <a:solidFill>
+              <a:srgbClr val="A855F7"/>
+            </a:solidFill>
+          </a:ln>
+        </p:spPr>
+        <p:style>
+          <a:lnRef idx="1">
+            <a:schemeClr val="accent1"/>
+          </a:lnRef>
+          <a:fillRef idx="3">
+            <a:schemeClr val="accent1"/>
+          </a:fillRef>
+          <a:effectRef idx="2">
+            <a:schemeClr val="accent1"/>
+          </a:effectRef>
+          <a:fontRef idx="minor">
+            <a:schemeClr val="lt1"/>
+          </a:fontRef>
+        </p:style>
+        <p:txBody>
+          <a:bodyPr rtlCol="0" anchor="ctr" wrap="square"/>
+          <a:lstStyle/>
+          <a:p>
+            <a:pPr algn="ctr">
+              <a:defRPr sz="1500" b="1">
+                <a:solidFill>
+                  <a:srgbClr val="A855F7"/>
+                </a:solidFill>
+              </a:defRPr>
+            </a:pPr>
+            <a:r>
+              <a:t>⚠️ Modified Signatures &amp; Broken Tutorials</a:t>
+            </a:r>
+          </a:p>
+          <a:p>
+            <a:pPr>
+              <a:spcBef>
+                <a:spcPts val="400"/>
+              </a:spcBef>
+              <a:defRPr sz="1200">
+                <a:solidFill>
+                  <a:srgbClr val="F8FAFC"/>
+                </a:solidFill>
+              </a:defRPr>
+            </a:pPr>
+            <a:r>
+              <a:t>An API function parameter is added or reordered, yet tutorial code blocks and integration prose explain the legacy signature.</a:t>
+            </a:r>
+          </a:p>
+          <a:p>
+            <a:pPr>
+              <a:spcBef>
+                <a:spcPts val="600"/>
+              </a:spcBef>
+              <a:defRPr sz="1000">
+                <a:solidFill>
+                  <a:srgbClr val="CBD5E1"/>
+                </a:solidFill>
+                <a:latin typeface="Consolas"/>
+              </a:defRPr>
+            </a:pPr>
+            <a:r>
+              <a:t>src/api.js: registerUser(email, password, tenantId)</a:t>
+            </a:r>
+            <a:br/>
+            <a:r>
+              <a:t>README: call registerUser(email, password) to sign up.</a:t>
+            </a:r>
+          </a:p>
+        </p:txBody>
+      </p:sp>
+      <p:sp>
+        <p:nvSpPr>
+          <p:cNvPr id="10" name="Rounded Rectangle 9"/>
+          <p:cNvSpPr/>
+          <p:nvPr/>
+        </p:nvSpPr>
+        <p:spPr>
+          <a:xfrm>
+            <a:off x="6126480" y="3931920"/>
+            <a:ext cx="5212080" cy="2194560"/>
+          </a:xfrm>
+          <a:prstGeom prst="roundRect">
+            <a:avLst/>
+          </a:prstGeom>
+          <a:solidFill>
+            <a:srgbClr val="0F1D38"/>
+          </a:solidFill>
+          <a:ln w="15240">
+            <a:solidFill>
+              <a:srgbClr val="38BDF8"/>
+            </a:solidFill>
+          </a:ln>
+        </p:spPr>
+        <p:style>
+          <a:lnRef idx="1">
+            <a:schemeClr val="accent1"/>
+          </a:lnRef>
+          <a:fillRef idx="3">
+            <a:schemeClr val="accent1"/>
+          </a:fillRef>
+          <a:effectRef idx="2">
+            <a:schemeClr val="accent1"/>
+          </a:effectRef>
+          <a:fontRef idx="minor">
+            <a:schemeClr val="lt1"/>
+          </a:fontRef>
+        </p:style>
+        <p:txBody>
+          <a:bodyPr rtlCol="0" anchor="ctr" wrap="square"/>
+          <a:lstStyle/>
+          <a:p>
+            <a:pPr algn="ctr">
+              <a:defRPr sz="1500" b="1">
+                <a:solidFill>
+                  <a:srgbClr val="38BDF8"/>
+                </a:solidFill>
+              </a:defRPr>
+            </a:pPr>
+            <a:r>
+              <a:t>⚠️ Deleted Features &amp; Zombie Documentation</a:t>
+            </a:r>
+          </a:p>
+          <a:p>
+            <a:pPr>
+              <a:spcBef>
+                <a:spcPts val="400"/>
+              </a:spcBef>
+              <a:defRPr sz="1200">
+                <a:solidFill>
+                  <a:srgbClr val="F8FAFC"/>
+                </a:solidFill>
+              </a:defRPr>
+            </a:pPr>
+            <a:r>
+              <a:t>An obsolete HTTP endpoint (/api/v1/legacy-export) is removed from the codebase, but remains documented as active.</a:t>
+            </a:r>
+          </a:p>
+          <a:p>
+            <a:pPr>
+              <a:spcBef>
+                <a:spcPts val="600"/>
+              </a:spcBef>
+              <a:defRPr sz="1000">
+                <a:solidFill>
+                  <a:srgbClr val="CBD5E1"/>
+                </a:solidFill>
+                <a:latin typeface="Consolas"/>
+              </a:defRPr>
+            </a:pPr>
+            <a:r>
+              <a:t>src/routes.js: Route deleted in PR</a:t>
+            </a:r>
+            <a:br/>
+            <a:r>
+              <a:t>README.md: Use /api/v1/legacy-export to export data.</a:t>
             </a:r>
           </a:p>
         </p:txBody>
@@ -3958,7 +7006,7 @@
             <a:avLst/>
           </a:prstGeom>
           <a:solidFill>
-            <a:srgbClr val="090D16"/>
+            <a:srgbClr val="0B0F19"/>
           </a:solidFill>
           <a:ln>
             <a:noFill/>
@@ -3988,14 +7036,136 @@
       </p:sp>
       <p:sp>
         <p:nvSpPr>
-          <p:cNvPr id="3" name="TextBox 2"/>
+          <p:cNvPr id="3" name="Rectangle 2"/>
+          <p:cNvSpPr/>
+          <p:nvPr/>
+        </p:nvSpPr>
+        <p:spPr>
+          <a:xfrm>
+            <a:off x="0" y="0"/>
+            <a:ext cx="6095390" cy="54864"/>
+          </a:xfrm>
+          <a:prstGeom prst="rect">
+            <a:avLst/>
+          </a:prstGeom>
+          <a:solidFill>
+            <a:srgbClr val="38BDF8"/>
+          </a:solidFill>
+          <a:ln>
+            <a:noFill/>
+          </a:ln>
+        </p:spPr>
+        <p:style>
+          <a:lnRef idx="1">
+            <a:schemeClr val="accent1"/>
+          </a:lnRef>
+          <a:fillRef idx="3">
+            <a:schemeClr val="accent1"/>
+          </a:fillRef>
+          <a:effectRef idx="2">
+            <a:schemeClr val="accent1"/>
+          </a:effectRef>
+          <a:fontRef idx="minor">
+            <a:schemeClr val="lt1"/>
+          </a:fontRef>
+        </p:style>
+        <p:txBody>
+          <a:bodyPr rtlCol="0" anchor="ctr"/>
+          <a:lstStyle/>
+          <a:p>
+            <a:pPr algn="ctr"/>
+          </a:p>
+        </p:txBody>
+      </p:sp>
+      <p:sp>
+        <p:nvSpPr>
+          <p:cNvPr id="4" name="Rectangle 3"/>
+          <p:cNvSpPr/>
+          <p:nvPr/>
+        </p:nvSpPr>
+        <p:spPr>
+          <a:xfrm>
+            <a:off x="6095390" y="0"/>
+            <a:ext cx="6096304" cy="54864"/>
+          </a:xfrm>
+          <a:prstGeom prst="rect">
+            <a:avLst/>
+          </a:prstGeom>
+          <a:solidFill>
+            <a:srgbClr val="A855F7"/>
+          </a:solidFill>
+          <a:ln>
+            <a:noFill/>
+          </a:ln>
+        </p:spPr>
+        <p:style>
+          <a:lnRef idx="1">
+            <a:schemeClr val="accent1"/>
+          </a:lnRef>
+          <a:fillRef idx="3">
+            <a:schemeClr val="accent1"/>
+          </a:fillRef>
+          <a:effectRef idx="2">
+            <a:schemeClr val="accent1"/>
+          </a:effectRef>
+          <a:fontRef idx="minor">
+            <a:schemeClr val="lt1"/>
+          </a:fontRef>
+        </p:style>
+        <p:txBody>
+          <a:bodyPr rtlCol="0" anchor="ctr"/>
+          <a:lstStyle/>
+          <a:p>
+            <a:pPr algn="ctr"/>
+          </a:p>
+        </p:txBody>
+      </p:sp>
+      <p:sp>
+        <p:nvSpPr>
+          <p:cNvPr id="5" name="TextBox 4"/>
           <p:cNvSpPr txBox="1"/>
           <p:nvPr/>
         </p:nvSpPr>
         <p:spPr>
           <a:xfrm>
-            <a:off x="731520" y="457200"/>
-            <a:ext cx="10058400" cy="320040"/>
+            <a:off x="731520" y="384048"/>
+            <a:ext cx="10515600" cy="320040"/>
+          </a:xfrm>
+          <a:prstGeom prst="rect">
+            <a:avLst/>
+          </a:prstGeom>
+          <a:noFill/>
+        </p:spPr>
+        <p:txBody>
+          <a:bodyPr wrap="none">
+            <a:spAutoFit/>
+          </a:bodyPr>
+          <a:lstStyle/>
+          <a:p>
+            <a:pPr>
+              <a:defRPr sz="1050" b="1">
+                <a:solidFill>
+                  <a:srgbClr val="38BDF8"/>
+                </a:solidFill>
+                <a:latin typeface="Arial"/>
+              </a:defRPr>
+            </a:pPr>
+            <a:r>
+              <a:t>STATE OF THE ART COMPARISON</a:t>
+            </a:r>
+          </a:p>
+        </p:txBody>
+      </p:sp>
+      <p:sp>
+        <p:nvSpPr>
+          <p:cNvPr id="6" name="TextBox 5"/>
+          <p:cNvSpPr txBox="1"/>
+          <p:nvPr/>
+        </p:nvSpPr>
+        <p:spPr>
+          <a:xfrm>
+            <a:off x="731520" y="658368"/>
+            <a:ext cx="10698480" cy="685800"/>
           </a:xfrm>
           <a:prstGeom prst="rect">
             <a:avLst/>
@@ -4009,58 +7179,38 @@
           <a:lstStyle/>
           <a:p>
             <a:pPr>
-              <a:defRPr sz="1100" b="1">
-                <a:solidFill>
-                  <a:srgbClr val="38BDF8"/>
+              <a:defRPr sz="2600" b="1">
+                <a:solidFill>
+                  <a:srgbClr val="F8FAFC"/>
                 </a:solidFill>
                 <a:latin typeface="Arial"/>
               </a:defRPr>
             </a:pPr>
             <a:r>
-              <a:t>DRIFTLENS | HACKTOBERFEST 2026</a:t>
-            </a:r>
-          </a:p>
-        </p:txBody>
-      </p:sp>
-      <p:sp>
-        <p:nvSpPr>
-          <p:cNvPr id="4" name="TextBox 3"/>
-          <p:cNvSpPr txBox="1"/>
-          <p:nvPr/>
-        </p:nvSpPr>
-        <p:spPr>
-          <a:xfrm>
-            <a:off x="731520" y="777240"/>
-            <a:ext cx="10515600" cy="731520"/>
-          </a:xfrm>
-          <a:prstGeom prst="rect">
-            <a:avLst/>
-          </a:prstGeom>
-          <a:noFill/>
-        </p:spPr>
-        <p:txBody>
-          <a:bodyPr wrap="square">
-            <a:spAutoFit/>
-          </a:bodyPr>
-          <a:lstStyle/>
-          <a:p>
-            <a:pPr>
-              <a:defRPr sz="2800" b="1">
-                <a:solidFill>
-                  <a:srgbClr val="F8FAFC"/>
+              <a:t>Why Existing Documentation Testing Tools Fail</a:t>
+            </a:r>
+          </a:p>
+          <a:p>
+            <a:pPr>
+              <a:spcBef>
+                <a:spcPts val="300"/>
+              </a:spcBef>
+              <a:defRPr sz="1300">
+                <a:solidFill>
+                  <a:srgbClr val="94A3B8"/>
                 </a:solidFill>
                 <a:latin typeface="Arial"/>
               </a:defRPr>
             </a:pPr>
             <a:r>
-              <a:t>Why Existing Tools Cannot Solve This Problem</a:t>
+              <a:t>Existing solutions only validate executable snippets. DriftLens bridges the semantic prose divide.</a:t>
             </a:r>
           </a:p>
         </p:txBody>
       </p:sp>
       <p:graphicFrame>
         <p:nvGraphicFramePr>
-          <p:cNvPr id="5" name="Table 4"/>
+          <p:cNvPr id="7" name="Table 6"/>
           <p:cNvGraphicFramePr>
             <a:graphicFrameLocks noGrp="1"/>
           </p:cNvGraphicFramePr>
@@ -4068,7 +7218,7 @@
         </p:nvGraphicFramePr>
         <p:xfrm>
           <a:off x="731520" y="1645920"/>
-          <a:ext cx="10698480" cy="4389120"/>
+          <a:ext cx="10698480" cy="4572000"/>
         </p:xfrm>
         <a:graphic>
           <a:graphicData uri="http://schemas.openxmlformats.org/drawingml/2006/table">
@@ -4078,18 +7228,18 @@
               </a:tblPr>
               <a:tblGrid>
                 <a:gridCol w="2011680"/>
-                <a:gridCol w="2286000"/>
-                <a:gridCol w="3657600"/>
+                <a:gridCol w="2103120"/>
+                <a:gridCol w="3840480"/>
                 <a:gridCol w="2743200"/>
               </a:tblGrid>
-              <a:tr h="877824">
+              <a:tr h="762000">
                 <a:tc>
                   <a:txBody>
                     <a:bodyPr/>
                     <a:lstStyle/>
                     <a:p>
                       <a:pPr>
-                        <a:defRPr b="1" sz="1400">
+                        <a:defRPr b="1" sz="1300">
                           <a:solidFill>
                             <a:srgbClr val="38BDF8"/>
                           </a:solidFill>
@@ -4102,7 +7252,7 @@
                   </a:txBody>
                   <a:tcPr>
                     <a:solidFill>
-                      <a:srgbClr val="1F293D"/>
+                      <a:srgbClr val="1A2640"/>
                     </a:solidFill>
                   </a:tcPr>
                 </a:tc>
@@ -4112,20 +7262,20 @@
                     <a:lstStyle/>
                     <a:p>
                       <a:pPr>
-                        <a:defRPr b="1" sz="1400">
+                        <a:defRPr b="1" sz="1300">
                           <a:solidFill>
                             <a:srgbClr val="38BDF8"/>
                           </a:solidFill>
                         </a:defRPr>
                       </a:pPr>
                       <a:r>
-                        <a:t>Primary Purpose</a:t>
+                        <a:t>Primary Scope</a:t>
                       </a:r>
                     </a:p>
                   </a:txBody>
                   <a:tcPr>
                     <a:solidFill>
-                      <a:srgbClr val="1F293D"/>
+                      <a:srgbClr val="1A2640"/>
                     </a:solidFill>
                   </a:tcPr>
                 </a:tc>
@@ -4135,7 +7285,7 @@
                     <a:lstStyle/>
                     <a:p>
                       <a:pPr>
-                        <a:defRPr b="1" sz="1400">
+                        <a:defRPr b="1" sz="1300">
                           <a:solidFill>
                             <a:srgbClr val="38BDF8"/>
                           </a:solidFill>
@@ -4148,7 +7298,7 @@
                   </a:txBody>
                   <a:tcPr>
                     <a:solidFill>
-                      <a:srgbClr val="1F293D"/>
+                      <a:srgbClr val="1A2640"/>
                     </a:solidFill>
                   </a:tcPr>
                 </a:tc>
@@ -4158,32 +7308,32 @@
                     <a:lstStyle/>
                     <a:p>
                       <a:pPr>
-                        <a:defRPr b="1" sz="1400">
+                        <a:defRPr b="1" sz="1300">
                           <a:solidFill>
                             <a:srgbClr val="38BDF8"/>
                           </a:solidFill>
                         </a:defRPr>
                       </a:pPr>
                       <a:r>
-                        <a:t>Fundamental Blindspot</a:t>
+                        <a:t>Why It Fails on Problem 5</a:t>
                       </a:r>
                     </a:p>
                   </a:txBody>
                   <a:tcPr>
                     <a:solidFill>
-                      <a:srgbClr val="1F293D"/>
+                      <a:srgbClr val="1A2640"/>
                     </a:solidFill>
                   </a:tcPr>
                 </a:tc>
               </a:tr>
-              <a:tr h="877824">
+              <a:tr h="762000">
                 <a:tc>
                   <a:txBody>
                     <a:bodyPr/>
                     <a:lstStyle/>
                     <a:p>
                       <a:pPr>
-                        <a:defRPr sz="1200" b="1">
+                        <a:defRPr sz="1150" b="1">
                           <a:solidFill>
                             <a:srgbClr val="F8FAFC"/>
                           </a:solidFill>
@@ -4196,7 +7346,7 @@
                   </a:txBody>
                   <a:tcPr>
                     <a:solidFill>
-                      <a:srgbClr val="121826"/>
+                      <a:srgbClr val="121A2C"/>
                     </a:solidFill>
                   </a:tcPr>
                 </a:tc>
@@ -4206,20 +7356,20 @@
                     <a:lstStyle/>
                     <a:p>
                       <a:pPr>
-                        <a:defRPr sz="1200">
+                        <a:defRPr sz="1150">
                           <a:solidFill>
                             <a:srgbClr val="F8FAFC"/>
                           </a:solidFill>
                         </a:defRPr>
                       </a:pPr>
                       <a:r>
-                        <a:t>Docstring test runner</a:t>
+                        <a:t>Docstring snippets</a:t>
                       </a:r>
                     </a:p>
                   </a:txBody>
                   <a:tcPr>
                     <a:solidFill>
-                      <a:srgbClr val="121826"/>
+                      <a:srgbClr val="121A2C"/>
                     </a:solidFill>
                   </a:tcPr>
                 </a:tc>
@@ -4229,20 +7379,20 @@
                     <a:lstStyle/>
                     <a:p>
                       <a:pPr>
-                        <a:defRPr sz="1200">
+                        <a:defRPr sz="1150">
                           <a:solidFill>
                             <a:srgbClr val="F8FAFC"/>
                           </a:solidFill>
                         </a:defRPr>
                       </a:pPr>
                       <a:r>
-                        <a:t>Executes isolated Python code snippets inside docstrings.</a:t>
+                        <a:t>Executes interactive Python code blocks inside docstrings.</a:t>
                       </a:r>
                     </a:p>
                   </a:txBody>
                   <a:tcPr>
                     <a:solidFill>
-                      <a:srgbClr val="121826"/>
+                      <a:srgbClr val="121A2C"/>
                     </a:solidFill>
                   </a:tcPr>
                 </a:tc>
@@ -4252,32 +7402,32 @@
                     <a:lstStyle/>
                     <a:p>
                       <a:pPr>
-                        <a:defRPr sz="1200">
+                        <a:defRPr sz="1150">
                           <a:solidFill>
                             <a:srgbClr val="F8FAFC"/>
                           </a:solidFill>
                         </a:defRPr>
                       </a:pPr>
                       <a:r>
-                        <a:t>Cannot evaluate markdown prose, tables, flags, or tutorials.</a:t>
+                        <a:t>Cannot test Markdown prose, config tables, CLI flags, or external tutorials.</a:t>
                       </a:r>
                     </a:p>
                   </a:txBody>
                   <a:tcPr>
                     <a:solidFill>
-                      <a:srgbClr val="121826"/>
+                      <a:srgbClr val="121A2C"/>
                     </a:solidFill>
                   </a:tcPr>
                 </a:tc>
               </a:tr>
-              <a:tr h="877824">
+              <a:tr h="762000">
                 <a:tc>
                   <a:txBody>
                     <a:bodyPr/>
                     <a:lstStyle/>
                     <a:p>
                       <a:pPr>
-                        <a:defRPr sz="1200" b="1">
+                        <a:defRPr sz="1150" b="1">
                           <a:solidFill>
                             <a:srgbClr val="F8FAFC"/>
                           </a:solidFill>
@@ -4290,7 +7440,7 @@
                   </a:txBody>
                   <a:tcPr>
                     <a:solidFill>
-                      <a:srgbClr val="121826"/>
+                      <a:srgbClr val="0E1422"/>
                     </a:solidFill>
                   </a:tcPr>
                 </a:tc>
@@ -4300,20 +7450,20 @@
                     <a:lstStyle/>
                     <a:p>
                       <a:pPr>
-                        <a:defRPr sz="1200">
+                        <a:defRPr sz="1150">
                           <a:solidFill>
                             <a:srgbClr val="F8FAFC"/>
                           </a:solidFill>
                         </a:defRPr>
                       </a:pPr>
                       <a:r>
-                        <a:t>Rust example testing</a:t>
+                        <a:t>Rust code fences</a:t>
                       </a:r>
                     </a:p>
                   </a:txBody>
                   <a:tcPr>
                     <a:solidFill>
-                      <a:srgbClr val="121826"/>
+                      <a:srgbClr val="0E1422"/>
                     </a:solidFill>
                   </a:tcPr>
                 </a:tc>
@@ -4323,20 +7473,20 @@
                     <a:lstStyle/>
                     <a:p>
                       <a:pPr>
-                        <a:defRPr sz="1200">
+                        <a:defRPr sz="1150">
                           <a:solidFill>
                             <a:srgbClr val="F8FAFC"/>
                           </a:solidFill>
                         </a:defRPr>
                       </a:pPr>
                       <a:r>
-                        <a:t>Compiles and executes ```rust code blocks in documentation.</a:t>
+                        <a:t>Compiles and executes ```rust code blocks embedded in doc comments.</a:t>
                       </a:r>
                     </a:p>
                   </a:txBody>
                   <a:tcPr>
                     <a:solidFill>
-                      <a:srgbClr val="121826"/>
+                      <a:srgbClr val="0E1422"/>
                     </a:solidFill>
                   </a:tcPr>
                 </a:tc>
@@ -4346,45 +7496,45 @@
                     <a:lstStyle/>
                     <a:p>
                       <a:pPr>
-                        <a:defRPr sz="1200">
+                        <a:defRPr sz="1150">
                           <a:solidFill>
                             <a:srgbClr val="F8FAFC"/>
                           </a:solidFill>
                         </a:defRPr>
                       </a:pPr>
                       <a:r>
-                        <a:t>Strictly limited to executable Rust code. Blind to prose statements.</a:t>
+                        <a:t>Strictly limited to executable Rust code. Completely blind to explanatory English prose.</a:t>
                       </a:r>
                     </a:p>
                   </a:txBody>
                   <a:tcPr>
                     <a:solidFill>
-                      <a:srgbClr val="121826"/>
+                      <a:srgbClr val="0E1422"/>
                     </a:solidFill>
                   </a:tcPr>
                 </a:tc>
               </a:tr>
-              <a:tr h="877824">
+              <a:tr h="762000">
                 <a:tc>
                   <a:txBody>
                     <a:bodyPr/>
                     <a:lstStyle/>
                     <a:p>
                       <a:pPr>
-                        <a:defRPr sz="1200" b="1">
+                        <a:defRPr sz="1150" b="1">
                           <a:solidFill>
                             <a:srgbClr val="F8FAFC"/>
                           </a:solidFill>
                         </a:defRPr>
                       </a:pPr>
                       <a:r>
-                        <a:t>mktestdocs / Doc Detective</a:t>
+                        <a:t>mktestdocs</a:t>
                       </a:r>
                     </a:p>
                   </a:txBody>
                   <a:tcPr>
                     <a:solidFill>
-                      <a:srgbClr val="121826"/>
+                      <a:srgbClr val="121A2C"/>
                     </a:solidFill>
                   </a:tcPr>
                 </a:tc>
@@ -4394,20 +7544,20 @@
                     <a:lstStyle/>
                     <a:p>
                       <a:pPr>
-                        <a:defRPr sz="1200">
+                        <a:defRPr sz="1150">
                           <a:solidFill>
                             <a:srgbClr val="F8FAFC"/>
                           </a:solidFill>
                         </a:defRPr>
                       </a:pPr>
                       <a:r>
-                        <a:t>Markdown snippet runners</a:t>
+                        <a:t>Markdown runner</a:t>
                       </a:r>
                     </a:p>
                   </a:txBody>
                   <a:tcPr>
                     <a:solidFill>
-                      <a:srgbClr val="121826"/>
+                      <a:srgbClr val="121A2C"/>
                     </a:solidFill>
                   </a:tcPr>
                 </a:tc>
@@ -4417,20 +7567,20 @@
                     <a:lstStyle/>
                     <a:p>
                       <a:pPr>
-                        <a:defRPr sz="1200">
+                        <a:defRPr sz="1150">
                           <a:solidFill>
                             <a:srgbClr val="F8FAFC"/>
                           </a:solidFill>
                         </a:defRPr>
                       </a:pPr>
                       <a:r>
-                        <a:t>Validates executable command fences and UI flows against live apps.</a:t>
+                        <a:t>Executes code fences inside Markdown via pytest runner.</a:t>
                       </a:r>
                     </a:p>
                   </a:txBody>
                   <a:tcPr>
                     <a:solidFill>
-                      <a:srgbClr val="121826"/>
+                      <a:srgbClr val="121A2C"/>
                     </a:solidFill>
                   </a:tcPr>
                 </a:tc>
@@ -4440,45 +7590,45 @@
                     <a:lstStyle/>
                     <a:p>
                       <a:pPr>
-                        <a:defRPr sz="1200">
+                        <a:defRPr sz="1150">
                           <a:solidFill>
                             <a:srgbClr val="F8FAFC"/>
                           </a:solidFill>
                         </a:defRPr>
                       </a:pPr>
                       <a:r>
-                        <a:t>Requires live servers; completely incapable of reasoning about PR diff contradictions.</a:t>
+                        <a:t>Only tests executable code snippets; blind to outdated prose defaults or renamed parameters.</a:t>
                       </a:r>
                     </a:p>
                   </a:txBody>
                   <a:tcPr>
                     <a:solidFill>
-                      <a:srgbClr val="121826"/>
+                      <a:srgbClr val="121A2C"/>
                     </a:solidFill>
                   </a:tcPr>
                 </a:tc>
               </a:tr>
-              <a:tr h="877824">
+              <a:tr h="762000">
                 <a:tc>
                   <a:txBody>
                     <a:bodyPr/>
                     <a:lstStyle/>
                     <a:p>
                       <a:pPr>
-                        <a:defRPr sz="1200" b="1">
+                        <a:defRPr sz="1150" b="1">
                           <a:solidFill>
-                            <a:srgbClr val="10B981"/>
+                            <a:srgbClr val="F8FAFC"/>
                           </a:solidFill>
                         </a:defRPr>
                       </a:pPr>
                       <a:r>
-                        <a:t>DriftLens (Our Solution)</a:t>
+                        <a:t>Doc Detective</a:t>
                       </a:r>
                     </a:p>
                   </a:txBody>
                   <a:tcPr>
                     <a:solidFill>
-                      <a:srgbClr val="102A3C"/>
+                      <a:srgbClr val="0E1422"/>
                     </a:solidFill>
                   </a:tcPr>
                 </a:tc>
@@ -4488,20 +7638,20 @@
                     <a:lstStyle/>
                     <a:p>
                       <a:pPr>
-                        <a:defRPr sz="1200">
+                        <a:defRPr sz="1150">
                           <a:solidFill>
-                            <a:srgbClr val="10B981"/>
+                            <a:srgbClr val="F8FAFC"/>
                           </a:solidFill>
                         </a:defRPr>
                       </a:pPr>
                       <a:r>
-                        <a:t>Semantic Drift Detection</a:t>
+                        <a:t>End-to-end UI tests</a:t>
                       </a:r>
                     </a:p>
                   </a:txBody>
                   <a:tcPr>
                     <a:solidFill>
-                      <a:srgbClr val="102A3C"/>
+                      <a:srgbClr val="0E1422"/>
                     </a:solidFill>
                   </a:tcPr>
                 </a:tc>
@@ -4511,20 +7661,20 @@
                     <a:lstStyle/>
                     <a:p>
                       <a:pPr>
-                        <a:defRPr sz="1200">
+                        <a:defRPr sz="1150">
                           <a:solidFill>
-                            <a:srgbClr val="10B981"/>
+                            <a:srgbClr val="F8FAFC"/>
                           </a:solidFill>
                         </a:defRPr>
                       </a:pPr>
                       <a:r>
-                        <a:t>AST entity extraction + Markdown chunking + Qwen 2.5 7B reasoning.</a:t>
+                        <a:t>Executes recorded browser actions and REST queries against live apps.</a:t>
                       </a:r>
                     </a:p>
                   </a:txBody>
                   <a:tcPr>
                     <a:solidFill>
-                      <a:srgbClr val="102A3C"/>
+                      <a:srgbClr val="0E1422"/>
                     </a:solidFill>
                   </a:tcPr>
                 </a:tc>
@@ -4534,20 +7684,114 @@
                     <a:lstStyle/>
                     <a:p>
                       <a:pPr>
-                        <a:defRPr sz="1200">
+                        <a:defRPr sz="1150">
+                          <a:solidFill>
+                            <a:srgbClr val="F8FAFC"/>
+                          </a:solidFill>
+                        </a:defRPr>
+                      </a:pPr>
+                      <a:r>
+                        <a:t>Requires live deployed infrastructure; unable to reason about PR diff contradictions.</a:t>
+                      </a:r>
+                    </a:p>
+                  </a:txBody>
+                  <a:tcPr>
+                    <a:solidFill>
+                      <a:srgbClr val="0E1422"/>
+                    </a:solidFill>
+                  </a:tcPr>
+                </a:tc>
+              </a:tr>
+              <a:tr h="762000">
+                <a:tc>
+                  <a:txBody>
+                    <a:bodyPr/>
+                    <a:lstStyle/>
+                    <a:p>
+                      <a:pPr>
+                        <a:defRPr sz="1150" b="1">
                           <a:solidFill>
                             <a:srgbClr val="10B981"/>
                           </a:solidFill>
                         </a:defRPr>
                       </a:pPr>
                       <a:r>
-                        <a:t>Directly connects code diffs to prose sentences before merging.</a:t>
+                        <a:t>DriftLens (Ours) 🏆</a:t>
                       </a:r>
                     </a:p>
                   </a:txBody>
                   <a:tcPr>
                     <a:solidFill>
-                      <a:srgbClr val="102A3C"/>
+                      <a:srgbClr val="12302A"/>
+                    </a:solidFill>
+                  </a:tcPr>
+                </a:tc>
+                <a:tc>
+                  <a:txBody>
+                    <a:bodyPr/>
+                    <a:lstStyle/>
+                    <a:p>
+                      <a:pPr>
+                        <a:defRPr sz="1150">
+                          <a:solidFill>
+                            <a:srgbClr val="10B981"/>
+                          </a:solidFill>
+                        </a:defRPr>
+                      </a:pPr>
+                      <a:r>
+                        <a:t>Semantic Prose &amp; Table Drift</a:t>
+                      </a:r>
+                    </a:p>
+                  </a:txBody>
+                  <a:tcPr>
+                    <a:solidFill>
+                      <a:srgbClr val="12302A"/>
+                    </a:solidFill>
+                  </a:tcPr>
+                </a:tc>
+                <a:tc>
+                  <a:txBody>
+                    <a:bodyPr/>
+                    <a:lstStyle/>
+                    <a:p>
+                      <a:pPr>
+                        <a:defRPr sz="1150">
+                          <a:solidFill>
+                            <a:srgbClr val="10B981"/>
+                          </a:solidFill>
+                        </a:defRPr>
+                      </a:pPr>
+                      <a:r>
+                        <a:t>Deterministic AST entity extraction + Markdown chunking + Qwen 2.5 7B reasoning.</a:t>
+                      </a:r>
+                    </a:p>
+                  </a:txBody>
+                  <a:tcPr>
+                    <a:solidFill>
+                      <a:srgbClr val="12302A"/>
+                    </a:solidFill>
+                  </a:tcPr>
+                </a:tc>
+                <a:tc>
+                  <a:txBody>
+                    <a:bodyPr/>
+                    <a:lstStyle/>
+                    <a:p>
+                      <a:pPr>
+                        <a:defRPr sz="1150">
+                          <a:solidFill>
+                            <a:srgbClr val="10B981"/>
+                          </a:solidFill>
+                        </a:defRPr>
+                      </a:pPr>
+                      <a:r>
+                        <a:t>Directly links PR code diffs to prose sentences and flags factual drift before merge.</a:t>
+                      </a:r>
+                    </a:p>
+                  </a:txBody>
+                  <a:tcPr>
+                    <a:solidFill>
+                      <a:srgbClr val="12302A"/>
                     </a:solidFill>
                   </a:tcPr>
                 </a:tc>
@@ -4589,7 +7833,7 @@
             <a:avLst/>
           </a:prstGeom>
           <a:solidFill>
-            <a:srgbClr val="090D16"/>
+            <a:srgbClr val="0B0F19"/>
           </a:solidFill>
           <a:ln>
             <a:noFill/>
@@ -4619,97 +7863,23 @@
       </p:sp>
       <p:sp>
         <p:nvSpPr>
-          <p:cNvPr id="3" name="TextBox 2"/>
-          <p:cNvSpPr txBox="1"/>
-          <p:nvPr/>
-        </p:nvSpPr>
-        <p:spPr>
-          <a:xfrm>
-            <a:off x="731520" y="457200"/>
-            <a:ext cx="10058400" cy="320040"/>
-          </a:xfrm>
-          <a:prstGeom prst="rect">
-            <a:avLst/>
-          </a:prstGeom>
-          <a:noFill/>
-        </p:spPr>
-        <p:txBody>
-          <a:bodyPr wrap="square">
-            <a:spAutoFit/>
-          </a:bodyPr>
-          <a:lstStyle/>
-          <a:p>
-            <a:pPr>
-              <a:defRPr sz="1100" b="1">
-                <a:solidFill>
-                  <a:srgbClr val="38BDF8"/>
-                </a:solidFill>
-                <a:latin typeface="Arial"/>
-              </a:defRPr>
-            </a:pPr>
-            <a:r>
-              <a:t>DRIFTLENS | HACKTOBERFEST 2026</a:t>
-            </a:r>
-          </a:p>
-        </p:txBody>
-      </p:sp>
-      <p:sp>
-        <p:nvSpPr>
-          <p:cNvPr id="4" name="TextBox 3"/>
-          <p:cNvSpPr txBox="1"/>
-          <p:nvPr/>
-        </p:nvSpPr>
-        <p:spPr>
-          <a:xfrm>
-            <a:off x="731520" y="777240"/>
-            <a:ext cx="10515600" cy="731520"/>
-          </a:xfrm>
-          <a:prstGeom prst="rect">
-            <a:avLst/>
-          </a:prstGeom>
-          <a:noFill/>
-        </p:spPr>
-        <p:txBody>
-          <a:bodyPr wrap="square">
-            <a:spAutoFit/>
-          </a:bodyPr>
-          <a:lstStyle/>
-          <a:p>
-            <a:pPr>
-              <a:defRPr sz="2800" b="1">
-                <a:solidFill>
-                  <a:srgbClr val="F8FAFC"/>
-                </a:solidFill>
-                <a:latin typeface="Arial"/>
-              </a:defRPr>
-            </a:pPr>
-            <a:r>
-              <a:t>The DriftLens Architecture: 6-Stage Analysis Engine</a:t>
-            </a:r>
-          </a:p>
-        </p:txBody>
-      </p:sp>
-      <p:sp>
-        <p:nvSpPr>
-          <p:cNvPr id="5" name="Rounded Rectangle 4"/>
+          <p:cNvPr id="3" name="Rectangle 2"/>
           <p:cNvSpPr/>
           <p:nvPr/>
         </p:nvSpPr>
         <p:spPr>
           <a:xfrm>
-            <a:off x="731520" y="1645920"/>
-            <a:ext cx="3474720" cy="2103120"/>
-          </a:xfrm>
-          <a:prstGeom prst="roundRect">
+            <a:off x="0" y="0"/>
+            <a:ext cx="6095390" cy="54864"/>
+          </a:xfrm>
+          <a:prstGeom prst="rect">
             <a:avLst/>
           </a:prstGeom>
           <a:solidFill>
-            <a:srgbClr val="121826"/>
+            <a:srgbClr val="38BDF8"/>
           </a:solidFill>
-          <a:ln w="15240">
-            <a:solidFill>
-              <a:srgbClr val="1F293D"/>
-            </a:solidFill>
+          <a:ln>
+            <a:noFill/>
           </a:ln>
         </p:spPr>
         <p:style>
@@ -4727,60 +7897,32 @@
           </a:fontRef>
         </p:style>
         <p:txBody>
-          <a:bodyPr rtlCol="0" anchor="ctr" wrap="square"/>
-          <a:lstStyle/>
-          <a:p>
-            <a:pPr algn="ctr">
-              <a:defRPr sz="1500" b="1">
-                <a:solidFill>
-                  <a:srgbClr val="38BDF8"/>
-                </a:solidFill>
-                <a:latin typeface="Arial"/>
-              </a:defRPr>
-            </a:pPr>
-            <a:r>
-              <a:t>1. Git Diff Extraction</a:t>
-            </a:r>
-          </a:p>
-          <a:p>
-            <a:pPr>
-              <a:spcBef>
-                <a:spcPts val="800"/>
-              </a:spcBef>
-              <a:defRPr sz="1200">
-                <a:solidFill>
-                  <a:srgbClr val="F8FAFC"/>
-                </a:solidFill>
-                <a:latin typeface="Arial"/>
-              </a:defRPr>
-            </a:pPr>
-            <a:r>
-              <a:t>Extracts unified diffs (base...head) via git/GitHub API, classifying files into source, documentation, and configuration.</a:t>
-            </a:r>
-          </a:p>
-        </p:txBody>
-      </p:sp>
-      <p:sp>
-        <p:nvSpPr>
-          <p:cNvPr id="6" name="Rounded Rectangle 5"/>
+          <a:bodyPr rtlCol="0" anchor="ctr"/>
+          <a:lstStyle/>
+          <a:p>
+            <a:pPr algn="ctr"/>
+          </a:p>
+        </p:txBody>
+      </p:sp>
+      <p:sp>
+        <p:nvSpPr>
+          <p:cNvPr id="4" name="Rectangle 3"/>
           <p:cNvSpPr/>
           <p:nvPr/>
         </p:nvSpPr>
         <p:spPr>
           <a:xfrm>
-            <a:off x="4297680" y="1645920"/>
-            <a:ext cx="3474720" cy="2103120"/>
-          </a:xfrm>
-          <a:prstGeom prst="roundRect">
+            <a:off x="6095390" y="0"/>
+            <a:ext cx="6096304" cy="54864"/>
+          </a:xfrm>
+          <a:prstGeom prst="rect">
             <a:avLst/>
           </a:prstGeom>
           <a:solidFill>
-            <a:srgbClr val="121826"/>
+            <a:srgbClr val="A855F7"/>
           </a:solidFill>
-          <a:ln w="15240">
-            <a:solidFill>
-              <a:srgbClr val="1F293D"/>
-            </a:solidFill>
+          <a:ln>
+            <a:noFill/>
           </a:ln>
         </p:spPr>
         <p:style>
@@ -4798,11 +7940,37 @@
           </a:fontRef>
         </p:style>
         <p:txBody>
-          <a:bodyPr rtlCol="0" anchor="ctr" wrap="square"/>
-          <a:lstStyle/>
-          <a:p>
-            <a:pPr algn="ctr">
-              <a:defRPr sz="1500" b="1">
+          <a:bodyPr rtlCol="0" anchor="ctr"/>
+          <a:lstStyle/>
+          <a:p>
+            <a:pPr algn="ctr"/>
+          </a:p>
+        </p:txBody>
+      </p:sp>
+      <p:sp>
+        <p:nvSpPr>
+          <p:cNvPr id="5" name="TextBox 4"/>
+          <p:cNvSpPr txBox="1"/>
+          <p:nvPr/>
+        </p:nvSpPr>
+        <p:spPr>
+          <a:xfrm>
+            <a:off x="731520" y="384048"/>
+            <a:ext cx="10515600" cy="320040"/>
+          </a:xfrm>
+          <a:prstGeom prst="rect">
+            <a:avLst/>
+          </a:prstGeom>
+          <a:noFill/>
+        </p:spPr>
+        <p:txBody>
+          <a:bodyPr wrap="none">
+            <a:spAutoFit/>
+          </a:bodyPr>
+          <a:lstStyle/>
+          <a:p>
+            <a:pPr>
+              <a:defRPr sz="1050" b="1">
                 <a:solidFill>
                   <a:srgbClr val="38BDF8"/>
                 </a:solidFill>
@@ -4810,23 +7978,59 @@
               </a:defRPr>
             </a:pPr>
             <a:r>
-              <a:t>2. AST Entity Extraction</a:t>
+              <a:t>SYSTEM PHILOSOPHY</a:t>
+            </a:r>
+          </a:p>
+        </p:txBody>
+      </p:sp>
+      <p:sp>
+        <p:nvSpPr>
+          <p:cNvPr id="6" name="TextBox 5"/>
+          <p:cNvSpPr txBox="1"/>
+          <p:nvPr/>
+        </p:nvSpPr>
+        <p:spPr>
+          <a:xfrm>
+            <a:off x="731520" y="658368"/>
+            <a:ext cx="10698480" cy="685800"/>
+          </a:xfrm>
+          <a:prstGeom prst="rect">
+            <a:avLst/>
+          </a:prstGeom>
+          <a:noFill/>
+        </p:spPr>
+        <p:txBody>
+          <a:bodyPr wrap="square">
+            <a:spAutoFit/>
+          </a:bodyPr>
+          <a:lstStyle/>
+          <a:p>
+            <a:pPr>
+              <a:defRPr sz="2600" b="1">
+                <a:solidFill>
+                  <a:srgbClr val="F8FAFC"/>
+                </a:solidFill>
+                <a:latin typeface="Arial"/>
+              </a:defRPr>
+            </a:pPr>
+            <a:r>
+              <a:t>The DriftLens Solution: Hybrid Intelligence Architecture</a:t>
             </a:r>
           </a:p>
           <a:p>
             <a:pPr>
               <a:spcBef>
-                <a:spcPts val="800"/>
+                <a:spcPts val="300"/>
               </a:spcBef>
-              <a:defRPr sz="1200">
-                <a:solidFill>
-                  <a:srgbClr val="F8FAFC"/>
+              <a:defRPr sz="1300">
+                <a:solidFill>
+                  <a:srgbClr val="94A3B8"/>
                 </a:solidFill>
                 <a:latin typeface="Arial"/>
               </a:defRPr>
             </a:pPr>
             <a:r>
-              <a:t>Identifies modified constants, CLI flags (--timeout -&gt; --deadline), function signatures, and deleted routes.</a:t>
+              <a:t>Never send the entire repository to an LLM. Combine deterministic AST parsing with bounded semantic AI.</a:t>
             </a:r>
           </a:p>
         </p:txBody>
@@ -4839,18 +8043,18 @@
         </p:nvSpPr>
         <p:spPr>
           <a:xfrm>
-            <a:off x="7863840" y="1645920"/>
-            <a:ext cx="3474720" cy="2103120"/>
+            <a:off x="731520" y="1554480"/>
+            <a:ext cx="3474720" cy="2194560"/>
           </a:xfrm>
           <a:prstGeom prst="roundRect">
             <a:avLst/>
           </a:prstGeom>
           <a:solidFill>
-            <a:srgbClr val="121826"/>
+            <a:srgbClr val="0F1D38"/>
           </a:solidFill>
           <a:ln w="15240">
             <a:solidFill>
-              <a:srgbClr val="1F293D"/>
+              <a:srgbClr val="38BDF8"/>
             </a:solidFill>
           </a:ln>
         </p:spPr>
@@ -4877,11 +8081,10 @@
                 <a:solidFill>
                   <a:srgbClr val="38BDF8"/>
                 </a:solidFill>
-                <a:latin typeface="Arial"/>
-              </a:defRPr>
-            </a:pPr>
-            <a:r>
-              <a:t>3. Markdown Chunking</a:t>
+              </a:defRPr>
+            </a:pPr>
+            <a:r>
+              <a:t>1. Deterministic Grounding</a:t>
             </a:r>
           </a:p>
           <a:p>
@@ -4893,11 +8096,10 @@
                 <a:solidFill>
                   <a:srgbClr val="F8FAFC"/>
                 </a:solidFill>
-                <a:latin typeface="Arial"/>
-              </a:defRPr>
-            </a:pPr>
-            <a:r>
-              <a:t>Deconstructs Markdown files into sentence-level units with exact line ranges, sections, and table rows.</a:t>
+              </a:defRPr>
+            </a:pPr>
+            <a:r>
+              <a:t>AST/diff parser locates changed code hunks and tags every entity with exact file paths and line ranges. The AI never guesses line numbers.</a:t>
             </a:r>
           </a:p>
         </p:txBody>
@@ -4910,18 +8112,18 @@
         </p:nvSpPr>
         <p:spPr>
           <a:xfrm>
-            <a:off x="731520" y="3931920"/>
-            <a:ext cx="3474720" cy="2103120"/>
+            <a:off x="4297680" y="1554480"/>
+            <a:ext cx="3474720" cy="2194560"/>
           </a:xfrm>
           <a:prstGeom prst="roundRect">
             <a:avLst/>
           </a:prstGeom>
           <a:solidFill>
-            <a:srgbClr val="121826"/>
+            <a:srgbClr val="1A1433"/>
           </a:solidFill>
           <a:ln w="15240">
             <a:solidFill>
-              <a:srgbClr val="1F293D"/>
+              <a:srgbClr val="818CF8"/>
             </a:solidFill>
           </a:ln>
         </p:spPr>
@@ -4946,13 +8148,12 @@
             <a:pPr algn="ctr">
               <a:defRPr sz="1500" b="1">
                 <a:solidFill>
-                  <a:srgbClr val="10B981"/>
-                </a:solidFill>
-                <a:latin typeface="Arial"/>
-              </a:defRPr>
-            </a:pPr>
-            <a:r>
-              <a:t>4. Candidate Matching</a:t>
+                  <a:srgbClr val="818CF8"/>
+                </a:solidFill>
+              </a:defRPr>
+            </a:pPr>
+            <a:r>
+              <a:t>2. Sentence-Level Granularity</a:t>
             </a:r>
           </a:p>
           <a:p>
@@ -4964,11 +8165,10 @@
                 <a:solidFill>
                   <a:srgbClr val="F8FAFC"/>
                 </a:solidFill>
-                <a:latin typeface="Arial"/>
-              </a:defRPr>
-            </a:pPr>
-            <a:r>
-              <a:t>Multi-signal scoring: exact identifier (+45%), old value (+30%), section context (+15%), file correlation (+15%).</a:t>
+              </a:defRPr>
+            </a:pPr>
+            <a:r>
+              <a:t>Documentation is chunked into individual sentence units and table rows with exact line ranges and section hierarchies (## Configuration).</a:t>
             </a:r>
           </a:p>
         </p:txBody>
@@ -4981,18 +8181,18 @@
         </p:nvSpPr>
         <p:spPr>
           <a:xfrm>
-            <a:off x="4297680" y="3931920"/>
-            <a:ext cx="3474720" cy="2103120"/>
+            <a:off x="7863840" y="1554480"/>
+            <a:ext cx="3474720" cy="2194560"/>
           </a:xfrm>
           <a:prstGeom prst="roundRect">
             <a:avLst/>
           </a:prstGeom>
           <a:solidFill>
-            <a:srgbClr val="121826"/>
+            <a:srgbClr val="0D2620"/>
           </a:solidFill>
           <a:ln w="15240">
             <a:solidFill>
-              <a:srgbClr val="1F293D"/>
+              <a:srgbClr val="10B981"/>
             </a:solidFill>
           </a:ln>
         </p:spPr>
@@ -5019,11 +8219,10 @@
                 <a:solidFill>
                   <a:srgbClr val="10B981"/>
                 </a:solidFill>
-                <a:latin typeface="Arial"/>
-              </a:defRPr>
-            </a:pPr>
-            <a:r>
-              <a:t>5. Same-PR Suppression</a:t>
+              </a:defRPr>
+            </a:pPr>
+            <a:r>
+              <a:t>3. Multi-Signal Filtering</a:t>
             </a:r>
           </a:p>
           <a:p>
@@ -5035,11 +8234,10 @@
                 <a:solidFill>
                   <a:srgbClr val="F8FAFC"/>
                 </a:solidFill>
-                <a:latin typeface="Arial"/>
-              </a:defRPr>
-            </a:pPr>
-            <a:r>
-              <a:t>Checks if documentation was updated in the same PR. If already corrected, suppresses drift (0 false alarms).</a:t>
+              </a:defRPr>
+            </a:pPr>
+            <a:r>
+              <a:t>Candidate matcher pairs changed entities with sentences using 4 distinct signals (exact names, old values, section keywords, file stems).</a:t>
             </a:r>
           </a:p>
         </p:txBody>
@@ -5052,18 +8250,18 @@
         </p:nvSpPr>
         <p:spPr>
           <a:xfrm>
-            <a:off x="7863840" y="3931920"/>
-            <a:ext cx="3474720" cy="2103120"/>
+            <a:off x="731520" y="3931920"/>
+            <a:ext cx="3474720" cy="2194560"/>
           </a:xfrm>
           <a:prstGeom prst="roundRect">
             <a:avLst/>
           </a:prstGeom>
           <a:solidFill>
-            <a:srgbClr val="121826"/>
+            <a:srgbClr val="1A1433"/>
           </a:solidFill>
           <a:ln w="15240">
             <a:solidFill>
-              <a:srgbClr val="1F293D"/>
+              <a:srgbClr val="A855F7"/>
             </a:solidFill>
           </a:ln>
         </p:spPr>
@@ -5088,13 +8286,12 @@
             <a:pPr algn="ctr">
               <a:defRPr sz="1500" b="1">
                 <a:solidFill>
-                  <a:srgbClr val="38BDF8"/>
-                </a:solidFill>
-                <a:latin typeface="Arial"/>
-              </a:defRPr>
-            </a:pPr>
-            <a:r>
-              <a:t>6. Qwen 2.5 7B Verification</a:t>
+                  <a:srgbClr val="A855F7"/>
+                </a:solidFill>
+              </a:defRPr>
+            </a:pPr>
+            <a:r>
+              <a:t>4. Bounded AI Reasoning</a:t>
             </a:r>
           </a:p>
           <a:p>
@@ -5106,11 +8303,148 @@
                 <a:solidFill>
                   <a:srgbClr val="F8FAFC"/>
                 </a:solidFill>
-                <a:latin typeface="Arial"/>
-              </a:defRPr>
-            </a:pPr>
-            <a:r>
-              <a:t>Open-weight model evaluates semantic contradiction with composite confidence calibration and 1-click suggested fix.</a:t>
+              </a:defRPr>
+            </a:pPr>
+            <a:r>
+              <a:t>Qwen 2.5 7B evaluates only the tightly bounded pair: 'Does this code change contradict this sentence?' Strict JSON schema enforcement.</a:t>
+            </a:r>
+          </a:p>
+        </p:txBody>
+      </p:sp>
+      <p:sp>
+        <p:nvSpPr>
+          <p:cNvPr id="11" name="Rounded Rectangle 10"/>
+          <p:cNvSpPr/>
+          <p:nvPr/>
+        </p:nvSpPr>
+        <p:spPr>
+          <a:xfrm>
+            <a:off x="4297680" y="3931920"/>
+            <a:ext cx="3474720" cy="2194560"/>
+          </a:xfrm>
+          <a:prstGeom prst="roundRect">
+            <a:avLst/>
+          </a:prstGeom>
+          <a:solidFill>
+            <a:srgbClr val="261E0F"/>
+          </a:solidFill>
+          <a:ln w="15240">
+            <a:solidFill>
+              <a:srgbClr val="F59E0B"/>
+            </a:solidFill>
+          </a:ln>
+        </p:spPr>
+        <p:style>
+          <a:lnRef idx="1">
+            <a:schemeClr val="accent1"/>
+          </a:lnRef>
+          <a:fillRef idx="3">
+            <a:schemeClr val="accent1"/>
+          </a:fillRef>
+          <a:effectRef idx="2">
+            <a:schemeClr val="accent1"/>
+          </a:effectRef>
+          <a:fontRef idx="minor">
+            <a:schemeClr val="lt1"/>
+          </a:fontRef>
+        </p:style>
+        <p:txBody>
+          <a:bodyPr rtlCol="0" anchor="ctr" wrap="square"/>
+          <a:lstStyle/>
+          <a:p>
+            <a:pPr algn="ctr">
+              <a:defRPr sz="1500" b="1">
+                <a:solidFill>
+                  <a:srgbClr val="F59E0B"/>
+                </a:solidFill>
+              </a:defRPr>
+            </a:pPr>
+            <a:r>
+              <a:t>5. Same-PR Shield</a:t>
+            </a:r>
+          </a:p>
+          <a:p>
+            <a:pPr>
+              <a:spcBef>
+                <a:spcPts val="800"/>
+              </a:spcBef>
+              <a:defRPr sz="1200">
+                <a:solidFill>
+                  <a:srgbClr val="F8FAFC"/>
+                </a:solidFill>
+              </a:defRPr>
+            </a:pPr>
+            <a:r>
+              <a:t>Detects if the developer already updated the documentation in the same PR. If so, drift is suppressed, achieving zero false alarms.</a:t>
+            </a:r>
+          </a:p>
+        </p:txBody>
+      </p:sp>
+      <p:sp>
+        <p:nvSpPr>
+          <p:cNvPr id="12" name="Rounded Rectangle 11"/>
+          <p:cNvSpPr/>
+          <p:nvPr/>
+        </p:nvSpPr>
+        <p:spPr>
+          <a:xfrm>
+            <a:off x="7863840" y="3931920"/>
+            <a:ext cx="3474720" cy="2194560"/>
+          </a:xfrm>
+          <a:prstGeom prst="roundRect">
+            <a:avLst/>
+          </a:prstGeom>
+          <a:solidFill>
+            <a:srgbClr val="28121C"/>
+          </a:solidFill>
+          <a:ln w="15240">
+            <a:solidFill>
+              <a:srgbClr val="F43F5E"/>
+            </a:solidFill>
+          </a:ln>
+        </p:spPr>
+        <p:style>
+          <a:lnRef idx="1">
+            <a:schemeClr val="accent1"/>
+          </a:lnRef>
+          <a:fillRef idx="3">
+            <a:schemeClr val="accent1"/>
+          </a:fillRef>
+          <a:effectRef idx="2">
+            <a:schemeClr val="accent1"/>
+          </a:effectRef>
+          <a:fontRef idx="minor">
+            <a:schemeClr val="lt1"/>
+          </a:fontRef>
+        </p:style>
+        <p:txBody>
+          <a:bodyPr rtlCol="0" anchor="ctr" wrap="square"/>
+          <a:lstStyle/>
+          <a:p>
+            <a:pPr algn="ctr">
+              <a:defRPr sz="1500" b="1">
+                <a:solidFill>
+                  <a:srgbClr val="F43F5E"/>
+                </a:solidFill>
+              </a:defRPr>
+            </a:pPr>
+            <a:r>
+              <a:t>6. 1-Click Auto-Remediation</a:t>
+            </a:r>
+          </a:p>
+          <a:p>
+            <a:pPr>
+              <a:spcBef>
+                <a:spcPts val="800"/>
+              </a:spcBef>
+              <a:defRPr sz="1200">
+                <a:solidFill>
+                  <a:srgbClr val="F8FAFC"/>
+                </a:solidFill>
+              </a:defRPr>
+            </a:pPr>
+            <a:r>
+              <a:t>Generates exact replacement suggestions, ready for 1-click in-browser patching or downloadable unified git .patch files.</a:t>
             </a:r>
           </a:p>
         </p:txBody>
@@ -5148,7 +8482,7 @@
             <a:avLst/>
           </a:prstGeom>
           <a:solidFill>
-            <a:srgbClr val="090D16"/>
+            <a:srgbClr val="0B0F19"/>
           </a:solidFill>
           <a:ln>
             <a:noFill/>
@@ -5178,97 +8512,23 @@
       </p:sp>
       <p:sp>
         <p:nvSpPr>
-          <p:cNvPr id="3" name="TextBox 2"/>
-          <p:cNvSpPr txBox="1"/>
-          <p:nvPr/>
-        </p:nvSpPr>
-        <p:spPr>
-          <a:xfrm>
-            <a:off x="731520" y="457200"/>
-            <a:ext cx="10058400" cy="320040"/>
-          </a:xfrm>
-          <a:prstGeom prst="rect">
-            <a:avLst/>
-          </a:prstGeom>
-          <a:noFill/>
-        </p:spPr>
-        <p:txBody>
-          <a:bodyPr wrap="square">
-            <a:spAutoFit/>
-          </a:bodyPr>
-          <a:lstStyle/>
-          <a:p>
-            <a:pPr>
-              <a:defRPr sz="1100" b="1">
-                <a:solidFill>
-                  <a:srgbClr val="38BDF8"/>
-                </a:solidFill>
-                <a:latin typeface="Arial"/>
-              </a:defRPr>
-            </a:pPr>
-            <a:r>
-              <a:t>DRIFTLENS | HACKTOBERFEST 2026</a:t>
-            </a:r>
-          </a:p>
-        </p:txBody>
-      </p:sp>
-      <p:sp>
-        <p:nvSpPr>
-          <p:cNvPr id="4" name="TextBox 3"/>
-          <p:cNvSpPr txBox="1"/>
-          <p:nvPr/>
-        </p:nvSpPr>
-        <p:spPr>
-          <a:xfrm>
-            <a:off x="731520" y="777240"/>
-            <a:ext cx="10515600" cy="731520"/>
-          </a:xfrm>
-          <a:prstGeom prst="rect">
-            <a:avLst/>
-          </a:prstGeom>
-          <a:noFill/>
-        </p:spPr>
-        <p:txBody>
-          <a:bodyPr wrap="square">
-            <a:spAutoFit/>
-          </a:bodyPr>
-          <a:lstStyle/>
-          <a:p>
-            <a:pPr>
-              <a:defRPr sz="2800" b="1">
-                <a:solidFill>
-                  <a:srgbClr val="F8FAFC"/>
-                </a:solidFill>
-                <a:latin typeface="Arial"/>
-              </a:defRPr>
-            </a:pPr>
-            <a:r>
-              <a:t>Mathematical Confidence Calibration &amp; False-Positive Shield</a:t>
-            </a:r>
-          </a:p>
-        </p:txBody>
-      </p:sp>
-      <p:sp>
-        <p:nvSpPr>
-          <p:cNvPr id="5" name="Rounded Rectangle 4"/>
+          <p:cNvPr id="3" name="Rectangle 2"/>
           <p:cNvSpPr/>
           <p:nvPr/>
         </p:nvSpPr>
         <p:spPr>
           <a:xfrm>
-            <a:off x="731520" y="1645920"/>
-            <a:ext cx="5212080" cy="4389120"/>
-          </a:xfrm>
-          <a:prstGeom prst="roundRect">
+            <a:off x="0" y="0"/>
+            <a:ext cx="6095390" cy="54864"/>
+          </a:xfrm>
+          <a:prstGeom prst="rect">
             <a:avLst/>
           </a:prstGeom>
           <a:solidFill>
-            <a:srgbClr val="121826"/>
+            <a:srgbClr val="38BDF8"/>
           </a:solidFill>
-          <a:ln w="15240">
-            <a:solidFill>
-              <a:srgbClr val="1F293D"/>
-            </a:solidFill>
+          <a:ln>
+            <a:noFill/>
           </a:ln>
         </p:spPr>
         <p:style>
@@ -5286,117 +8546,32 @@
           </a:fontRef>
         </p:style>
         <p:txBody>
-          <a:bodyPr rtlCol="0" anchor="ctr" wrap="square"/>
-          <a:lstStyle/>
-          <a:p>
-            <a:pPr algn="ctr">
-              <a:defRPr sz="1800" b="1">
-                <a:solidFill>
-                  <a:srgbClr val="38BDF8"/>
-                </a:solidFill>
-              </a:defRPr>
-            </a:pPr>
-            <a:r>
-              <a:t>Calibrated Composite Confidence Formula</a:t>
-            </a:r>
-          </a:p>
-          <a:p>
-            <a:br/>
-            <a:pPr>
-              <a:defRPr sz="1600" b="1">
-                <a:solidFill>
-                  <a:srgbClr val="10B981"/>
-                </a:solidFill>
-              </a:defRPr>
-            </a:pPr>
-            <a:r>
-              <a:t>Confidence = 0.35 × S_det + 0.25 × S_cand + 0.40 × S_llm</a:t>
-            </a:r>
-            <a:br/>
-          </a:p>
-          <a:p>
-            <a:pPr>
-              <a:spcBef>
-                <a:spcPts val="600"/>
-              </a:spcBef>
-              <a:defRPr sz="1200">
-                <a:solidFill>
-                  <a:srgbClr val="F8FAFC"/>
-                </a:solidFill>
-              </a:defRPr>
-            </a:pPr>
-            <a:r>
-              <a:t>• Deterministic Score (35%): 1.0 for hard AST shifts (renamed flags, constant value changes); 0.80 for general changes.</a:t>
-            </a:r>
-          </a:p>
-          <a:p>
-            <a:pPr>
-              <a:spcBef>
-                <a:spcPts val="600"/>
-              </a:spcBef>
-              <a:defRPr sz="1200">
-                <a:solidFill>
-                  <a:srgbClr val="F8FAFC"/>
-                </a:solidFill>
-              </a:defRPr>
-            </a:pPr>
-            <a:r>
-              <a:t>• Candidate Overlap Score (25%): Exact identifier match, old value mention in text, section relevance, file proximity.</a:t>
-            </a:r>
-          </a:p>
-          <a:p>
-            <a:pPr>
-              <a:spcBef>
-                <a:spcPts val="600"/>
-              </a:spcBef>
-              <a:defRPr sz="1200">
-                <a:solidFill>
-                  <a:srgbClr val="F8FAFC"/>
-                </a:solidFill>
-              </a:defRPr>
-            </a:pPr>
-            <a:r>
-              <a:t>• LLM Semantic Score (40%): Open-weight Qwen 2.5 7B structured reasoning over tightly bounded evidence.</a:t>
-            </a:r>
-          </a:p>
-          <a:p>
-            <a:pPr>
-              <a:spcBef>
-                <a:spcPts val="600"/>
-              </a:spcBef>
-              <a:defRPr sz="1200">
-                <a:solidFill>
-                  <a:srgbClr val="F8FAFC"/>
-                </a:solidFill>
-              </a:defRPr>
-            </a:pPr>
-            <a:r>
-              <a:t>• Strict Noise Suppression (&lt; 0.60): Any score below 60% confidence is discarded to eliminate false alarm noise.</a:t>
-            </a:r>
-          </a:p>
-        </p:txBody>
-      </p:sp>
-      <p:sp>
-        <p:nvSpPr>
-          <p:cNvPr id="6" name="Rounded Rectangle 5"/>
+          <a:bodyPr rtlCol="0" anchor="ctr"/>
+          <a:lstStyle/>
+          <a:p>
+            <a:pPr algn="ctr"/>
+          </a:p>
+        </p:txBody>
+      </p:sp>
+      <p:sp>
+        <p:nvSpPr>
+          <p:cNvPr id="4" name="Rectangle 3"/>
           <p:cNvSpPr/>
           <p:nvPr/>
         </p:nvSpPr>
         <p:spPr>
           <a:xfrm>
-            <a:off x="6217920" y="1645920"/>
-            <a:ext cx="5212080" cy="4389120"/>
-          </a:xfrm>
-          <a:prstGeom prst="roundRect">
+            <a:off x="6095390" y="0"/>
+            <a:ext cx="6096304" cy="54864"/>
+          </a:xfrm>
+          <a:prstGeom prst="rect">
             <a:avLst/>
           </a:prstGeom>
           <a:solidFill>
-            <a:srgbClr val="121826"/>
+            <a:srgbClr val="A855F7"/>
           </a:solidFill>
-          <a:ln w="15240">
-            <a:solidFill>
-              <a:srgbClr val="1F293D"/>
-            </a:solidFill>
+          <a:ln>
+            <a:noFill/>
           </a:ln>
         </p:spPr>
         <p:style>
@@ -5414,130 +8589,511 @@
           </a:fontRef>
         </p:style>
         <p:txBody>
+          <a:bodyPr rtlCol="0" anchor="ctr"/>
+          <a:lstStyle/>
+          <a:p>
+            <a:pPr algn="ctr"/>
+          </a:p>
+        </p:txBody>
+      </p:sp>
+      <p:sp>
+        <p:nvSpPr>
+          <p:cNvPr id="5" name="TextBox 4"/>
+          <p:cNvSpPr txBox="1"/>
+          <p:nvPr/>
+        </p:nvSpPr>
+        <p:spPr>
+          <a:xfrm>
+            <a:off x="731520" y="384048"/>
+            <a:ext cx="10515600" cy="320040"/>
+          </a:xfrm>
+          <a:prstGeom prst="rect">
+            <a:avLst/>
+          </a:prstGeom>
+          <a:noFill/>
+        </p:spPr>
+        <p:txBody>
+          <a:bodyPr wrap="none">
+            <a:spAutoFit/>
+          </a:bodyPr>
+          <a:lstStyle/>
+          <a:p>
+            <a:pPr>
+              <a:defRPr sz="1050" b="1">
+                <a:solidFill>
+                  <a:srgbClr val="38BDF8"/>
+                </a:solidFill>
+                <a:latin typeface="Arial"/>
+              </a:defRPr>
+            </a:pPr>
+            <a:r>
+              <a:t>ARCHITECTURE PIPELINE</a:t>
+            </a:r>
+          </a:p>
+        </p:txBody>
+      </p:sp>
+      <p:sp>
+        <p:nvSpPr>
+          <p:cNvPr id="6" name="TextBox 5"/>
+          <p:cNvSpPr txBox="1"/>
+          <p:nvPr/>
+        </p:nvSpPr>
+        <p:spPr>
+          <a:xfrm>
+            <a:off x="731520" y="658368"/>
+            <a:ext cx="10698480" cy="685800"/>
+          </a:xfrm>
+          <a:prstGeom prst="rect">
+            <a:avLst/>
+          </a:prstGeom>
+          <a:noFill/>
+        </p:spPr>
+        <p:txBody>
+          <a:bodyPr wrap="square">
+            <a:spAutoFit/>
+          </a:bodyPr>
+          <a:lstStyle/>
+          <a:p>
+            <a:pPr>
+              <a:defRPr sz="2600" b="1">
+                <a:solidFill>
+                  <a:srgbClr val="F8FAFC"/>
+                </a:solidFill>
+                <a:latin typeface="Arial"/>
+              </a:defRPr>
+            </a:pPr>
+            <a:r>
+              <a:t>End-to-End 6-Stage Analysis Workflow</a:t>
+            </a:r>
+          </a:p>
+          <a:p>
+            <a:pPr>
+              <a:spcBef>
+                <a:spcPts val="300"/>
+              </a:spcBef>
+              <a:defRPr sz="1300">
+                <a:solidFill>
+                  <a:srgbClr val="94A3B8"/>
+                </a:solidFill>
+                <a:latin typeface="Arial"/>
+              </a:defRPr>
+            </a:pPr>
+            <a:r>
+              <a:t>How a Pull Request diff flows from raw Git commits into precise, verified documentation drift findings.</a:t>
+            </a:r>
+          </a:p>
+        </p:txBody>
+      </p:sp>
+      <p:sp>
+        <p:nvSpPr>
+          <p:cNvPr id="7" name="Rounded Rectangle 6"/>
+          <p:cNvSpPr/>
+          <p:nvPr/>
+        </p:nvSpPr>
+        <p:spPr>
+          <a:xfrm>
+            <a:off x="731520" y="1554480"/>
+            <a:ext cx="5212080" cy="1463040"/>
+          </a:xfrm>
+          <a:prstGeom prst="roundRect">
+            <a:avLst/>
+          </a:prstGeom>
+          <a:solidFill>
+            <a:srgbClr val="121A2C"/>
+          </a:solidFill>
+          <a:ln w="15240">
+            <a:solidFill>
+              <a:srgbClr val="38BDF8"/>
+            </a:solidFill>
+          </a:ln>
+        </p:spPr>
+        <p:style>
+          <a:lnRef idx="1">
+            <a:schemeClr val="accent1"/>
+          </a:lnRef>
+          <a:fillRef idx="3">
+            <a:schemeClr val="accent1"/>
+          </a:fillRef>
+          <a:effectRef idx="2">
+            <a:schemeClr val="accent1"/>
+          </a:effectRef>
+          <a:fontRef idx="minor">
+            <a:schemeClr val="lt1"/>
+          </a:fontRef>
+        </p:style>
+        <p:txBody>
           <a:bodyPr rtlCol="0" anchor="ctr" wrap="square"/>
           <a:lstStyle/>
           <a:p>
             <a:pPr algn="ctr">
-              <a:defRPr sz="1800" b="1">
+              <a:defRPr sz="1400" b="1">
+                <a:solidFill>
+                  <a:srgbClr val="38BDF8"/>
+                </a:solidFill>
+              </a:defRPr>
+            </a:pPr>
+            <a:r>
+              <a:t>Stage 1: Git Diff Extraction</a:t>
+            </a:r>
+          </a:p>
+          <a:p>
+            <a:pPr>
+              <a:spcBef>
+                <a:spcPts val="400"/>
+              </a:spcBef>
+              <a:defRPr sz="1150">
+                <a:solidFill>
+                  <a:srgbClr val="F8FAFC"/>
+                </a:solidFill>
+              </a:defRPr>
+            </a:pPr>
+            <a:r>
+              <a:t>Runs git diff -U3 base...head or calls GitHub REST API. Classifies files into source, docs, tests, configs. Shallow clone resilient.</a:t>
+            </a:r>
+          </a:p>
+        </p:txBody>
+      </p:sp>
+      <p:sp>
+        <p:nvSpPr>
+          <p:cNvPr id="8" name="Rounded Rectangle 7"/>
+          <p:cNvSpPr/>
+          <p:nvPr/>
+        </p:nvSpPr>
+        <p:spPr>
+          <a:xfrm>
+            <a:off x="6126480" y="1554480"/>
+            <a:ext cx="5212080" cy="1463040"/>
+          </a:xfrm>
+          <a:prstGeom prst="roundRect">
+            <a:avLst/>
+          </a:prstGeom>
+          <a:solidFill>
+            <a:srgbClr val="121A2C"/>
+          </a:solidFill>
+          <a:ln w="15240">
+            <a:solidFill>
+              <a:srgbClr val="38BDF8"/>
+            </a:solidFill>
+          </a:ln>
+        </p:spPr>
+        <p:style>
+          <a:lnRef idx="1">
+            <a:schemeClr val="accent1"/>
+          </a:lnRef>
+          <a:fillRef idx="3">
+            <a:schemeClr val="accent1"/>
+          </a:fillRef>
+          <a:effectRef idx="2">
+            <a:schemeClr val="accent1"/>
+          </a:effectRef>
+          <a:fontRef idx="minor">
+            <a:schemeClr val="lt1"/>
+          </a:fontRef>
+        </p:style>
+        <p:txBody>
+          <a:bodyPr rtlCol="0" anchor="ctr" wrap="square"/>
+          <a:lstStyle/>
+          <a:p>
+            <a:pPr algn="ctr">
+              <a:defRPr sz="1400" b="1">
+                <a:solidFill>
+                  <a:srgbClr val="38BDF8"/>
+                </a:solidFill>
+              </a:defRPr>
+            </a:pPr>
+            <a:r>
+              <a:t>Stage 2: Entity Extraction</a:t>
+            </a:r>
+          </a:p>
+          <a:p>
+            <a:pPr>
+              <a:spcBef>
+                <a:spcPts val="400"/>
+              </a:spcBef>
+              <a:defRPr sz="1150">
+                <a:solidFill>
+                  <a:srgbClr val="F8FAFC"/>
+                </a:solidFill>
+              </a:defRPr>
+            </a:pPr>
+            <a:r>
+              <a:t>Statically extracts changed CLI flags (--timeout -&gt; --deadline), constants, defaults, and API function signatures from diff hunks.</a:t>
+            </a:r>
+          </a:p>
+        </p:txBody>
+      </p:sp>
+      <p:sp>
+        <p:nvSpPr>
+          <p:cNvPr id="9" name="Rounded Rectangle 8"/>
+          <p:cNvSpPr/>
+          <p:nvPr/>
+        </p:nvSpPr>
+        <p:spPr>
+          <a:xfrm>
+            <a:off x="731520" y="3154680"/>
+            <a:ext cx="5212080" cy="1463040"/>
+          </a:xfrm>
+          <a:prstGeom prst="roundRect">
+            <a:avLst/>
+          </a:prstGeom>
+          <a:solidFill>
+            <a:srgbClr val="121A2C"/>
+          </a:solidFill>
+          <a:ln w="15240">
+            <a:solidFill>
+              <a:srgbClr val="818CF8"/>
+            </a:solidFill>
+          </a:ln>
+        </p:spPr>
+        <p:style>
+          <a:lnRef idx="1">
+            <a:schemeClr val="accent1"/>
+          </a:lnRef>
+          <a:fillRef idx="3">
+            <a:schemeClr val="accent1"/>
+          </a:fillRef>
+          <a:effectRef idx="2">
+            <a:schemeClr val="accent1"/>
+          </a:effectRef>
+          <a:fontRef idx="minor">
+            <a:schemeClr val="lt1"/>
+          </a:fontRef>
+        </p:style>
+        <p:txBody>
+          <a:bodyPr rtlCol="0" anchor="ctr" wrap="square"/>
+          <a:lstStyle/>
+          <a:p>
+            <a:pPr algn="ctr">
+              <a:defRPr sz="1400" b="1">
+                <a:solidFill>
+                  <a:srgbClr val="818CF8"/>
+                </a:solidFill>
+              </a:defRPr>
+            </a:pPr>
+            <a:r>
+              <a:t>Stage 3: Documentation Chunking</a:t>
+            </a:r>
+          </a:p>
+          <a:p>
+            <a:pPr>
+              <a:spcBef>
+                <a:spcPts val="400"/>
+              </a:spcBef>
+              <a:defRPr sz="1150">
+                <a:solidFill>
+                  <a:srgbClr val="F8FAFC"/>
+                </a:solidFill>
+              </a:defRPr>
+            </a:pPr>
+            <a:r>
+              <a:t>Indexes all Markdown files in repo. Chunks text into sentence-level units with line offsets, sections, and table rows.</a:t>
+            </a:r>
+          </a:p>
+        </p:txBody>
+      </p:sp>
+      <p:sp>
+        <p:nvSpPr>
+          <p:cNvPr id="10" name="Rounded Rectangle 9"/>
+          <p:cNvSpPr/>
+          <p:nvPr/>
+        </p:nvSpPr>
+        <p:spPr>
+          <a:xfrm>
+            <a:off x="6126480" y="3154680"/>
+            <a:ext cx="5212080" cy="1463040"/>
+          </a:xfrm>
+          <a:prstGeom prst="roundRect">
+            <a:avLst/>
+          </a:prstGeom>
+          <a:solidFill>
+            <a:srgbClr val="121A2C"/>
+          </a:solidFill>
+          <a:ln w="15240">
+            <a:solidFill>
+              <a:srgbClr val="10B981"/>
+            </a:solidFill>
+          </a:ln>
+        </p:spPr>
+        <p:style>
+          <a:lnRef idx="1">
+            <a:schemeClr val="accent1"/>
+          </a:lnRef>
+          <a:fillRef idx="3">
+            <a:schemeClr val="accent1"/>
+          </a:fillRef>
+          <a:effectRef idx="2">
+            <a:schemeClr val="accent1"/>
+          </a:effectRef>
+          <a:fontRef idx="minor">
+            <a:schemeClr val="lt1"/>
+          </a:fontRef>
+        </p:style>
+        <p:txBody>
+          <a:bodyPr rtlCol="0" anchor="ctr" wrap="square"/>
+          <a:lstStyle/>
+          <a:p>
+            <a:pPr algn="ctr">
+              <a:defRPr sz="1400" b="1">
+                <a:solidFill>
+                  <a:srgbClr val="10B981"/>
+                </a:solidFill>
+              </a:defRPr>
+            </a:pPr>
+            <a:r>
+              <a:t>Stage 4: Multi-Signal Matching</a:t>
+            </a:r>
+          </a:p>
+          <a:p>
+            <a:pPr>
+              <a:spcBef>
+                <a:spcPts val="400"/>
+              </a:spcBef>
+              <a:defRPr sz="1150">
+                <a:solidFill>
+                  <a:srgbClr val="F8FAFC"/>
+                </a:solidFill>
+              </a:defRPr>
+            </a:pPr>
+            <a:r>
+              <a:t>Scores candidate pairs: Exact Identifier (+45%), Old Value Mention (+30%), Section Relevance (+15%), File Correlation (+15%).</a:t>
+            </a:r>
+          </a:p>
+        </p:txBody>
+      </p:sp>
+      <p:sp>
+        <p:nvSpPr>
+          <p:cNvPr id="11" name="Rounded Rectangle 10"/>
+          <p:cNvSpPr/>
+          <p:nvPr/>
+        </p:nvSpPr>
+        <p:spPr>
+          <a:xfrm>
+            <a:off x="731520" y="4754880"/>
+            <a:ext cx="5212080" cy="1463040"/>
+          </a:xfrm>
+          <a:prstGeom prst="roundRect">
+            <a:avLst/>
+          </a:prstGeom>
+          <a:solidFill>
+            <a:srgbClr val="121A2C"/>
+          </a:solidFill>
+          <a:ln w="15240">
+            <a:solidFill>
+              <a:srgbClr val="F59E0B"/>
+            </a:solidFill>
+          </a:ln>
+        </p:spPr>
+        <p:style>
+          <a:lnRef idx="1">
+            <a:schemeClr val="accent1"/>
+          </a:lnRef>
+          <a:fillRef idx="3">
+            <a:schemeClr val="accent1"/>
+          </a:fillRef>
+          <a:effectRef idx="2">
+            <a:schemeClr val="accent1"/>
+          </a:effectRef>
+          <a:fontRef idx="minor">
+            <a:schemeClr val="lt1"/>
+          </a:fontRef>
+        </p:style>
+        <p:txBody>
+          <a:bodyPr rtlCol="0" anchor="ctr" wrap="square"/>
+          <a:lstStyle/>
+          <a:p>
+            <a:pPr algn="ctr">
+              <a:defRPr sz="1400" b="1">
                 <a:solidFill>
                   <a:srgbClr val="F59E0B"/>
                 </a:solidFill>
               </a:defRPr>
             </a:pPr>
             <a:r>
-              <a:t>Actionable Severity Tiers</a:t>
-            </a:r>
-          </a:p>
-          <a:p>
-            <a:br/>
-            <a:pPr>
+              <a:t>Stage 5: Same-PR Suppression</a:t>
+            </a:r>
+          </a:p>
+          <a:p>
+            <a:pPr>
+              <a:spcBef>
+                <a:spcPts val="400"/>
+              </a:spcBef>
+              <a:defRPr sz="1150">
+                <a:solidFill>
+                  <a:srgbClr val="F8FAFC"/>
+                </a:solidFill>
+              </a:defRPr>
+            </a:pPr>
+            <a:r>
+              <a:t>Edge-case shield: If documentation was updated within the same PR hunk, drift is suppressed to prevent false alarms.</a:t>
+            </a:r>
+          </a:p>
+        </p:txBody>
+      </p:sp>
+      <p:sp>
+        <p:nvSpPr>
+          <p:cNvPr id="12" name="Rounded Rectangle 11"/>
+          <p:cNvSpPr/>
+          <p:nvPr/>
+        </p:nvSpPr>
+        <p:spPr>
+          <a:xfrm>
+            <a:off x="6126480" y="4754880"/>
+            <a:ext cx="5212080" cy="1463040"/>
+          </a:xfrm>
+          <a:prstGeom prst="roundRect">
+            <a:avLst/>
+          </a:prstGeom>
+          <a:solidFill>
+            <a:srgbClr val="121A2C"/>
+          </a:solidFill>
+          <a:ln w="15240">
+            <a:solidFill>
+              <a:srgbClr val="A855F7"/>
+            </a:solidFill>
+          </a:ln>
+        </p:spPr>
+        <p:style>
+          <a:lnRef idx="1">
+            <a:schemeClr val="accent1"/>
+          </a:lnRef>
+          <a:fillRef idx="3">
+            <a:schemeClr val="accent1"/>
+          </a:fillRef>
+          <a:effectRef idx="2">
+            <a:schemeClr val="accent1"/>
+          </a:effectRef>
+          <a:fontRef idx="minor">
+            <a:schemeClr val="lt1"/>
+          </a:fontRef>
+        </p:style>
+        <p:txBody>
+          <a:bodyPr rtlCol="0" anchor="ctr" wrap="square"/>
+          <a:lstStyle/>
+          <a:p>
+            <a:pPr algn="ctr">
               <a:defRPr sz="1400" b="1">
                 <a:solidFill>
-                  <a:srgbClr val="F43F5E"/>
-                </a:solidFill>
-              </a:defRPr>
-            </a:pPr>
-            <a:r>
-              <a:t>HIGH SEVERITY (Red Alert)</a:t>
+                  <a:srgbClr val="A855F7"/>
+                </a:solidFill>
+              </a:defRPr>
+            </a:pPr>
+            <a:r>
+              <a:t>Stage 6: Qwen 2.5 7B Verification</a:t>
             </a:r>
           </a:p>
           <a:p>
             <a:pPr>
               <a:spcBef>
-                <a:spcPts val="200"/>
+                <a:spcPts val="400"/>
               </a:spcBef>
-              <a:defRPr sz="1200">
+              <a:defRPr sz="1150">
                 <a:solidFill>
                   <a:srgbClr val="F8FAFC"/>
                 </a:solidFill>
               </a:defRPr>
             </a:pPr>
             <a:r>
-              <a:t>Direct factual contradiction: renamed CLI flag, modified default value, altered function arguments. Blocks PR merge (Exit Code 1).</a:t>
-            </a:r>
-          </a:p>
-          <a:p>
-            <a:br/>
-            <a:pPr>
-              <a:defRPr sz="1400" b="1">
-                <a:solidFill>
-                  <a:srgbClr val="F59E0B"/>
-                </a:solidFill>
-              </a:defRPr>
-            </a:pPr>
-            <a:r>
-              <a:t>MEDIUM SEVERITY (Warning)</a:t>
-            </a:r>
-          </a:p>
-          <a:p>
-            <a:pPr>
-              <a:spcBef>
-                <a:spcPts val="200"/>
-              </a:spcBef>
-              <a:defRPr sz="1200">
-                <a:solidFill>
-                  <a:srgbClr val="F8FAFC"/>
-                </a:solidFill>
-              </a:defRPr>
-            </a:pPr>
-            <a:r>
-              <a:t>Indirect semantic shift or behavioral nuance change. Recommended review.</a:t>
-            </a:r>
-          </a:p>
-          <a:p>
-            <a:br/>
-            <a:pPr>
-              <a:defRPr sz="1400" b="1">
-                <a:solidFill>
-                  <a:srgbClr val="38BDF8"/>
-                </a:solidFill>
-              </a:defRPr>
-            </a:pPr>
-            <a:r>
-              <a:t>LOW SEVERITY (Info)</a:t>
-            </a:r>
-          </a:p>
-          <a:p>
-            <a:pPr>
-              <a:spcBef>
-                <a:spcPts val="200"/>
-              </a:spcBef>
-              <a:defRPr sz="1200">
-                <a:solidFill>
-                  <a:srgbClr val="F8FAFC"/>
-                </a:solidFill>
-              </a:defRPr>
-            </a:pPr>
-            <a:r>
-              <a:t>Minor wording or contextual reference update.</a:t>
-            </a:r>
-          </a:p>
-          <a:p>
-            <a:br/>
-            <a:pPr>
-              <a:defRPr sz="1400" b="1">
-                <a:solidFill>
-                  <a:srgbClr val="10B981"/>
-                </a:solidFill>
-              </a:defRPr>
-            </a:pPr>
-            <a:r>
-              <a:t>Same-PR Fix Suppression</a:t>
-            </a:r>
-          </a:p>
-          <a:p>
-            <a:pPr>
-              <a:spcBef>
-                <a:spcPts val="200"/>
-              </a:spcBef>
-              <a:defRPr sz="1200">
-                <a:solidFill>
-                  <a:srgbClr val="F8FAFC"/>
-                </a:solidFill>
-              </a:defRPr>
-            </a:pPr>
-            <a:r>
-              <a:t>If a developer modifies DEFAULT_TIMEOUT = 60 and updates the doc sentence to '60 seconds' in the same PR, DriftLens detects it and suppresses the finding.</a:t>
+              <a:t>Open-weight model evaluates semantic contradiction. Computes calibrated composite confidence and produces suggested fix.</a:t>
             </a:r>
           </a:p>
         </p:txBody>
@@ -5575,7 +9131,7 @@
             <a:avLst/>
           </a:prstGeom>
           <a:solidFill>
-            <a:srgbClr val="090D16"/>
+            <a:srgbClr val="0B0F19"/>
           </a:solidFill>
           <a:ln>
             <a:noFill/>
@@ -5605,97 +9161,23 @@
       </p:sp>
       <p:sp>
         <p:nvSpPr>
-          <p:cNvPr id="3" name="TextBox 2"/>
-          <p:cNvSpPr txBox="1"/>
-          <p:nvPr/>
-        </p:nvSpPr>
-        <p:spPr>
-          <a:xfrm>
-            <a:off x="731520" y="457200"/>
-            <a:ext cx="10058400" cy="320040"/>
-          </a:xfrm>
-          <a:prstGeom prst="rect">
-            <a:avLst/>
-          </a:prstGeom>
-          <a:noFill/>
-        </p:spPr>
-        <p:txBody>
-          <a:bodyPr wrap="square">
-            <a:spAutoFit/>
-          </a:bodyPr>
-          <a:lstStyle/>
-          <a:p>
-            <a:pPr>
-              <a:defRPr sz="1100" b="1">
-                <a:solidFill>
-                  <a:srgbClr val="38BDF8"/>
-                </a:solidFill>
-                <a:latin typeface="Arial"/>
-              </a:defRPr>
-            </a:pPr>
-            <a:r>
-              <a:t>DRIFTLENS | HACKTOBERFEST 2026</a:t>
-            </a:r>
-          </a:p>
-        </p:txBody>
-      </p:sp>
-      <p:sp>
-        <p:nvSpPr>
-          <p:cNvPr id="4" name="TextBox 3"/>
-          <p:cNvSpPr txBox="1"/>
-          <p:nvPr/>
-        </p:nvSpPr>
-        <p:spPr>
-          <a:xfrm>
-            <a:off x="731520" y="777240"/>
-            <a:ext cx="10515600" cy="731520"/>
-          </a:xfrm>
-          <a:prstGeom prst="rect">
-            <a:avLst/>
-          </a:prstGeom>
-          <a:noFill/>
-        </p:spPr>
-        <p:txBody>
-          <a:bodyPr wrap="square">
-            <a:spAutoFit/>
-          </a:bodyPr>
-          <a:lstStyle/>
-          <a:p>
-            <a:pPr>
-              <a:defRPr sz="2800" b="1">
-                <a:solidFill>
-                  <a:srgbClr val="F8FAFC"/>
-                </a:solidFill>
-                <a:latin typeface="Arial"/>
-              </a:defRPr>
-            </a:pPr>
-            <a:r>
-              <a:t>6 Golden Evaluation Demos (100% Problem Coverage)</a:t>
-            </a:r>
-          </a:p>
-        </p:txBody>
-      </p:sp>
-      <p:sp>
-        <p:nvSpPr>
-          <p:cNvPr id="5" name="Rounded Rectangle 4"/>
+          <p:cNvPr id="3" name="Rectangle 2"/>
           <p:cNvSpPr/>
           <p:nvPr/>
         </p:nvSpPr>
         <p:spPr>
           <a:xfrm>
-            <a:off x="731520" y="1645920"/>
-            <a:ext cx="3474720" cy="2103120"/>
-          </a:xfrm>
-          <a:prstGeom prst="roundRect">
+            <a:off x="0" y="0"/>
+            <a:ext cx="6095390" cy="54864"/>
+          </a:xfrm>
+          <a:prstGeom prst="rect">
             <a:avLst/>
           </a:prstGeom>
           <a:solidFill>
-            <a:srgbClr val="121826"/>
+            <a:srgbClr val="38BDF8"/>
           </a:solidFill>
-          <a:ln w="15240">
-            <a:solidFill>
-              <a:srgbClr val="1F293D"/>
-            </a:solidFill>
+          <a:ln>
+            <a:noFill/>
           </a:ln>
         </p:spPr>
         <p:style>
@@ -5713,72 +9195,32 @@
           </a:fontRef>
         </p:style>
         <p:txBody>
-          <a:bodyPr rtlCol="0" anchor="ctr" wrap="square"/>
-          <a:lstStyle/>
-          <a:p>
-            <a:pPr algn="ctr">
-              <a:defRPr sz="1400" b="1">
-                <a:solidFill>
-                  <a:srgbClr val="38BDF8"/>
-                </a:solidFill>
-                <a:latin typeface="Arial"/>
-              </a:defRPr>
-            </a:pPr>
-            <a:r>
-              <a:t>1. Renamed CLI Flag</a:t>
-            </a:r>
-          </a:p>
-          <a:p>
-            <a:pPr>
-              <a:spcBef>
-                <a:spcPts val="600"/>
-              </a:spcBef>
-              <a:defRPr sz="1050">
-                <a:solidFill>
-                  <a:srgbClr val="F8FAFC"/>
-                </a:solidFill>
-                <a:latin typeface="Consolas"/>
-              </a:defRPr>
-            </a:pPr>
-            <a:r>
-              <a:t>cli.py: --timeout -&gt; --deadline</a:t>
-            </a:r>
-            <a:br/>
-            <a:r>
-              <a:t>Doc: 'Use --timeout to stop jobs'</a:t>
-            </a:r>
-            <a:br/>
-            <a:r>
-              <a:t>Result: FAIL (High, 98% Conf)</a:t>
-            </a:r>
-            <a:br/>
-            <a:r>
-              <a:t>Fix: 'Use --deadline to stop jobs'</a:t>
-            </a:r>
-          </a:p>
-        </p:txBody>
-      </p:sp>
-      <p:sp>
-        <p:nvSpPr>
-          <p:cNvPr id="6" name="Rounded Rectangle 5"/>
+          <a:bodyPr rtlCol="0" anchor="ctr"/>
+          <a:lstStyle/>
+          <a:p>
+            <a:pPr algn="ctr"/>
+          </a:p>
+        </p:txBody>
+      </p:sp>
+      <p:sp>
+        <p:nvSpPr>
+          <p:cNvPr id="4" name="Rectangle 3"/>
           <p:cNvSpPr/>
           <p:nvPr/>
         </p:nvSpPr>
         <p:spPr>
           <a:xfrm>
-            <a:off x="4297680" y="1645920"/>
-            <a:ext cx="3474720" cy="2103120"/>
-          </a:xfrm>
-          <a:prstGeom prst="roundRect">
+            <a:off x="6095390" y="0"/>
+            <a:ext cx="6096304" cy="54864"/>
+          </a:xfrm>
+          <a:prstGeom prst="rect">
             <a:avLst/>
           </a:prstGeom>
           <a:solidFill>
-            <a:srgbClr val="121826"/>
+            <a:srgbClr val="A855F7"/>
           </a:solidFill>
-          <a:ln w="15240">
-            <a:solidFill>
-              <a:srgbClr val="1F293D"/>
-            </a:solidFill>
+          <a:ln>
+            <a:noFill/>
           </a:ln>
         </p:spPr>
         <p:style>
@@ -5796,11 +9238,37 @@
           </a:fontRef>
         </p:style>
         <p:txBody>
-          <a:bodyPr rtlCol="0" anchor="ctr" wrap="square"/>
-          <a:lstStyle/>
-          <a:p>
-            <a:pPr algn="ctr">
-              <a:defRPr sz="1400" b="1">
+          <a:bodyPr rtlCol="0" anchor="ctr"/>
+          <a:lstStyle/>
+          <a:p>
+            <a:pPr algn="ctr"/>
+          </a:p>
+        </p:txBody>
+      </p:sp>
+      <p:sp>
+        <p:nvSpPr>
+          <p:cNvPr id="5" name="TextBox 4"/>
+          <p:cNvSpPr txBox="1"/>
+          <p:nvPr/>
+        </p:nvSpPr>
+        <p:spPr>
+          <a:xfrm>
+            <a:off x="731520" y="384048"/>
+            <a:ext cx="10515600" cy="320040"/>
+          </a:xfrm>
+          <a:prstGeom prst="rect">
+            <a:avLst/>
+          </a:prstGeom>
+          <a:noFill/>
+        </p:spPr>
+        <p:txBody>
+          <a:bodyPr wrap="none">
+            <a:spAutoFit/>
+          </a:bodyPr>
+          <a:lstStyle/>
+          <a:p>
+            <a:pPr>
+              <a:defRPr sz="1050" b="1">
                 <a:solidFill>
                   <a:srgbClr val="38BDF8"/>
                 </a:solidFill>
@@ -5808,35 +9276,59 @@
               </a:defRPr>
             </a:pPr>
             <a:r>
-              <a:t>2. Changed Default Value</a:t>
+              <a:t>DETERMINISTIC MATCHING</a:t>
+            </a:r>
+          </a:p>
+        </p:txBody>
+      </p:sp>
+      <p:sp>
+        <p:nvSpPr>
+          <p:cNvPr id="6" name="TextBox 5"/>
+          <p:cNvSpPr txBox="1"/>
+          <p:nvPr/>
+        </p:nvSpPr>
+        <p:spPr>
+          <a:xfrm>
+            <a:off x="731520" y="658368"/>
+            <a:ext cx="10698480" cy="685800"/>
+          </a:xfrm>
+          <a:prstGeom prst="rect">
+            <a:avLst/>
+          </a:prstGeom>
+          <a:noFill/>
+        </p:spPr>
+        <p:txBody>
+          <a:bodyPr wrap="square">
+            <a:spAutoFit/>
+          </a:bodyPr>
+          <a:lstStyle/>
+          <a:p>
+            <a:pPr>
+              <a:defRPr sz="2600" b="1">
+                <a:solidFill>
+                  <a:srgbClr val="F8FAFC"/>
+                </a:solidFill>
+                <a:latin typeface="Arial"/>
+              </a:defRPr>
+            </a:pPr>
+            <a:r>
+              <a:t>Multi-Signal Candidate Matching &amp; Subword Lemmatization</a:t>
             </a:r>
           </a:p>
           <a:p>
             <a:pPr>
               <a:spcBef>
-                <a:spcPts val="600"/>
+                <a:spcPts val="300"/>
               </a:spcBef>
-              <a:defRPr sz="1050">
-                <a:solidFill>
-                  <a:srgbClr val="F8FAFC"/>
-                </a:solidFill>
-                <a:latin typeface="Consolas"/>
-              </a:defRPr>
-            </a:pPr>
-            <a:r>
-              <a:t>config.js: DEFAULT_TIMEOUT = 30 -&gt; 60</a:t>
-            </a:r>
-            <a:br/>
-            <a:r>
-              <a:t>Doc: 'Default timeout is 30s'</a:t>
-            </a:r>
-            <a:br/>
-            <a:r>
-              <a:t>Result: FAIL (High, 93% Conf)</a:t>
-            </a:r>
-            <a:br/>
-            <a:r>
-              <a:t>Fix: 'Default timeout is 60s'</a:t>
+              <a:defRPr sz="1300">
+                <a:solidFill>
+                  <a:srgbClr val="94A3B8"/>
+                </a:solidFill>
+                <a:latin typeface="Arial"/>
+              </a:defRPr>
+            </a:pPr>
+            <a:r>
+              <a:t>Eliminating the need for brute-force LLM evaluation by ranking top relevant sentences deterministically.</a:t>
             </a:r>
           </a:p>
         </p:txBody>
@@ -5849,18 +9341,18 @@
         </p:nvSpPr>
         <p:spPr>
           <a:xfrm>
-            <a:off x="7863840" y="1645920"/>
-            <a:ext cx="3474720" cy="2103120"/>
+            <a:off x="731520" y="1554480"/>
+            <a:ext cx="5212080" cy="4754880"/>
           </a:xfrm>
           <a:prstGeom prst="roundRect">
             <a:avLst/>
           </a:prstGeom>
           <a:solidFill>
-            <a:srgbClr val="121826"/>
+            <a:srgbClr val="121A2C"/>
           </a:solidFill>
-          <a:ln w="15240">
+          <a:ln w="19050">
             <a:solidFill>
-              <a:srgbClr val="1F293D"/>
+              <a:srgbClr val="38BDF8"/>
             </a:solidFill>
           </a:ln>
         </p:spPr>
@@ -5883,43 +9375,114 @@
           <a:lstStyle/>
           <a:p>
             <a:pPr algn="ctr">
-              <a:defRPr sz="1400" b="1">
-                <a:solidFill>
-                  <a:srgbClr val="10B981"/>
-                </a:solidFill>
-                <a:latin typeface="Arial"/>
-              </a:defRPr>
-            </a:pPr>
-            <a:r>
-              <a:t>3. False-Positive Control</a:t>
-            </a:r>
-          </a:p>
-          <a:p>
-            <a:pPr>
-              <a:spcBef>
-                <a:spcPts val="600"/>
-              </a:spcBef>
-              <a:defRPr sz="1050">
+              <a:defRPr sz="1700" b="1">
+                <a:solidFill>
+                  <a:srgbClr val="38BDF8"/>
+                </a:solidFill>
+              </a:defRPr>
+            </a:pPr>
+            <a:r>
+              <a:t>🎯 4-Signal Candidate Scoring Model</a:t>
+            </a:r>
+          </a:p>
+          <a:p>
+            <a:br/>
+            <a:pPr>
+              <a:defRPr sz="1300" b="1">
                 <a:solidFill>
                   <a:srgbClr val="F8FAFC"/>
                 </a:solidFill>
-                <a:latin typeface="Consolas"/>
-              </a:defRPr>
-            </a:pPr>
-            <a:r>
-              <a:t>utils.js: Internal math refactor</a:t>
-            </a:r>
+              </a:defRPr>
+            </a:pPr>
+            <a:r>
+              <a:t>Signal A: Exact Identifier Match (+45%)</a:t>
+            </a:r>
+          </a:p>
+          <a:p>
+            <a:pPr>
+              <a:defRPr sz="1150">
+                <a:solidFill>
+                  <a:srgbClr val="CBD5E1"/>
+                </a:solidFill>
+              </a:defRPr>
+            </a:pPr>
+            <a:r>
+              <a:t>Matches exact flag or constant name (e.g., --timeout, DEFAULT_TIMEOUT) in documentation text.</a:t>
+            </a:r>
+          </a:p>
+          <a:p>
             <a:br/>
-            <a:r>
-              <a:t>Doc: 'Fast calculation utilities'</a:t>
-            </a:r>
+            <a:pPr>
+              <a:defRPr sz="1300" b="1">
+                <a:solidFill>
+                  <a:srgbClr val="F8FAFC"/>
+                </a:solidFill>
+              </a:defRPr>
+            </a:pPr>
+            <a:r>
+              <a:t>Signal B: Old Value Mention (+30%)</a:t>
+            </a:r>
+          </a:p>
+          <a:p>
+            <a:pPr>
+              <a:defRPr sz="1150">
+                <a:solidFill>
+                  <a:srgbClr val="CBD5E1"/>
+                </a:solidFill>
+              </a:defRPr>
+            </a:pPr>
+            <a:r>
+              <a:t>Detects mentions of the previous implementation value (e.g., '30 seconds', '/api/v1/export') using boundary-aware regex.</a:t>
+            </a:r>
+          </a:p>
+          <a:p>
             <a:br/>
-            <a:r>
-              <a:t>Result: PASS (0 Findings)</a:t>
-            </a:r>
+            <a:pPr>
+              <a:defRPr sz="1300" b="1">
+                <a:solidFill>
+                  <a:srgbClr val="F8FAFC"/>
+                </a:solidFill>
+              </a:defRPr>
+            </a:pPr>
+            <a:r>
+              <a:t>Signal C: Section Context (+15%)</a:t>
+            </a:r>
+          </a:p>
+          <a:p>
+            <a:pPr>
+              <a:defRPr sz="1150">
+                <a:solidFill>
+                  <a:srgbClr val="CBD5E1"/>
+                </a:solidFill>
+              </a:defRPr>
+            </a:pPr>
+            <a:r>
+              <a:t>Awards score if sentence appears under relevant headings like 'Configuration', 'CLI Options', 'API Reference'.</a:t>
+            </a:r>
+          </a:p>
+          <a:p>
             <a:br/>
-            <a:r>
-              <a:t>Proves zero false alarms!</a:t>
+            <a:pPr>
+              <a:defRPr sz="1300" b="1">
+                <a:solidFill>
+                  <a:srgbClr val="F8FAFC"/>
+                </a:solidFill>
+              </a:defRPr>
+            </a:pPr>
+            <a:r>
+              <a:t>Signal D: File Path Correlation (+15%)</a:t>
+            </a:r>
+          </a:p>
+          <a:p>
+            <a:pPr>
+              <a:defRPr sz="1150">
+                <a:solidFill>
+                  <a:srgbClr val="CBD5E1"/>
+                </a:solidFill>
+              </a:defRPr>
+            </a:pPr>
+            <a:r>
+              <a:t>Matches source file base name (src/config.js) to doc file base name (docs/config.md) or primary README.</a:t>
             </a:r>
           </a:p>
         </p:txBody>
@@ -5932,18 +9495,18 @@
         </p:nvSpPr>
         <p:spPr>
           <a:xfrm>
-            <a:off x="731520" y="3931920"/>
-            <a:ext cx="3474720" cy="2103120"/>
+            <a:off x="6217920" y="1554480"/>
+            <a:ext cx="5212080" cy="4754880"/>
           </a:xfrm>
           <a:prstGeom prst="roundRect">
             <a:avLst/>
           </a:prstGeom>
           <a:solidFill>
-            <a:srgbClr val="121826"/>
+            <a:srgbClr val="121A2C"/>
           </a:solidFill>
-          <a:ln w="15240">
+          <a:ln w="19050">
             <a:solidFill>
-              <a:srgbClr val="1F293D"/>
+              <a:srgbClr val="A855F7"/>
             </a:solidFill>
           </a:ln>
         </p:spPr>
@@ -5966,209 +9529,147 @@
           <a:lstStyle/>
           <a:p>
             <a:pPr algn="ctr">
-              <a:defRPr sz="1400" b="1">
-                <a:solidFill>
-                  <a:srgbClr val="38BDF8"/>
-                </a:solidFill>
-                <a:latin typeface="Arial"/>
-              </a:defRPr>
-            </a:pPr>
-            <a:r>
-              <a:t>4. Config Table Drift</a:t>
+              <a:defRPr sz="1700" b="1">
+                <a:solidFill>
+                  <a:srgbClr val="A855F7"/>
+                </a:solidFill>
+              </a:defRPr>
+            </a:pPr>
+            <a:r>
+              <a:t>🧩 Subword Tokenization &amp; Root Lemmatization</a:t>
+            </a:r>
+          </a:p>
+          <a:p>
+            <a:pPr>
+              <a:defRPr sz="1200">
+                <a:solidFill>
+                  <a:srgbClr val="F8FAFC"/>
+                </a:solidFill>
+              </a:defRPr>
+            </a:pPr>
+            <a:r>
+              <a:t>Code identifiers rarely match prose word-for-word. DriftLens bridges this gap:</a:t>
+            </a:r>
+            <a:br/>
+          </a:p>
+          <a:p>
+            <a:pPr>
+              <a:defRPr sz="1300" b="1">
+                <a:solidFill>
+                  <a:srgbClr val="10B981"/>
+                </a:solidFill>
+              </a:defRPr>
+            </a:pPr>
+            <a:r>
+              <a:t>• Identifier Splitting:</a:t>
             </a:r>
           </a:p>
           <a:p>
             <a:pPr>
               <a:spcBef>
-                <a:spcPts val="600"/>
+                <a:spcPts val="100"/>
               </a:spcBef>
-              <a:defRPr sz="1050">
-                <a:solidFill>
-                  <a:srgbClr val="F8FAFC"/>
+              <a:defRPr sz="1100">
+                <a:solidFill>
+                  <a:srgbClr val="CBD5E1"/>
                 </a:solidFill>
                 <a:latin typeface="Consolas"/>
               </a:defRPr>
             </a:pPr>
             <a:r>
-              <a:t>config.js: TIMEOUT_SECONDS = 30 -&gt; 60</a:t>
+              <a:t>DEFAULT_TIMEOUT -&gt; ['default', 'timeout']</a:t>
+            </a:r>
+          </a:p>
+          <a:p>
+            <a:pPr>
+              <a:defRPr sz="1300" b="1">
+                <a:solidFill>
+                  <a:srgbClr val="10B981"/>
+                </a:solidFill>
+              </a:defRPr>
+            </a:pPr>
+            <a:r>
+              <a:t>• Compound Word Decomposition:</a:t>
+            </a:r>
+          </a:p>
+          <a:p>
+            <a:pPr>
+              <a:spcBef>
+                <a:spcPts val="100"/>
+              </a:spcBef>
+              <a:defRPr sz="1100">
+                <a:solidFill>
+                  <a:srgbClr val="CBD5E1"/>
+                </a:solidFill>
+                <a:latin typeface="Consolas"/>
+              </a:defRPr>
+            </a:pPr>
+            <a:r>
+              <a:t>'timeout' -&gt; ['time', 'out']</a:t>
             </a:r>
             <a:br/>
             <a:r>
-              <a:t>Doc: | TIMEOUT_SECONDS | 30 |</a:t>
+              <a:t>'filepath' -&gt; ['file', 'path']</a:t>
             </a:r>
             <a:br/>
             <a:r>
-              <a:t>Result: FAIL (High, 97% Conf)</a:t>
-            </a:r>
-            <a:br/>
-            <a:r>
-              <a:t>Fix: Updates table row to 60</a:t>
-            </a:r>
-          </a:p>
-        </p:txBody>
-      </p:sp>
-      <p:sp>
-        <p:nvSpPr>
-          <p:cNvPr id="9" name="Rounded Rectangle 8"/>
-          <p:cNvSpPr/>
-          <p:nvPr/>
-        </p:nvSpPr>
-        <p:spPr>
-          <a:xfrm>
-            <a:off x="4297680" y="3931920"/>
-            <a:ext cx="3474720" cy="2103120"/>
-          </a:xfrm>
-          <a:prstGeom prst="roundRect">
-            <a:avLst/>
-          </a:prstGeom>
-          <a:solidFill>
-            <a:srgbClr val="121826"/>
-          </a:solidFill>
-          <a:ln w="15240">
-            <a:solidFill>
-              <a:srgbClr val="1F293D"/>
-            </a:solidFill>
-          </a:ln>
-        </p:spPr>
-        <p:style>
-          <a:lnRef idx="1">
-            <a:schemeClr val="accent1"/>
-          </a:lnRef>
-          <a:fillRef idx="3">
-            <a:schemeClr val="accent1"/>
-          </a:fillRef>
-          <a:effectRef idx="2">
-            <a:schemeClr val="accent1"/>
-          </a:effectRef>
-          <a:fontRef idx="minor">
-            <a:schemeClr val="lt1"/>
-          </a:fontRef>
-        </p:style>
-        <p:txBody>
-          <a:bodyPr rtlCol="0" anchor="ctr" wrap="square"/>
-          <a:lstStyle/>
-          <a:p>
-            <a:pPr algn="ctr">
-              <a:defRPr sz="1400" b="1">
-                <a:solidFill>
-                  <a:srgbClr val="38BDF8"/>
-                </a:solidFill>
-                <a:latin typeface="Arial"/>
-              </a:defRPr>
-            </a:pPr>
-            <a:r>
-              <a:t>5. API Parameter Signature</a:t>
+              <a:t>'endpoint' -&gt; ['end', 'point']</a:t>
+            </a:r>
+          </a:p>
+          <a:p>
+            <a:pPr>
+              <a:defRPr sz="1300" b="1">
+                <a:solidFill>
+                  <a:srgbClr val="10B981"/>
+                </a:solidFill>
+              </a:defRPr>
+            </a:pPr>
+            <a:r>
+              <a:t>• Suffix Stripping / Stemming:</a:t>
             </a:r>
           </a:p>
           <a:p>
             <a:pPr>
               <a:spcBef>
-                <a:spcPts val="600"/>
+                <a:spcPts val="100"/>
               </a:spcBef>
-              <a:defRPr sz="1050">
-                <a:solidFill>
-                  <a:srgbClr val="F8FAFC"/>
+              <a:defRPr sz="1100">
+                <a:solidFill>
+                  <a:srgbClr val="CBD5E1"/>
                 </a:solidFill>
                 <a:latin typeface="Consolas"/>
               </a:defRPr>
             </a:pPr>
             <a:r>
-              <a:t>api.js: registerUser(email, password, tenantId)</a:t>
-            </a:r>
-            <a:br/>
-            <a:r>
-              <a:t>Doc: 'registerUser(email, password)'</a:t>
-            </a:r>
-            <a:br/>
-            <a:r>
-              <a:t>Result: FAIL (High, 91% Conf)</a:t>
-            </a:r>
-            <a:br/>
-            <a:r>
-              <a:t>Fix: Updates function signature</a:t>
-            </a:r>
-          </a:p>
-        </p:txBody>
-      </p:sp>
-      <p:sp>
-        <p:nvSpPr>
-          <p:cNvPr id="10" name="Rounded Rectangle 9"/>
-          <p:cNvSpPr/>
-          <p:nvPr/>
-        </p:nvSpPr>
-        <p:spPr>
-          <a:xfrm>
-            <a:off x="7863840" y="3931920"/>
-            <a:ext cx="3474720" cy="2103120"/>
-          </a:xfrm>
-          <a:prstGeom prst="roundRect">
-            <a:avLst/>
-          </a:prstGeom>
-          <a:solidFill>
-            <a:srgbClr val="121826"/>
-          </a:solidFill>
-          <a:ln w="15240">
-            <a:solidFill>
-              <a:srgbClr val="1F293D"/>
-            </a:solidFill>
-          </a:ln>
-        </p:spPr>
-        <p:style>
-          <a:lnRef idx="1">
-            <a:schemeClr val="accent1"/>
-          </a:lnRef>
-          <a:fillRef idx="3">
-            <a:schemeClr val="accent1"/>
-          </a:fillRef>
-          <a:effectRef idx="2">
-            <a:schemeClr val="accent1"/>
-          </a:effectRef>
-          <a:fontRef idx="minor">
-            <a:schemeClr val="lt1"/>
-          </a:fontRef>
-        </p:style>
-        <p:txBody>
-          <a:bodyPr rtlCol="0" anchor="ctr" wrap="square"/>
-          <a:lstStyle/>
-          <a:p>
-            <a:pPr algn="ctr">
-              <a:defRPr sz="1400" b="1">
-                <a:solidFill>
-                  <a:srgbClr val="38BDF8"/>
-                </a:solidFill>
-                <a:latin typeface="Arial"/>
-              </a:defRPr>
-            </a:pPr>
-            <a:r>
-              <a:t>6. Deleted Feature / Route</a:t>
+              <a:t>'timing out', 'times', 'timed' -&gt; root 'time'</a:t>
+            </a:r>
+          </a:p>
+          <a:p>
+            <a:pPr>
+              <a:defRPr sz="1300" b="1">
+                <a:solidFill>
+                  <a:srgbClr val="10B981"/>
+                </a:solidFill>
+              </a:defRPr>
+            </a:pPr>
+            <a:r>
+              <a:t>• O(1) Hash Set Lookups:</a:t>
             </a:r>
           </a:p>
           <a:p>
             <a:pPr>
               <a:spcBef>
-                <a:spcPts val="600"/>
+                <a:spcPts val="100"/>
               </a:spcBef>
-              <a:defRPr sz="1050">
-                <a:solidFill>
-                  <a:srgbClr val="F8FAFC"/>
+              <a:defRPr sz="1100">
+                <a:solidFill>
+                  <a:srgbClr val="CBD5E1"/>
                 </a:solidFill>
                 <a:latin typeface="Consolas"/>
               </a:defRPr>
             </a:pPr>
             <a:r>
-              <a:t>routes.js: Deleted /api/v1/legacy-export</a:t>
-            </a:r>
-            <a:br/>
-            <a:r>
-              <a:t>Doc: 'Use /api/v1/legacy-export for CSV'</a:t>
-            </a:r>
-            <a:br/>
-            <a:r>
-              <a:t>Result: FAIL (High, 90% Conf)</a:t>
-            </a:r>
-            <a:br/>
-            <a:r>
-              <a:t>Fix: Flags obsolete documentation</a:t>
+              <a:t>Pre-computes _wordsSet and _stemsSet on documentation chunks for instantaneous O(1) membership checks.</a:t>
             </a:r>
           </a:p>
         </p:txBody>
@@ -6206,7 +9707,7 @@
             <a:avLst/>
           </a:prstGeom>
           <a:solidFill>
-            <a:srgbClr val="090D16"/>
+            <a:srgbClr val="0B0F19"/>
           </a:solidFill>
           <a:ln>
             <a:noFill/>
@@ -6236,97 +9737,23 @@
       </p:sp>
       <p:sp>
         <p:nvSpPr>
-          <p:cNvPr id="3" name="TextBox 2"/>
-          <p:cNvSpPr txBox="1"/>
-          <p:nvPr/>
-        </p:nvSpPr>
-        <p:spPr>
-          <a:xfrm>
-            <a:off x="731520" y="457200"/>
-            <a:ext cx="10058400" cy="320040"/>
-          </a:xfrm>
-          <a:prstGeom prst="rect">
-            <a:avLst/>
-          </a:prstGeom>
-          <a:noFill/>
-        </p:spPr>
-        <p:txBody>
-          <a:bodyPr wrap="square">
-            <a:spAutoFit/>
-          </a:bodyPr>
-          <a:lstStyle/>
-          <a:p>
-            <a:pPr>
-              <a:defRPr sz="1100" b="1">
-                <a:solidFill>
-                  <a:srgbClr val="38BDF8"/>
-                </a:solidFill>
-                <a:latin typeface="Arial"/>
-              </a:defRPr>
-            </a:pPr>
-            <a:r>
-              <a:t>DRIFTLENS | HACKTOBERFEST 2026</a:t>
-            </a:r>
-          </a:p>
-        </p:txBody>
-      </p:sp>
-      <p:sp>
-        <p:nvSpPr>
-          <p:cNvPr id="4" name="TextBox 3"/>
-          <p:cNvSpPr txBox="1"/>
-          <p:nvPr/>
-        </p:nvSpPr>
-        <p:spPr>
-          <a:xfrm>
-            <a:off x="731520" y="777240"/>
-            <a:ext cx="10515600" cy="731520"/>
-          </a:xfrm>
-          <a:prstGeom prst="rect">
-            <a:avLst/>
-          </a:prstGeom>
-          <a:noFill/>
-        </p:spPr>
-        <p:txBody>
-          <a:bodyPr wrap="square">
-            <a:spAutoFit/>
-          </a:bodyPr>
-          <a:lstStyle/>
-          <a:p>
-            <a:pPr>
-              <a:defRPr sz="2800" b="1">
-                <a:solidFill>
-                  <a:srgbClr val="F8FAFC"/>
-                </a:solidFill>
-                <a:latin typeface="Arial"/>
-              </a:defRPr>
-            </a:pPr>
-            <a:r>
-              <a:t>Standout Innovations: Beyond Drift Detection</a:t>
-            </a:r>
-          </a:p>
-        </p:txBody>
-      </p:sp>
-      <p:sp>
-        <p:nvSpPr>
-          <p:cNvPr id="5" name="Rounded Rectangle 4"/>
+          <p:cNvPr id="3" name="Rectangle 2"/>
           <p:cNvSpPr/>
           <p:nvPr/>
         </p:nvSpPr>
         <p:spPr>
           <a:xfrm>
-            <a:off x="731520" y="1645920"/>
-            <a:ext cx="3474720" cy="4389120"/>
-          </a:xfrm>
-          <a:prstGeom prst="roundRect">
+            <a:off x="0" y="0"/>
+            <a:ext cx="6095390" cy="54864"/>
+          </a:xfrm>
+          <a:prstGeom prst="rect">
             <a:avLst/>
           </a:prstGeom>
           <a:solidFill>
-            <a:srgbClr val="121826"/>
+            <a:srgbClr val="38BDF8"/>
           </a:solidFill>
-          <a:ln w="15240">
-            <a:solidFill>
-              <a:srgbClr val="1F293D"/>
-            </a:solidFill>
+          <a:ln>
+            <a:noFill/>
           </a:ln>
         </p:spPr>
         <p:style>
@@ -6344,65 +9771,32 @@
           </a:fontRef>
         </p:style>
         <p:txBody>
-          <a:bodyPr rtlCol="0" anchor="ctr" wrap="square"/>
-          <a:lstStyle/>
-          <a:p>
-            <a:pPr algn="ctr">
-              <a:defRPr sz="1800" b="1">
-                <a:solidFill>
-                  <a:srgbClr val="38BDF8"/>
-                </a:solidFill>
-                <a:latin typeface="Arial"/>
-              </a:defRPr>
-            </a:pPr>
-            <a:r>
-              <a:t>✨ Starter README Generator</a:t>
-            </a:r>
-          </a:p>
-          <a:p>
-            <a:pPr>
-              <a:spcBef>
-                <a:spcPts val="1400"/>
-              </a:spcBef>
-              <a:defRPr sz="1300">
-                <a:solidFill>
-                  <a:srgbClr val="F8FAFC"/>
-                </a:solidFill>
-                <a:latin typeface="Arial"/>
-              </a:defRPr>
-            </a:pPr>
-            <a:r>
-              <a:t>What if a repo has zero documentation? DriftLens statically inspects all constants, CLI flags, and routes to synthesize an accurate starter README.md automatically.</a:t>
-            </a:r>
-            <a:br/>
-            <a:br/>
-            <a:r>
-              <a:t>CLI: driftlens generate-readme --repo .</a:t>
-            </a:r>
-          </a:p>
-        </p:txBody>
-      </p:sp>
-      <p:sp>
-        <p:nvSpPr>
-          <p:cNvPr id="6" name="Rounded Rectangle 5"/>
+          <a:bodyPr rtlCol="0" anchor="ctr"/>
+          <a:lstStyle/>
+          <a:p>
+            <a:pPr algn="ctr"/>
+          </a:p>
+        </p:txBody>
+      </p:sp>
+      <p:sp>
+        <p:nvSpPr>
+          <p:cNvPr id="4" name="Rectangle 3"/>
           <p:cNvSpPr/>
           <p:nvPr/>
         </p:nvSpPr>
         <p:spPr>
           <a:xfrm>
-            <a:off x="4297680" y="1645920"/>
-            <a:ext cx="3474720" cy="4389120"/>
-          </a:xfrm>
-          <a:prstGeom prst="roundRect">
+            <a:off x="6095390" y="0"/>
+            <a:ext cx="6096304" cy="54864"/>
+          </a:xfrm>
+          <a:prstGeom prst="rect">
             <a:avLst/>
           </a:prstGeom>
           <a:solidFill>
-            <a:srgbClr val="121826"/>
+            <a:srgbClr val="A855F7"/>
           </a:solidFill>
-          <a:ln w="15240">
-            <a:solidFill>
-              <a:srgbClr val="1F293D"/>
-            </a:solidFill>
+          <a:ln>
+            <a:noFill/>
           </a:ln>
         </p:spPr>
         <p:style>
@@ -6420,35 +9814,97 @@
           </a:fontRef>
         </p:style>
         <p:txBody>
-          <a:bodyPr rtlCol="0" anchor="ctr" wrap="square"/>
-          <a:lstStyle/>
-          <a:p>
-            <a:pPr algn="ctr">
-              <a:defRPr sz="1800" b="1">
-                <a:solidFill>
-                  <a:srgbClr val="10B981"/>
+          <a:bodyPr rtlCol="0" anchor="ctr"/>
+          <a:lstStyle/>
+          <a:p>
+            <a:pPr algn="ctr"/>
+          </a:p>
+        </p:txBody>
+      </p:sp>
+      <p:sp>
+        <p:nvSpPr>
+          <p:cNvPr id="5" name="TextBox 4"/>
+          <p:cNvSpPr txBox="1"/>
+          <p:nvPr/>
+        </p:nvSpPr>
+        <p:spPr>
+          <a:xfrm>
+            <a:off x="731520" y="384048"/>
+            <a:ext cx="10515600" cy="320040"/>
+          </a:xfrm>
+          <a:prstGeom prst="rect">
+            <a:avLst/>
+          </a:prstGeom>
+          <a:noFill/>
+        </p:spPr>
+        <p:txBody>
+          <a:bodyPr wrap="none">
+            <a:spAutoFit/>
+          </a:bodyPr>
+          <a:lstStyle/>
+          <a:p>
+            <a:pPr>
+              <a:defRPr sz="1050" b="1">
+                <a:solidFill>
+                  <a:srgbClr val="38BDF8"/>
                 </a:solidFill>
                 <a:latin typeface="Arial"/>
               </a:defRPr>
             </a:pPr>
             <a:r>
-              <a:t>🌐 Visual Blast Radius Graph</a:t>
+              <a:t>MATHEMATICAL CALIBRATION</a:t>
+            </a:r>
+          </a:p>
+        </p:txBody>
+      </p:sp>
+      <p:sp>
+        <p:nvSpPr>
+          <p:cNvPr id="6" name="TextBox 5"/>
+          <p:cNvSpPr txBox="1"/>
+          <p:nvPr/>
+        </p:nvSpPr>
+        <p:spPr>
+          <a:xfrm>
+            <a:off x="731520" y="658368"/>
+            <a:ext cx="10698480" cy="685800"/>
+          </a:xfrm>
+          <a:prstGeom prst="rect">
+            <a:avLst/>
+          </a:prstGeom>
+          <a:noFill/>
+        </p:spPr>
+        <p:txBody>
+          <a:bodyPr wrap="square">
+            <a:spAutoFit/>
+          </a:bodyPr>
+          <a:lstStyle/>
+          <a:p>
+            <a:pPr>
+              <a:defRPr sz="2600" b="1">
+                <a:solidFill>
+                  <a:srgbClr val="F8FAFC"/>
+                </a:solidFill>
+                <a:latin typeface="Arial"/>
+              </a:defRPr>
+            </a:pPr>
+            <a:r>
+              <a:t>Confidence Calibration Formula &amp; Worked Example</a:t>
             </a:r>
           </a:p>
           <a:p>
             <a:pPr>
               <a:spcBef>
-                <a:spcPts val="1400"/>
+                <a:spcPts val="300"/>
               </a:spcBef>
               <a:defRPr sz="1300">
                 <a:solidFill>
-                  <a:srgbClr val="F8FAFC"/>
+                  <a:srgbClr val="94A3B8"/>
                 </a:solidFill>
                 <a:latin typeface="Arial"/>
               </a:defRPr>
             </a:pPr>
             <a:r>
-              <a:t>Interactive SVG dependency graph maps code changes to affected documentation sections. Visualizes exactly where code changes radiate impact into documentation.</a:t>
+              <a:t>A weighted composite formula balancing deterministic AST facts, candidate overlap, and LLM reasoning.</a:t>
             </a:r>
           </a:p>
         </p:txBody>
@@ -6461,18 +9917,18 @@
         </p:nvSpPr>
         <p:spPr>
           <a:xfrm>
-            <a:off x="7863840" y="1645920"/>
-            <a:ext cx="3474720" cy="4389120"/>
+            <a:off x="731520" y="1554480"/>
+            <a:ext cx="6217920" cy="4754880"/>
           </a:xfrm>
           <a:prstGeom prst="roundRect">
             <a:avLst/>
           </a:prstGeom>
           <a:solidFill>
-            <a:srgbClr val="121826"/>
+            <a:srgbClr val="0F1D38"/>
           </a:solidFill>
-          <a:ln w="15240">
+          <a:ln w="19050">
             <a:solidFill>
-              <a:srgbClr val="1F293D"/>
+              <a:srgbClr val="38BDF8"/>
             </a:solidFill>
           </a:ln>
         </p:spPr>
@@ -6495,31 +9951,281 @@
           <a:lstStyle/>
           <a:p>
             <a:pPr algn="ctr">
-              <a:defRPr sz="1800" b="1">
+              <a:defRPr sz="1700" b="1">
+                <a:solidFill>
+                  <a:srgbClr val="38BDF8"/>
+                </a:solidFill>
+              </a:defRPr>
+            </a:pPr>
+            <a:r>
+              <a:t>📐 The Composite Confidence Formula</a:t>
+            </a:r>
+          </a:p>
+          <a:p>
+            <a:br/>
+            <a:pPr>
+              <a:defRPr sz="1500" b="1">
+                <a:solidFill>
+                  <a:srgbClr val="10B981"/>
+                </a:solidFill>
+                <a:latin typeface="Consolas"/>
+              </a:defRPr>
+            </a:pPr>
+            <a:r>
+              <a:t>Confidence = 0.35 × S_det + 0.25 × S_cand + 0.40 × S_llm</a:t>
+            </a:r>
+            <a:br/>
+          </a:p>
+          <a:p>
+            <a:pPr>
+              <a:defRPr sz="1300" b="1">
+                <a:solidFill>
+                  <a:srgbClr val="F8FAFC"/>
+                </a:solidFill>
+              </a:defRPr>
+            </a:pPr>
+            <a:r>
+              <a:t>Worked Numerical Calculation (Renamed Flag Example):</a:t>
+            </a:r>
+            <a:br/>
+          </a:p>
+          <a:p>
+            <a:pPr>
+              <a:spcBef>
+                <a:spcPts val="300"/>
+              </a:spcBef>
+              <a:defRPr sz="1150">
+                <a:solidFill>
+                  <a:srgbClr val="CBD5E1"/>
+                </a:solidFill>
+              </a:defRPr>
+            </a:pPr>
+            <a:r>
+              <a:t>• S_det = 1.0: Hard AST shift: CLI flag renamed from '--timeout' to '--deadline'</a:t>
+            </a:r>
+          </a:p>
+          <a:p>
+            <a:pPr>
+              <a:spcBef>
+                <a:spcPts val="300"/>
+              </a:spcBef>
+              <a:defRPr sz="1150">
+                <a:solidFill>
+                  <a:srgbClr val="CBD5E1"/>
+                </a:solidFill>
+              </a:defRPr>
+            </a:pPr>
+            <a:r>
+              <a:t>• S_cand = 0.90: Candidate chunk explicitly matches old flag '--timeout' in 'CLI Options'</a:t>
+            </a:r>
+          </a:p>
+          <a:p>
+            <a:pPr>
+              <a:spcBef>
+                <a:spcPts val="300"/>
+              </a:spcBef>
+              <a:defRPr sz="1150">
+                <a:solidFill>
+                  <a:srgbClr val="CBD5E1"/>
+                </a:solidFill>
+              </a:defRPr>
+            </a:pPr>
+            <a:r>
+              <a:t>• S_llm = 0.97: Qwen 2.5 7B semantic reasoning confirms direct factual contradiction</a:t>
+            </a:r>
+          </a:p>
+          <a:p>
+            <a:pPr>
+              <a:spcBef>
+                <a:spcPts val="300"/>
+              </a:spcBef>
+              <a:defRPr sz="1150">
+                <a:solidFill>
+                  <a:srgbClr val="CBD5E1"/>
+                </a:solidFill>
+              </a:defRPr>
+            </a:pPr>
+            <a:r>
+              <a:t>• Result: 0.938 -&gt; 94%: 0.35(1.0) + 0.25(0.90) + 0.40(0.97) = 0.35 + 0.225 + 0.388 = 0.963 -&gt; 96%</a:t>
+            </a:r>
+          </a:p>
+          <a:p>
+            <a:br/>
+            <a:pPr>
+              <a:defRPr sz="1150" b="1">
                 <a:solidFill>
                   <a:srgbClr val="F59E0B"/>
                 </a:solidFill>
-                <a:latin typeface="Arial"/>
-              </a:defRPr>
-            </a:pPr>
-            <a:r>
-              <a:t>⚡ 1-Click Auto-Remediation</a:t>
+              </a:defRPr>
+            </a:pPr>
+            <a:r>
+              <a:t>🛡️ Strict 0.60 Confidence Threshold: Scores below 60% are discarded as noise.</a:t>
+            </a:r>
+          </a:p>
+        </p:txBody>
+      </p:sp>
+      <p:sp>
+        <p:nvSpPr>
+          <p:cNvPr id="8" name="Rounded Rectangle 7"/>
+          <p:cNvSpPr/>
+          <p:nvPr/>
+        </p:nvSpPr>
+        <p:spPr>
+          <a:xfrm>
+            <a:off x="7132320" y="1554480"/>
+            <a:ext cx="4297680" cy="4754880"/>
+          </a:xfrm>
+          <a:prstGeom prst="roundRect">
+            <a:avLst/>
+          </a:prstGeom>
+          <a:solidFill>
+            <a:srgbClr val="121A2C"/>
+          </a:solidFill>
+          <a:ln w="19050">
+            <a:solidFill>
+              <a:srgbClr val="F59E0B"/>
+            </a:solidFill>
+          </a:ln>
+        </p:spPr>
+        <p:style>
+          <a:lnRef idx="1">
+            <a:schemeClr val="accent1"/>
+          </a:lnRef>
+          <a:fillRef idx="3">
+            <a:schemeClr val="accent1"/>
+          </a:fillRef>
+          <a:effectRef idx="2">
+            <a:schemeClr val="accent1"/>
+          </a:effectRef>
+          <a:fontRef idx="minor">
+            <a:schemeClr val="lt1"/>
+          </a:fontRef>
+        </p:style>
+        <p:txBody>
+          <a:bodyPr rtlCol="0" anchor="ctr" wrap="square"/>
+          <a:lstStyle/>
+          <a:p>
+            <a:pPr algn="ctr">
+              <a:defRPr sz="1700" b="1">
+                <a:solidFill>
+                  <a:srgbClr val="F59E0B"/>
+                </a:solidFill>
+              </a:defRPr>
+            </a:pPr>
+            <a:r>
+              <a:t>🚦 Actionable Severity Tiers</a:t>
+            </a:r>
+          </a:p>
+          <a:p>
+            <a:br/>
+            <a:pPr>
+              <a:defRPr sz="1250" b="1">
+                <a:solidFill>
+                  <a:srgbClr val="F43F5E"/>
+                </a:solidFill>
+              </a:defRPr>
+            </a:pPr>
+            <a:r>
+              <a:t>🔴 HIGH SEVERITY (Blocks CI)</a:t>
             </a:r>
           </a:p>
           <a:p>
             <a:pPr>
               <a:spcBef>
-                <a:spcPts val="1400"/>
+                <a:spcPts val="200"/>
               </a:spcBef>
-              <a:defRPr sz="1300">
+              <a:defRPr sz="1100">
                 <a:solidFill>
                   <a:srgbClr val="F8FAFC"/>
                 </a:solidFill>
-                <a:latin typeface="Arial"/>
-              </a:defRPr>
-            </a:pPr>
-            <a:r>
-              <a:t>Maintainers don't just get an alert — they can click 'Apply Fix' directly in the Web Studio or download a git .patch file to apply the correction in 1 second.</a:t>
+              </a:defRPr>
+            </a:pPr>
+            <a:r>
+              <a:t>Direct factual contradiction: renamed flag, altered default, or deleted route. Exits with code 1, blocking PR merge.</a:t>
+            </a:r>
+          </a:p>
+          <a:p>
+            <a:br/>
+            <a:pPr>
+              <a:defRPr sz="1250" b="1">
+                <a:solidFill>
+                  <a:srgbClr val="F59E0B"/>
+                </a:solidFill>
+              </a:defRPr>
+            </a:pPr>
+            <a:r>
+              <a:t>🟡 MEDIUM SEVERITY (Warning)</a:t>
+            </a:r>
+          </a:p>
+          <a:p>
+            <a:pPr>
+              <a:spcBef>
+                <a:spcPts val="200"/>
+              </a:spcBef>
+              <a:defRPr sz="1100">
+                <a:solidFill>
+                  <a:srgbClr val="F8FAFC"/>
+                </a:solidFill>
+              </a:defRPr>
+            </a:pPr>
+            <a:r>
+              <a:t>Indirect semantic shift or parameter nuance. Flags PR with non-blocking warning annotation.</a:t>
+            </a:r>
+          </a:p>
+          <a:p>
+            <a:br/>
+            <a:pPr>
+              <a:defRPr sz="1250" b="1">
+                <a:solidFill>
+                  <a:srgbClr val="38BDF8"/>
+                </a:solidFill>
+              </a:defRPr>
+            </a:pPr>
+            <a:r>
+              <a:t>⚪ LOW SEVERITY (Info)</a:t>
+            </a:r>
+          </a:p>
+          <a:p>
+            <a:pPr>
+              <a:spcBef>
+                <a:spcPts val="200"/>
+              </a:spcBef>
+              <a:defRPr sz="1100">
+                <a:solidFill>
+                  <a:srgbClr val="F8FAFC"/>
+                </a:solidFill>
+              </a:defRPr>
+            </a:pPr>
+            <a:r>
+              <a:t>Minor stylistic or contextual documentation suggestions.</a:t>
+            </a:r>
+          </a:p>
+          <a:p>
+            <a:br/>
+            <a:pPr>
+              <a:defRPr sz="1250" b="1">
+                <a:solidFill>
+                  <a:srgbClr val="10B981"/>
+                </a:solidFill>
+              </a:defRPr>
+            </a:pPr>
+            <a:r>
+              <a:t>🛡️ Zero False Alarm Shield</a:t>
+            </a:r>
+          </a:p>
+          <a:p>
+            <a:pPr>
+              <a:spcBef>
+                <a:spcPts val="200"/>
+              </a:spcBef>
+              <a:defRPr sz="1100">
+                <a:solidFill>
+                  <a:srgbClr val="F8FAFC"/>
+                </a:solidFill>
+              </a:defRPr>
+            </a:pPr>
+            <a:r>
+              <a:t>If the developer updated the documentation sentence in the same PR, DriftLens detects it and suppresses the finding.</a:t>
             </a:r>
           </a:p>
         </p:txBody>
@@ -6557,7 +10263,7 @@
             <a:avLst/>
           </a:prstGeom>
           <a:solidFill>
-            <a:srgbClr val="090D16"/>
+            <a:srgbClr val="0B0F19"/>
           </a:solidFill>
           <a:ln>
             <a:noFill/>
@@ -6587,97 +10293,23 @@
       </p:sp>
       <p:sp>
         <p:nvSpPr>
-          <p:cNvPr id="3" name="TextBox 2"/>
-          <p:cNvSpPr txBox="1"/>
-          <p:nvPr/>
-        </p:nvSpPr>
-        <p:spPr>
-          <a:xfrm>
-            <a:off x="731520" y="457200"/>
-            <a:ext cx="10058400" cy="320040"/>
-          </a:xfrm>
-          <a:prstGeom prst="rect">
-            <a:avLst/>
-          </a:prstGeom>
-          <a:noFill/>
-        </p:spPr>
-        <p:txBody>
-          <a:bodyPr wrap="square">
-            <a:spAutoFit/>
-          </a:bodyPr>
-          <a:lstStyle/>
-          <a:p>
-            <a:pPr>
-              <a:defRPr sz="1100" b="1">
-                <a:solidFill>
-                  <a:srgbClr val="38BDF8"/>
-                </a:solidFill>
-                <a:latin typeface="Arial"/>
-              </a:defRPr>
-            </a:pPr>
-            <a:r>
-              <a:t>DRIFTLENS | HACKTOBERFEST 2026</a:t>
-            </a:r>
-          </a:p>
-        </p:txBody>
-      </p:sp>
-      <p:sp>
-        <p:nvSpPr>
-          <p:cNvPr id="4" name="TextBox 3"/>
-          <p:cNvSpPr txBox="1"/>
-          <p:nvPr/>
-        </p:nvSpPr>
-        <p:spPr>
-          <a:xfrm>
-            <a:off x="731520" y="777240"/>
-            <a:ext cx="10515600" cy="731520"/>
-          </a:xfrm>
-          <a:prstGeom prst="rect">
-            <a:avLst/>
-          </a:prstGeom>
-          <a:noFill/>
-        </p:spPr>
-        <p:txBody>
-          <a:bodyPr wrap="square">
-            <a:spAutoFit/>
-          </a:bodyPr>
-          <a:lstStyle/>
-          <a:p>
-            <a:pPr>
-              <a:defRPr sz="2800" b="1">
-                <a:solidFill>
-                  <a:srgbClr val="F8FAFC"/>
-                </a:solidFill>
-                <a:latin typeface="Arial"/>
-              </a:defRPr>
-            </a:pPr>
-            <a:r>
-              <a:t>Verification, Performance &amp; CI/CD Integration</a:t>
-            </a:r>
-          </a:p>
-        </p:txBody>
-      </p:sp>
-      <p:sp>
-        <p:nvSpPr>
-          <p:cNvPr id="5" name="Rounded Rectangle 4"/>
+          <p:cNvPr id="3" name="Rectangle 2"/>
           <p:cNvSpPr/>
           <p:nvPr/>
         </p:nvSpPr>
         <p:spPr>
           <a:xfrm>
-            <a:off x="731520" y="1645920"/>
-            <a:ext cx="2606040" cy="1463040"/>
-          </a:xfrm>
-          <a:prstGeom prst="roundRect">
+            <a:off x="0" y="0"/>
+            <a:ext cx="6095390" cy="54864"/>
+          </a:xfrm>
+          <a:prstGeom prst="rect">
             <a:avLst/>
           </a:prstGeom>
           <a:solidFill>
-            <a:srgbClr val="121826"/>
+            <a:srgbClr val="38BDF8"/>
           </a:solidFill>
-          <a:ln w="15240">
-            <a:solidFill>
-              <a:srgbClr val="1F293D"/>
-            </a:solidFill>
+          <a:ln>
+            <a:noFill/>
           </a:ln>
         </p:spPr>
         <p:style>
@@ -6695,57 +10327,32 @@
           </a:fontRef>
         </p:style>
         <p:txBody>
-          <a:bodyPr rtlCol="0" anchor="ctr" wrap="square"/>
-          <a:lstStyle/>
-          <a:p>
-            <a:pPr algn="ctr">
-              <a:defRPr sz="2800" b="1">
-                <a:solidFill>
-                  <a:srgbClr val="10B981"/>
-                </a:solidFill>
-                <a:latin typeface="Arial"/>
-              </a:defRPr>
-            </a:pPr>
-            <a:r>
-              <a:t>70</a:t>
-            </a:r>
-          </a:p>
-          <a:p>
-            <a:pPr algn="ctr">
-              <a:defRPr sz="1200">
-                <a:solidFill>
-                  <a:srgbClr val="94A3B8"/>
-                </a:solidFill>
-                <a:latin typeface="Arial"/>
-              </a:defRPr>
-            </a:pPr>
-            <a:r>
-              <a:t>Unit &amp; Integration Tests</a:t>
-            </a:r>
-          </a:p>
-        </p:txBody>
-      </p:sp>
-      <p:sp>
-        <p:nvSpPr>
-          <p:cNvPr id="6" name="Rounded Rectangle 5"/>
+          <a:bodyPr rtlCol="0" anchor="ctr"/>
+          <a:lstStyle/>
+          <a:p>
+            <a:pPr algn="ctr"/>
+          </a:p>
+        </p:txBody>
+      </p:sp>
+      <p:sp>
+        <p:nvSpPr>
+          <p:cNvPr id="4" name="Rectangle 3"/>
           <p:cNvSpPr/>
           <p:nvPr/>
         </p:nvSpPr>
         <p:spPr>
           <a:xfrm>
-            <a:off x="3429000" y="1645920"/>
-            <a:ext cx="2606040" cy="1463040"/>
-          </a:xfrm>
-          <a:prstGeom prst="roundRect">
+            <a:off x="6095390" y="0"/>
+            <a:ext cx="6096304" cy="54864"/>
+          </a:xfrm>
+          <a:prstGeom prst="rect">
             <a:avLst/>
           </a:prstGeom>
           <a:solidFill>
-            <a:srgbClr val="121826"/>
+            <a:srgbClr val="A855F7"/>
           </a:solidFill>
-          <a:ln w="15240">
-            <a:solidFill>
-              <a:srgbClr val="1F293D"/>
-            </a:solidFill>
+          <a:ln>
+            <a:noFill/>
           </a:ln>
         </p:spPr>
         <p:style>
@@ -6763,11 +10370,37 @@
           </a:fontRef>
         </p:style>
         <p:txBody>
-          <a:bodyPr rtlCol="0" anchor="ctr" wrap="square"/>
-          <a:lstStyle/>
-          <a:p>
-            <a:pPr algn="ctr">
-              <a:defRPr sz="2800" b="1">
+          <a:bodyPr rtlCol="0" anchor="ctr"/>
+          <a:lstStyle/>
+          <a:p>
+            <a:pPr algn="ctr"/>
+          </a:p>
+        </p:txBody>
+      </p:sp>
+      <p:sp>
+        <p:nvSpPr>
+          <p:cNvPr id="5" name="TextBox 4"/>
+          <p:cNvSpPr txBox="1"/>
+          <p:nvPr/>
+        </p:nvSpPr>
+        <p:spPr>
+          <a:xfrm>
+            <a:off x="731520" y="384048"/>
+            <a:ext cx="10515600" cy="320040"/>
+          </a:xfrm>
+          <a:prstGeom prst="rect">
+            <a:avLst/>
+          </a:prstGeom>
+          <a:noFill/>
+        </p:spPr>
+        <p:txBody>
+          <a:bodyPr wrap="none">
+            <a:spAutoFit/>
+          </a:bodyPr>
+          <a:lstStyle/>
+          <a:p>
+            <a:pPr>
+              <a:defRPr sz="1050" b="1">
                 <a:solidFill>
                   <a:srgbClr val="38BDF8"/>
                 </a:solidFill>
@@ -6775,12 +10408,51 @@
               </a:defRPr>
             </a:pPr>
             <a:r>
-              <a:t>100%</a:t>
-            </a:r>
-          </a:p>
-          <a:p>
-            <a:pPr algn="ctr">
-              <a:defRPr sz="1200">
+              <a:t>BENCHMARK VERIFICATION</a:t>
+            </a:r>
+          </a:p>
+        </p:txBody>
+      </p:sp>
+      <p:sp>
+        <p:nvSpPr>
+          <p:cNvPr id="6" name="TextBox 5"/>
+          <p:cNvSpPr txBox="1"/>
+          <p:nvPr/>
+        </p:nvSpPr>
+        <p:spPr>
+          <a:xfrm>
+            <a:off x="731520" y="658368"/>
+            <a:ext cx="10698480" cy="685800"/>
+          </a:xfrm>
+          <a:prstGeom prst="rect">
+            <a:avLst/>
+          </a:prstGeom>
+          <a:noFill/>
+        </p:spPr>
+        <p:txBody>
+          <a:bodyPr wrap="square">
+            <a:spAutoFit/>
+          </a:bodyPr>
+          <a:lstStyle/>
+          <a:p>
+            <a:pPr>
+              <a:defRPr sz="2600" b="1">
+                <a:solidFill>
+                  <a:srgbClr val="F8FAFC"/>
+                </a:solidFill>
+                <a:latin typeface="Arial"/>
+              </a:defRPr>
+            </a:pPr>
+            <a:r>
+              <a:t>6 Golden Evaluation Demos (100% Hackathon Coverage)</a:t>
+            </a:r>
+          </a:p>
+          <a:p>
+            <a:pPr>
+              <a:spcBef>
+                <a:spcPts val="300"/>
+              </a:spcBef>
+              <a:defRPr sz="1300">
                 <a:solidFill>
                   <a:srgbClr val="94A3B8"/>
                 </a:solidFill>
@@ -6788,7 +10460,7 @@
               </a:defRPr>
             </a:pPr>
             <a:r>
-              <a:t>Test Pass Rate (Vitest)</a:t>
+              <a:t>Live dynamic execution against all Problem 5 evaluation categories in &lt; 5ms.</a:t>
             </a:r>
           </a:p>
         </p:txBody>
@@ -6801,18 +10473,18 @@
         </p:nvSpPr>
         <p:spPr>
           <a:xfrm>
-            <a:off x="6126480" y="1645920"/>
-            <a:ext cx="2606040" cy="1463040"/>
+            <a:off x="731520" y="1554480"/>
+            <a:ext cx="3474720" cy="2194560"/>
           </a:xfrm>
           <a:prstGeom prst="roundRect">
             <a:avLst/>
           </a:prstGeom>
           <a:solidFill>
-            <a:srgbClr val="121826"/>
+            <a:srgbClr val="28121C"/>
           </a:solidFill>
           <a:ln w="15240">
             <a:solidFill>
-              <a:srgbClr val="1F293D"/>
+              <a:srgbClr val="F43F5E"/>
             </a:solidFill>
           </a:ln>
         </p:spPr>
@@ -6835,28 +10507,42 @@
           <a:lstStyle/>
           <a:p>
             <a:pPr algn="ctr">
-              <a:defRPr sz="2800" b="1">
-                <a:solidFill>
-                  <a:srgbClr val="10B981"/>
-                </a:solidFill>
-                <a:latin typeface="Arial"/>
-              </a:defRPr>
-            </a:pPr>
-            <a:r>
-              <a:t>5ms</a:t>
-            </a:r>
-          </a:p>
-          <a:p>
-            <a:pPr algn="ctr">
-              <a:defRPr sz="1200">
-                <a:solidFill>
-                  <a:srgbClr val="94A3B8"/>
-                </a:solidFill>
-                <a:latin typeface="Arial"/>
-              </a:defRPr>
-            </a:pPr>
-            <a:r>
-              <a:t>Live Benchmark Duration</a:t>
+              <a:defRPr sz="1400" b="1">
+                <a:solidFill>
+                  <a:srgbClr val="F43F5E"/>
+                </a:solidFill>
+              </a:defRPr>
+            </a:pPr>
+            <a:r>
+              <a:t>1. Renamed CLI Flag</a:t>
+            </a:r>
+          </a:p>
+          <a:p>
+            <a:pPr>
+              <a:spcBef>
+                <a:spcPts val="600"/>
+              </a:spcBef>
+              <a:defRPr sz="1000">
+                <a:solidFill>
+                  <a:srgbClr val="F8FAFC"/>
+                </a:solidFill>
+                <a:latin typeface="Consolas"/>
+              </a:defRPr>
+            </a:pPr>
+            <a:r>
+              <a:t>cli.py: --timeout -&gt; --deadline</a:t>
+            </a:r>
+            <a:br/>
+            <a:r>
+              <a:t>Doc: 'Use --timeout to stop slow jobs.'</a:t>
+            </a:r>
+            <a:br/>
+            <a:r>
+              <a:t>Status: FAIL (High, 98% Conf)</a:t>
+            </a:r>
+            <a:br/>
+            <a:r>
+              <a:t>Suggested: 'Use --deadline to stop slow jobs.'</a:t>
             </a:r>
           </a:p>
         </p:txBody>
@@ -6869,18 +10555,18 @@
         </p:nvSpPr>
         <p:spPr>
           <a:xfrm>
-            <a:off x="8823960" y="1645920"/>
-            <a:ext cx="2606040" cy="1463040"/>
+            <a:off x="4297680" y="1554480"/>
+            <a:ext cx="3474720" cy="2194560"/>
           </a:xfrm>
           <a:prstGeom prst="roundRect">
             <a:avLst/>
           </a:prstGeom>
           <a:solidFill>
-            <a:srgbClr val="121826"/>
+            <a:srgbClr val="261E0F"/>
           </a:solidFill>
           <a:ln w="15240">
             <a:solidFill>
-              <a:srgbClr val="1F293D"/>
+              <a:srgbClr val="F59E0B"/>
             </a:solidFill>
           </a:ln>
         </p:spPr>
@@ -6903,28 +10589,42 @@
           <a:lstStyle/>
           <a:p>
             <a:pPr algn="ctr">
-              <a:defRPr sz="2800" b="1">
+              <a:defRPr sz="1400" b="1">
                 <a:solidFill>
                   <a:srgbClr val="F59E0B"/>
                 </a:solidFill>
-                <a:latin typeface="Arial"/>
-              </a:defRPr>
-            </a:pPr>
-            <a:r>
-              <a:t>Qwen 2.5 7B</a:t>
-            </a:r>
-          </a:p>
-          <a:p>
-            <a:pPr algn="ctr">
-              <a:defRPr sz="1200">
-                <a:solidFill>
-                  <a:srgbClr val="94A3B8"/>
-                </a:solidFill>
-                <a:latin typeface="Arial"/>
-              </a:defRPr>
-            </a:pPr>
-            <a:r>
-              <a:t>Open-Weight Model Used</a:t>
+              </a:defRPr>
+            </a:pPr>
+            <a:r>
+              <a:t>2. Changed Default Value</a:t>
+            </a:r>
+          </a:p>
+          <a:p>
+            <a:pPr>
+              <a:spcBef>
+                <a:spcPts val="600"/>
+              </a:spcBef>
+              <a:defRPr sz="1000">
+                <a:solidFill>
+                  <a:srgbClr val="F8FAFC"/>
+                </a:solidFill>
+                <a:latin typeface="Consolas"/>
+              </a:defRPr>
+            </a:pPr>
+            <a:r>
+              <a:t>config.js: DEFAULT_TIMEOUT = 30 -&gt; 60</a:t>
+            </a:r>
+            <a:br/>
+            <a:r>
+              <a:t>Doc: 'The default timeout is 30 seconds.'</a:t>
+            </a:r>
+            <a:br/>
+            <a:r>
+              <a:t>Status: FAIL (High, 93% Conf)</a:t>
+            </a:r>
+            <a:br/>
+            <a:r>
+              <a:t>Suggested: 'The default timeout is 60 seconds.'</a:t>
             </a:r>
           </a:p>
         </p:txBody>
@@ -6937,18 +10637,18 @@
         </p:nvSpPr>
         <p:spPr>
           <a:xfrm>
-            <a:off x="731520" y="3383280"/>
-            <a:ext cx="5212080" cy="2743200"/>
+            <a:off x="7863840" y="1554480"/>
+            <a:ext cx="3474720" cy="2194560"/>
           </a:xfrm>
           <a:prstGeom prst="roundRect">
             <a:avLst/>
           </a:prstGeom>
           <a:solidFill>
-            <a:srgbClr val="121826"/>
+            <a:srgbClr val="0D2620"/>
           </a:solidFill>
           <a:ln w="15240">
             <a:solidFill>
-              <a:srgbClr val="1F293D"/>
+              <a:srgbClr val="10B981"/>
             </a:solidFill>
           </a:ln>
         </p:spPr>
@@ -6971,41 +10671,42 @@
           <a:lstStyle/>
           <a:p>
             <a:pPr algn="ctr">
-              <a:defRPr sz="1600" b="1">
-                <a:solidFill>
-                  <a:srgbClr val="38BDF8"/>
-                </a:solidFill>
-              </a:defRPr>
-            </a:pPr>
-            <a:r>
-              <a:t>Reusable GitHub Action (action.yml)</a:t>
+              <a:defRPr sz="1400" b="1">
+                <a:solidFill>
+                  <a:srgbClr val="10B981"/>
+                </a:solidFill>
+              </a:defRPr>
+            </a:pPr>
+            <a:r>
+              <a:t>3. False-Positive Control</a:t>
             </a:r>
           </a:p>
           <a:p>
             <a:pPr>
               <a:spcBef>
-                <a:spcPts val="800"/>
+                <a:spcPts val="600"/>
               </a:spcBef>
-              <a:defRPr sz="1200">
+              <a:defRPr sz="1000">
                 <a:solidFill>
                   <a:srgbClr val="F8FAFC"/>
                 </a:solidFill>
-              </a:defRPr>
-            </a:pPr>
-            <a:r>
-              <a:t>• Reusable GitHub Action for any open-source repo</a:t>
+                <a:latin typeface="Consolas"/>
+              </a:defRPr>
+            </a:pPr>
+            <a:r>
+              <a:t>utils.js: Internal math refactor</a:t>
             </a:r>
             <a:br/>
             <a:r>
-              <a:t>• Automates PR comments with diff suggestions</a:t>
+              <a:t>Doc: 'Fast calculation utilities'</a:t>
             </a:r>
             <a:br/>
             <a:r>
-              <a:t>• Fully supports GitHub Actions runners with Node 20+</a:t>
+              <a:t>Status: PASS (0 Findings)</a:t>
             </a:r>
             <a:br/>
             <a:r>
-              <a:t>• Blocks PR merging with exit code 1 on HIGH severity drift</a:t>
+              <a:t>Proves: Zero false alarms on refactors!</a:t>
             </a:r>
           </a:p>
         </p:txBody>
@@ -7018,18 +10719,18 @@
         </p:nvSpPr>
         <p:spPr>
           <a:xfrm>
-            <a:off x="6217920" y="3383280"/>
-            <a:ext cx="5212080" cy="2743200"/>
+            <a:off x="731520" y="3931920"/>
+            <a:ext cx="3474720" cy="2194560"/>
           </a:xfrm>
           <a:prstGeom prst="roundRect">
             <a:avLst/>
           </a:prstGeom>
           <a:solidFill>
-            <a:srgbClr val="121826"/>
+            <a:srgbClr val="0F1D38"/>
           </a:solidFill>
           <a:ln w="15240">
             <a:solidFill>
-              <a:srgbClr val="1F293D"/>
+              <a:srgbClr val="38BDF8"/>
             </a:solidFill>
           </a:ln>
         </p:spPr>
@@ -7052,41 +10753,206 @@
           <a:lstStyle/>
           <a:p>
             <a:pPr algn="ctr">
-              <a:defRPr sz="1600" b="1">
-                <a:solidFill>
-                  <a:srgbClr val="10B981"/>
-                </a:solidFill>
-              </a:defRPr>
-            </a:pPr>
-            <a:r>
-              <a:t>Engineering Optimizations</a:t>
+              <a:defRPr sz="1400" b="1">
+                <a:solidFill>
+                  <a:srgbClr val="38BDF8"/>
+                </a:solidFill>
+              </a:defRPr>
+            </a:pPr>
+            <a:r>
+              <a:t>4. Config Table Drift</a:t>
             </a:r>
           </a:p>
           <a:p>
             <a:pPr>
               <a:spcBef>
-                <a:spcPts val="800"/>
+                <a:spcPts val="600"/>
               </a:spcBef>
-              <a:defRPr sz="1200">
+              <a:defRPr sz="1000">
                 <a:solidFill>
                   <a:srgbClr val="F8FAFC"/>
                 </a:solidFill>
-              </a:defRPr>
-            </a:pPr>
-            <a:r>
-              <a:t>• O(1) Token Lookups: Pre-computed token and stem sets</a:t>
+                <a:latin typeface="Consolas"/>
+              </a:defRPr>
+            </a:pPr>
+            <a:r>
+              <a:t>config.js: TIMEOUT_SECONDS = 30 -&gt; 60</a:t>
             </a:r>
             <a:br/>
             <a:r>
-              <a:t>• Worker Pool Concurrency: Parallelized LLM inference</a:t>
+              <a:t>Doc: | TIMEOUT_SECONDS | 30 | Seconds |</a:t>
             </a:r>
             <a:br/>
             <a:r>
-              <a:t>• Parallel Async I/O: Fast repository traversal</a:t>
+              <a:t>Status: FAIL (High, 97% Conf)</a:t>
             </a:r>
             <a:br/>
             <a:r>
-              <a:t>• In-Memory RAM Caching: Sub-millisecond API response</a:t>
+              <a:t>Suggested: Updates table row to 60</a:t>
+            </a:r>
+          </a:p>
+        </p:txBody>
+      </p:sp>
+      <p:sp>
+        <p:nvSpPr>
+          <p:cNvPr id="11" name="Rounded Rectangle 10"/>
+          <p:cNvSpPr/>
+          <p:nvPr/>
+        </p:nvSpPr>
+        <p:spPr>
+          <a:xfrm>
+            <a:off x="4297680" y="3931920"/>
+            <a:ext cx="3474720" cy="2194560"/>
+          </a:xfrm>
+          <a:prstGeom prst="roundRect">
+            <a:avLst/>
+          </a:prstGeom>
+          <a:solidFill>
+            <a:srgbClr val="1A1433"/>
+          </a:solidFill>
+          <a:ln w="15240">
+            <a:solidFill>
+              <a:srgbClr val="A855F7"/>
+            </a:solidFill>
+          </a:ln>
+        </p:spPr>
+        <p:style>
+          <a:lnRef idx="1">
+            <a:schemeClr val="accent1"/>
+          </a:lnRef>
+          <a:fillRef idx="3">
+            <a:schemeClr val="accent1"/>
+          </a:fillRef>
+          <a:effectRef idx="2">
+            <a:schemeClr val="accent1"/>
+          </a:effectRef>
+          <a:fontRef idx="minor">
+            <a:schemeClr val="lt1"/>
+          </a:fontRef>
+        </p:style>
+        <p:txBody>
+          <a:bodyPr rtlCol="0" anchor="ctr" wrap="square"/>
+          <a:lstStyle/>
+          <a:p>
+            <a:pPr algn="ctr">
+              <a:defRPr sz="1400" b="1">
+                <a:solidFill>
+                  <a:srgbClr val="A855F7"/>
+                </a:solidFill>
+              </a:defRPr>
+            </a:pPr>
+            <a:r>
+              <a:t>5. API Parameter Signature</a:t>
+            </a:r>
+          </a:p>
+          <a:p>
+            <a:pPr>
+              <a:spcBef>
+                <a:spcPts val="600"/>
+              </a:spcBef>
+              <a:defRPr sz="1000">
+                <a:solidFill>
+                  <a:srgbClr val="F8FAFC"/>
+                </a:solidFill>
+                <a:latin typeface="Consolas"/>
+              </a:defRPr>
+            </a:pPr>
+            <a:r>
+              <a:t>api.js: registerUser(email, pass, tenantId)</a:t>
+            </a:r>
+            <a:br/>
+            <a:r>
+              <a:t>Doc: 'call registerUser(email, password)'</a:t>
+            </a:r>
+            <a:br/>
+            <a:r>
+              <a:t>Status: FAIL (High, 91% Conf)</a:t>
+            </a:r>
+            <a:br/>
+            <a:r>
+              <a:t>Suggested: Updates parameter list</a:t>
+            </a:r>
+          </a:p>
+        </p:txBody>
+      </p:sp>
+      <p:sp>
+        <p:nvSpPr>
+          <p:cNvPr id="12" name="Rounded Rectangle 11"/>
+          <p:cNvSpPr/>
+          <p:nvPr/>
+        </p:nvSpPr>
+        <p:spPr>
+          <a:xfrm>
+            <a:off x="7863840" y="3931920"/>
+            <a:ext cx="3474720" cy="2194560"/>
+          </a:xfrm>
+          <a:prstGeom prst="roundRect">
+            <a:avLst/>
+          </a:prstGeom>
+          <a:solidFill>
+            <a:srgbClr val="28121C"/>
+          </a:solidFill>
+          <a:ln w="15240">
+            <a:solidFill>
+              <a:srgbClr val="F43F5E"/>
+            </a:solidFill>
+          </a:ln>
+        </p:spPr>
+        <p:style>
+          <a:lnRef idx="1">
+            <a:schemeClr val="accent1"/>
+          </a:lnRef>
+          <a:fillRef idx="3">
+            <a:schemeClr val="accent1"/>
+          </a:fillRef>
+          <a:effectRef idx="2">
+            <a:schemeClr val="accent1"/>
+          </a:effectRef>
+          <a:fontRef idx="minor">
+            <a:schemeClr val="lt1"/>
+          </a:fontRef>
+        </p:style>
+        <p:txBody>
+          <a:bodyPr rtlCol="0" anchor="ctr" wrap="square"/>
+          <a:lstStyle/>
+          <a:p>
+            <a:pPr algn="ctr">
+              <a:defRPr sz="1400" b="1">
+                <a:solidFill>
+                  <a:srgbClr val="F43F5E"/>
+                </a:solidFill>
+              </a:defRPr>
+            </a:pPr>
+            <a:r>
+              <a:t>6. Deleted Feature / Route</a:t>
+            </a:r>
+          </a:p>
+          <a:p>
+            <a:pPr>
+              <a:spcBef>
+                <a:spcPts val="600"/>
+              </a:spcBef>
+              <a:defRPr sz="1000">
+                <a:solidFill>
+                  <a:srgbClr val="F8FAFC"/>
+                </a:solidFill>
+                <a:latin typeface="Consolas"/>
+              </a:defRPr>
+            </a:pPr>
+            <a:r>
+              <a:t>routes.js: Deleted /api/v1/legacy-export</a:t>
+            </a:r>
+            <a:br/>
+            <a:r>
+              <a:t>Doc: 'Use /api/v1/legacy-export for CSV'</a:t>
+            </a:r>
+            <a:br/>
+            <a:r>
+              <a:t>Status: FAIL (High, 90% Conf)</a:t>
+            </a:r>
+            <a:br/>
+            <a:r>
+              <a:t>Suggested: Flags obsolete route references</a:t>
             </a:r>
           </a:p>
         </p:txBody>
@@ -7124,7 +10990,7 @@
             <a:avLst/>
           </a:prstGeom>
           <a:solidFill>
-            <a:srgbClr val="090D16"/>
+            <a:srgbClr val="0B0F19"/>
           </a:solidFill>
           <a:ln>
             <a:noFill/>
@@ -7154,97 +11020,23 @@
       </p:sp>
       <p:sp>
         <p:nvSpPr>
-          <p:cNvPr id="3" name="TextBox 2"/>
-          <p:cNvSpPr txBox="1"/>
-          <p:nvPr/>
-        </p:nvSpPr>
-        <p:spPr>
-          <a:xfrm>
-            <a:off x="731520" y="457200"/>
-            <a:ext cx="10058400" cy="320040"/>
-          </a:xfrm>
-          <a:prstGeom prst="rect">
-            <a:avLst/>
-          </a:prstGeom>
-          <a:noFill/>
-        </p:spPr>
-        <p:txBody>
-          <a:bodyPr wrap="square">
-            <a:spAutoFit/>
-          </a:bodyPr>
-          <a:lstStyle/>
-          <a:p>
-            <a:pPr>
-              <a:defRPr sz="1100" b="1">
-                <a:solidFill>
-                  <a:srgbClr val="38BDF8"/>
-                </a:solidFill>
-                <a:latin typeface="Arial"/>
-              </a:defRPr>
-            </a:pPr>
-            <a:r>
-              <a:t>DRIFTLENS | HACKTOBERFEST 2026</a:t>
-            </a:r>
-          </a:p>
-        </p:txBody>
-      </p:sp>
-      <p:sp>
-        <p:nvSpPr>
-          <p:cNvPr id="4" name="TextBox 3"/>
-          <p:cNvSpPr txBox="1"/>
-          <p:nvPr/>
-        </p:nvSpPr>
-        <p:spPr>
-          <a:xfrm>
-            <a:off x="731520" y="777240"/>
-            <a:ext cx="10515600" cy="731520"/>
-          </a:xfrm>
-          <a:prstGeom prst="rect">
-            <a:avLst/>
-          </a:prstGeom>
-          <a:noFill/>
-        </p:spPr>
-        <p:txBody>
-          <a:bodyPr wrap="square">
-            <a:spAutoFit/>
-          </a:bodyPr>
-          <a:lstStyle/>
-          <a:p>
-            <a:pPr>
-              <a:defRPr sz="2800" b="1">
-                <a:solidFill>
-                  <a:srgbClr val="F8FAFC"/>
-                </a:solidFill>
-                <a:latin typeface="Arial"/>
-              </a:defRPr>
-            </a:pPr>
-            <a:r>
-              <a:t>Summary: Why DriftLens Wins Problem 5</a:t>
-            </a:r>
-          </a:p>
-        </p:txBody>
-      </p:sp>
-      <p:sp>
-        <p:nvSpPr>
-          <p:cNvPr id="5" name="Rounded Rectangle 4"/>
+          <p:cNvPr id="3" name="Rectangle 2"/>
           <p:cNvSpPr/>
           <p:nvPr/>
         </p:nvSpPr>
         <p:spPr>
           <a:xfrm>
-            <a:off x="731520" y="1645920"/>
-            <a:ext cx="10698480" cy="4389120"/>
-          </a:xfrm>
-          <a:prstGeom prst="roundRect">
+            <a:off x="0" y="0"/>
+            <a:ext cx="6095390" cy="54864"/>
+          </a:xfrm>
+          <a:prstGeom prst="rect">
             <a:avLst/>
           </a:prstGeom>
           <a:solidFill>
-            <a:srgbClr val="121826"/>
+            <a:srgbClr val="38BDF8"/>
           </a:solidFill>
-          <a:ln w="15240">
-            <a:solidFill>
-              <a:srgbClr val="1F293D"/>
-            </a:solidFill>
+          <a:ln>
+            <a:noFill/>
           </a:ln>
         </p:spPr>
         <p:style>
@@ -7262,93 +11054,461 @@
           </a:fontRef>
         </p:style>
         <p:txBody>
-          <a:bodyPr rtlCol="0" anchor="ctr" wrap="square"/>
-          <a:lstStyle/>
-          <a:p>
-            <a:pPr algn="ctr">
-              <a:defRPr sz="2200" b="1">
+          <a:bodyPr rtlCol="0" anchor="ctr"/>
+          <a:lstStyle/>
+          <a:p>
+            <a:pPr algn="ctr"/>
+          </a:p>
+        </p:txBody>
+      </p:sp>
+      <p:sp>
+        <p:nvSpPr>
+          <p:cNvPr id="4" name="Rectangle 3"/>
+          <p:cNvSpPr/>
+          <p:nvPr/>
+        </p:nvSpPr>
+        <p:spPr>
+          <a:xfrm>
+            <a:off x="6095390" y="0"/>
+            <a:ext cx="6096304" cy="54864"/>
+          </a:xfrm>
+          <a:prstGeom prst="rect">
+            <a:avLst/>
+          </a:prstGeom>
+          <a:solidFill>
+            <a:srgbClr val="A855F7"/>
+          </a:solidFill>
+          <a:ln>
+            <a:noFill/>
+          </a:ln>
+        </p:spPr>
+        <p:style>
+          <a:lnRef idx="1">
+            <a:schemeClr val="accent1"/>
+          </a:lnRef>
+          <a:fillRef idx="3">
+            <a:schemeClr val="accent1"/>
+          </a:fillRef>
+          <a:effectRef idx="2">
+            <a:schemeClr val="accent1"/>
+          </a:effectRef>
+          <a:fontRef idx="minor">
+            <a:schemeClr val="lt1"/>
+          </a:fontRef>
+        </p:style>
+        <p:txBody>
+          <a:bodyPr rtlCol="0" anchor="ctr"/>
+          <a:lstStyle/>
+          <a:p>
+            <a:pPr algn="ctr"/>
+          </a:p>
+        </p:txBody>
+      </p:sp>
+      <p:sp>
+        <p:nvSpPr>
+          <p:cNvPr id="5" name="TextBox 4"/>
+          <p:cNvSpPr txBox="1"/>
+          <p:nvPr/>
+        </p:nvSpPr>
+        <p:spPr>
+          <a:xfrm>
+            <a:off x="731520" y="384048"/>
+            <a:ext cx="10515600" cy="320040"/>
+          </a:xfrm>
+          <a:prstGeom prst="rect">
+            <a:avLst/>
+          </a:prstGeom>
+          <a:noFill/>
+        </p:spPr>
+        <p:txBody>
+          <a:bodyPr wrap="none">
+            <a:spAutoFit/>
+          </a:bodyPr>
+          <a:lstStyle/>
+          <a:p>
+            <a:pPr>
+              <a:defRPr sz="1050" b="1">
                 <a:solidFill>
                   <a:srgbClr val="38BDF8"/>
                 </a:solidFill>
-              </a:defRPr>
-            </a:pPr>
-            <a:r>
-              <a:t>Key Takeaways for Judges</a:t>
+                <a:latin typeface="Arial"/>
+              </a:defRPr>
+            </a:pPr>
+            <a:r>
+              <a:t>PRECISION ENGINEERING</a:t>
+            </a:r>
+          </a:p>
+        </p:txBody>
+      </p:sp>
+      <p:sp>
+        <p:nvSpPr>
+          <p:cNvPr id="6" name="TextBox 5"/>
+          <p:cNvSpPr txBox="1"/>
+          <p:nvPr/>
+        </p:nvSpPr>
+        <p:spPr>
+          <a:xfrm>
+            <a:off x="731520" y="658368"/>
+            <a:ext cx="10698480" cy="685800"/>
+          </a:xfrm>
+          <a:prstGeom prst="rect">
+            <a:avLst/>
+          </a:prstGeom>
+          <a:noFill/>
+        </p:spPr>
+        <p:txBody>
+          <a:bodyPr wrap="square">
+            <a:spAutoFit/>
+          </a:bodyPr>
+          <a:lstStyle/>
+          <a:p>
+            <a:pPr>
+              <a:defRPr sz="2600" b="1">
+                <a:solidFill>
+                  <a:srgbClr val="F8FAFC"/>
+                </a:solidFill>
+                <a:latin typeface="Arial"/>
+              </a:defRPr>
+            </a:pPr>
+            <a:r>
+              <a:t>False-Positive Control &amp; The Same-PR Shield</a:t>
             </a:r>
           </a:p>
           <a:p>
             <a:pPr>
               <a:spcBef>
-                <a:spcPts val="1000"/>
+                <a:spcPts val="300"/>
               </a:spcBef>
               <a:defRPr sz="1300">
                 <a:solidFill>
+                  <a:srgbClr val="94A3B8"/>
+                </a:solidFill>
+                <a:latin typeface="Arial"/>
+              </a:defRPr>
+            </a:pPr>
+            <a:r>
+              <a:t>Distinguishing between changes that need documentation updates vs those that are already handled.</a:t>
+            </a:r>
+          </a:p>
+        </p:txBody>
+      </p:sp>
+      <p:sp>
+        <p:nvSpPr>
+          <p:cNvPr id="7" name="Rounded Rectangle 6"/>
+          <p:cNvSpPr/>
+          <p:nvPr/>
+        </p:nvSpPr>
+        <p:spPr>
+          <a:xfrm>
+            <a:off x="731520" y="1554480"/>
+            <a:ext cx="5212080" cy="4754880"/>
+          </a:xfrm>
+          <a:prstGeom prst="roundRect">
+            <a:avLst/>
+          </a:prstGeom>
+          <a:solidFill>
+            <a:srgbClr val="0D2620"/>
+          </a:solidFill>
+          <a:ln w="19050">
+            <a:solidFill>
+              <a:srgbClr val="10B981"/>
+            </a:solidFill>
+          </a:ln>
+        </p:spPr>
+        <p:style>
+          <a:lnRef idx="1">
+            <a:schemeClr val="accent1"/>
+          </a:lnRef>
+          <a:fillRef idx="3">
+            <a:schemeClr val="accent1"/>
+          </a:fillRef>
+          <a:effectRef idx="2">
+            <a:schemeClr val="accent1"/>
+          </a:effectRef>
+          <a:fontRef idx="minor">
+            <a:schemeClr val="lt1"/>
+          </a:fontRef>
+        </p:style>
+        <p:txBody>
+          <a:bodyPr rtlCol="0" anchor="ctr" wrap="square"/>
+          <a:lstStyle/>
+          <a:p>
+            <a:pPr algn="ctr">
+              <a:defRPr sz="1700" b="1">
+                <a:solidFill>
+                  <a:srgbClr val="10B981"/>
+                </a:solidFill>
+              </a:defRPr>
+            </a:pPr>
+            <a:r>
+              <a:t>🛡️ The Same-PR Update Shield</a:t>
+            </a:r>
+          </a:p>
+          <a:p>
+            <a:br/>
+            <a:pPr>
+              <a:defRPr sz="1200">
+                <a:solidFill>
                   <a:srgbClr val="F8FAFC"/>
                 </a:solidFill>
               </a:defRPr>
             </a:pPr>
             <a:r>
-              <a:t>• 1. Solves the Real Challenge: Identifies documentation drift in explanatory prose, configuration tables, and API tutorials where standard code-block test runners are blind.</a:t>
-            </a:r>
-          </a:p>
-          <a:p>
-            <a:pPr>
-              <a:spcBef>
-                <a:spcPts val="1000"/>
-              </a:spcBef>
-              <a:defRPr sz="1300">
+              <a:t>Scenario: A conscientious developer bumps DEFAULT_TIMEOUT = 60 and updates README.md to '60 seconds' in the same commit.</a:t>
+            </a:r>
+          </a:p>
+          <a:p>
+            <a:br/>
+            <a:pPr>
+              <a:defRPr sz="1200" b="1">
                 <a:solidFill>
                   <a:srgbClr val="F8FAFC"/>
                 </a:solidFill>
               </a:defRPr>
             </a:pPr>
             <a:r>
-              <a:t>• 2. Pre-Correction Detection: Flags the exact contradictory documentation sentence on the code commit, before any corrective documentation commit is required.</a:t>
-            </a:r>
-          </a:p>
-          <a:p>
-            <a:pPr>
-              <a:spcBef>
-                <a:spcPts val="1000"/>
-              </a:spcBef>
-              <a:defRPr sz="1300">
+              <a:t>• Hunk-Aware Proximity Inspection:</a:t>
+            </a:r>
+          </a:p>
+          <a:p>
+            <a:pPr>
+              <a:defRPr sz="1100">
+                <a:solidFill>
+                  <a:srgbClr val="CBD5E1"/>
+                </a:solidFill>
+              </a:defRPr>
+            </a:pPr>
+            <a:r>
+              <a:t>DriftLens checks whether documentation changes in the PR overlap with the affected sentence lines.</a:t>
+            </a:r>
+          </a:p>
+          <a:p>
+            <a:br/>
+            <a:pPr>
+              <a:defRPr sz="1200" b="1">
                 <a:solidFill>
                   <a:srgbClr val="F8FAFC"/>
                 </a:solidFill>
               </a:defRPr>
             </a:pPr>
             <a:r>
-              <a:t>• 3. Zero Hallucinations: Deterministic AST and diff parsing anchors all file paths and line ranges; the AI model only performs bounded semantic reasoning.</a:t>
-            </a:r>
-          </a:p>
-          <a:p>
-            <a:pPr>
-              <a:spcBef>
-                <a:spcPts val="1000"/>
-              </a:spcBef>
-              <a:defRPr sz="1300">
+              <a:t>• New Value Verification:</a:t>
+            </a:r>
+          </a:p>
+          <a:p>
+            <a:pPr>
+              <a:defRPr sz="1100">
+                <a:solidFill>
+                  <a:srgbClr val="CBD5E1"/>
+                </a:solidFill>
+              </a:defRPr>
+            </a:pPr>
+            <a:r>
+              <a:t>If the added lines in the doc hunk already contain the new value ('60') or renamed flag ('--deadline'), drift is suppressed.</a:t>
+            </a:r>
+          </a:p>
+          <a:p>
+            <a:br/>
+            <a:pPr>
+              <a:defRPr sz="1200" b="1">
                 <a:solidFill>
                   <a:srgbClr val="F8FAFC"/>
                 </a:solidFill>
               </a:defRPr>
             </a:pPr>
             <a:r>
-              <a:t>• 4. 100% Hackathon Rule Compliant: Powered exclusively by open-weight Qwen 2.5 7B. Zero closed/proprietary APIs.</a:t>
-            </a:r>
-          </a:p>
-          <a:p>
-            <a:pPr>
-              <a:spcBef>
-                <a:spcPts val="1000"/>
-              </a:spcBef>
-              <a:defRPr sz="1300">
+              <a:t>• Sentence Deletion Verification:</a:t>
+            </a:r>
+          </a:p>
+          <a:p>
+            <a:pPr>
+              <a:defRPr sz="1100">
+                <a:solidFill>
+                  <a:srgbClr val="CBD5E1"/>
+                </a:solidFill>
+              </a:defRPr>
+            </a:pPr>
+            <a:r>
+              <a:t>If the obsolete statement was removed in the documentation diff, DriftLens acknowledges the fix.</a:t>
+            </a:r>
+          </a:p>
+          <a:p>
+            <a:br/>
+            <a:pPr>
+              <a:defRPr sz="1200" b="1">
                 <a:solidFill>
                   <a:srgbClr val="F8FAFC"/>
                 </a:solidFill>
               </a:defRPr>
             </a:pPr>
             <a:r>
-              <a:t>• 5. Complete Developer Experience: CLI tool + Reusable GitHub Action + Interactive Web Studio with Visual Blast Radius Graph + 1-Click Remediation + Starter README Generator.</a:t>
+              <a:t>• The Result:</a:t>
+            </a:r>
+          </a:p>
+          <a:p>
+            <a:pPr>
+              <a:defRPr sz="1100">
+                <a:solidFill>
+                  <a:srgbClr val="CBD5E1"/>
+                </a:solidFill>
+              </a:defRPr>
+            </a:pPr>
+            <a:r>
+              <a:t>Zero duplicate warnings when developers do their job correctly!</a:t>
+            </a:r>
+          </a:p>
+        </p:txBody>
+      </p:sp>
+      <p:sp>
+        <p:nvSpPr>
+          <p:cNvPr id="8" name="Rounded Rectangle 7"/>
+          <p:cNvSpPr/>
+          <p:nvPr/>
+        </p:nvSpPr>
+        <p:spPr>
+          <a:xfrm>
+            <a:off x="6217920" y="1554480"/>
+            <a:ext cx="5212080" cy="4754880"/>
+          </a:xfrm>
+          <a:prstGeom prst="roundRect">
+            <a:avLst/>
+          </a:prstGeom>
+          <a:solidFill>
+            <a:srgbClr val="121A2C"/>
+          </a:solidFill>
+          <a:ln w="19050">
+            <a:solidFill>
+              <a:srgbClr val="38BDF8"/>
+            </a:solidFill>
+          </a:ln>
+        </p:spPr>
+        <p:style>
+          <a:lnRef idx="1">
+            <a:schemeClr val="accent1"/>
+          </a:lnRef>
+          <a:fillRef idx="3">
+            <a:schemeClr val="accent1"/>
+          </a:fillRef>
+          <a:effectRef idx="2">
+            <a:schemeClr val="accent1"/>
+          </a:effectRef>
+          <a:fontRef idx="minor">
+            <a:schemeClr val="lt1"/>
+          </a:fontRef>
+        </p:style>
+        <p:txBody>
+          <a:bodyPr rtlCol="0" anchor="ctr" wrap="square"/>
+          <a:lstStyle/>
+          <a:p>
+            <a:pPr algn="ctr">
+              <a:defRPr sz="1700" b="1">
+                <a:solidFill>
+                  <a:srgbClr val="38BDF8"/>
+                </a:solidFill>
+              </a:defRPr>
+            </a:pPr>
+            <a:r>
+              <a:t>⚡ Non-Functional Code Change Filtering</a:t>
+            </a:r>
+          </a:p>
+          <a:p>
+            <a:br/>
+            <a:pPr>
+              <a:defRPr sz="1200" b="1">
+                <a:solidFill>
+                  <a:srgbClr val="F8FAFC"/>
+                </a:solidFill>
+              </a:defRPr>
+            </a:pPr>
+            <a:r>
+              <a:t>• Comments Are Not Entities:</a:t>
+            </a:r>
+          </a:p>
+          <a:p>
+            <a:pPr>
+              <a:defRPr sz="1100">
+                <a:solidFill>
+                  <a:srgbClr val="CBD5E1"/>
+                </a:solidFill>
+              </a:defRPr>
+            </a:pPr>
+            <a:r>
+              <a:t>Code comments like '// TODO: change --timeout' are ignored so comments never trigger false drift.</a:t>
+            </a:r>
+          </a:p>
+          <a:p>
+            <a:br/>
+            <a:pPr>
+              <a:defRPr sz="1200" b="1">
+                <a:solidFill>
+                  <a:srgbClr val="F8FAFC"/>
+                </a:solidFill>
+              </a:defRPr>
+            </a:pPr>
+            <a:r>
+              <a:t>• Whitespace &amp; Formatting Immunity:</a:t>
+            </a:r>
+          </a:p>
+          <a:p>
+            <a:pPr>
+              <a:defRPr sz="1100">
+                <a:solidFill>
+                  <a:srgbClr val="CBD5E1"/>
+                </a:solidFill>
+              </a:defRPr>
+            </a:pPr>
+            <a:r>
+              <a:t>Internal code refactorings that preserve entity values (indentation, code cleanups) produce 0 findings.</a:t>
+            </a:r>
+          </a:p>
+          <a:p>
+            <a:br/>
+            <a:pPr>
+              <a:defRPr sz="1200" b="1">
+                <a:solidFill>
+                  <a:srgbClr val="F8FAFC"/>
+                </a:solidFill>
+              </a:defRPr>
+            </a:pPr>
+            <a:r>
+              <a:t>• Test File Isolation:</a:t>
+            </a:r>
+          </a:p>
+          <a:p>
+            <a:pPr>
+              <a:defRPr sz="1100">
+                <a:solidFill>
+                  <a:srgbClr val="CBD5E1"/>
+                </a:solidFill>
+              </a:defRPr>
+            </a:pPr>
+            <a:r>
+              <a:t>Changes inside tests/, *.spec.js, or __tests__/ are automatically categorized as 'tests' and ignored for public documentation drift.</a:t>
+            </a:r>
+          </a:p>
+          <a:p>
+            <a:br/>
+            <a:pPr>
+              <a:defRPr sz="1200" b="1">
+                <a:solidFill>
+                  <a:srgbClr val="F8FAFC"/>
+                </a:solidFill>
+              </a:defRPr>
+            </a:pPr>
+            <a:r>
+              <a:t>• Strict Value Equality Check:</a:t>
+            </a:r>
+          </a:p>
+          <a:p>
+            <a:pPr>
+              <a:defRPr sz="1100">
+                <a:solidFill>
+                  <a:srgbClr val="CBD5E1"/>
+                </a:solidFill>
+              </a:defRPr>
+            </a:pPr>
+            <a:r>
+              <a:t>If removed.value === added.value, the entity is recognized as unchanged and skipped immediately.</a:t>
             </a:r>
           </a:p>
         </p:txBody>
